--- a/week03/Lecture03.pptx
+++ b/week03/Lecture03.pptx
@@ -5,37 +5,43 @@
     <p:sldMasterId id="2147483648" r:id="rId1"/>
   </p:sldMasterIdLst>
   <p:notesMasterIdLst>
-    <p:notesMasterId r:id="rId30"/>
+    <p:notesMasterId r:id="rId36"/>
   </p:notesMasterIdLst>
   <p:sldIdLst>
     <p:sldId id="256" r:id="rId2"/>
-    <p:sldId id="257" r:id="rId3"/>
-    <p:sldId id="258" r:id="rId4"/>
-    <p:sldId id="259" r:id="rId5"/>
-    <p:sldId id="261" r:id="rId6"/>
-    <p:sldId id="285" r:id="rId7"/>
-    <p:sldId id="263" r:id="rId8"/>
-    <p:sldId id="262" r:id="rId9"/>
-    <p:sldId id="260" r:id="rId10"/>
-    <p:sldId id="264" r:id="rId11"/>
-    <p:sldId id="265" r:id="rId12"/>
-    <p:sldId id="267" r:id="rId13"/>
-    <p:sldId id="268" r:id="rId14"/>
-    <p:sldId id="269" r:id="rId15"/>
-    <p:sldId id="270" r:id="rId16"/>
-    <p:sldId id="272" r:id="rId17"/>
-    <p:sldId id="278" r:id="rId18"/>
-    <p:sldId id="280" r:id="rId19"/>
-    <p:sldId id="281" r:id="rId20"/>
-    <p:sldId id="273" r:id="rId21"/>
-    <p:sldId id="271" r:id="rId22"/>
-    <p:sldId id="274" r:id="rId23"/>
-    <p:sldId id="275" r:id="rId24"/>
-    <p:sldId id="277" r:id="rId25"/>
-    <p:sldId id="266" r:id="rId26"/>
-    <p:sldId id="282" r:id="rId27"/>
-    <p:sldId id="286" r:id="rId28"/>
-    <p:sldId id="283" r:id="rId29"/>
+    <p:sldId id="426" r:id="rId3"/>
+    <p:sldId id="427" r:id="rId4"/>
+    <p:sldId id="428" r:id="rId5"/>
+    <p:sldId id="429" r:id="rId6"/>
+    <p:sldId id="430" r:id="rId7"/>
+    <p:sldId id="257" r:id="rId8"/>
+    <p:sldId id="258" r:id="rId9"/>
+    <p:sldId id="259" r:id="rId10"/>
+    <p:sldId id="261" r:id="rId11"/>
+    <p:sldId id="285" r:id="rId12"/>
+    <p:sldId id="263" r:id="rId13"/>
+    <p:sldId id="262" r:id="rId14"/>
+    <p:sldId id="260" r:id="rId15"/>
+    <p:sldId id="264" r:id="rId16"/>
+    <p:sldId id="265" r:id="rId17"/>
+    <p:sldId id="267" r:id="rId18"/>
+    <p:sldId id="268" r:id="rId19"/>
+    <p:sldId id="269" r:id="rId20"/>
+    <p:sldId id="270" r:id="rId21"/>
+    <p:sldId id="272" r:id="rId22"/>
+    <p:sldId id="278" r:id="rId23"/>
+    <p:sldId id="280" r:id="rId24"/>
+    <p:sldId id="281" r:id="rId25"/>
+    <p:sldId id="273" r:id="rId26"/>
+    <p:sldId id="271" r:id="rId27"/>
+    <p:sldId id="274" r:id="rId28"/>
+    <p:sldId id="275" r:id="rId29"/>
+    <p:sldId id="277" r:id="rId30"/>
+    <p:sldId id="266" r:id="rId31"/>
+    <p:sldId id="282" r:id="rId32"/>
+    <p:sldId id="286" r:id="rId33"/>
+    <p:sldId id="283" r:id="rId34"/>
+    <p:sldId id="431" r:id="rId35"/>
   </p:sldIdLst>
   <p:sldSz cx="12192000" cy="6858000"/>
   <p:notesSz cx="6858000" cy="9144000"/>
@@ -224,7 +230,7 @@
           <a:p>
             <a:fld id="{634F3F22-B4BB-3F48-9180-464A9F2D66D1}" type="datetimeFigureOut">
               <a:rPr kumimoji="1" lang="zh-CN" altLang="en-US" smtClean="0"/>
-              <a:t>2025/3/3</a:t>
+              <a:t>2026/3/16</a:t>
             </a:fld>
             <a:endParaRPr kumimoji="1" lang="zh-CN" altLang="en-US"/>
           </a:p>
@@ -556,7 +562,7 @@
           <a:p>
             <a:fld id="{F39692CB-2397-CF44-9044-134362C69983}" type="slidenum">
               <a:rPr kumimoji="1" lang="zh-CN" altLang="en-US" smtClean="0"/>
-              <a:t>15</a:t>
+              <a:t>20</a:t>
             </a:fld>
             <a:endParaRPr kumimoji="1" lang="zh-CN" altLang="en-US"/>
           </a:p>
@@ -704,7 +710,7 @@
           <a:p>
             <a:fld id="{FC19A4FA-3D9A-4114-B0D5-759CBD56F1AB}" type="datetimeFigureOut">
               <a:rPr lang="zh-CN" altLang="en-US" smtClean="0"/>
-              <a:t>2025/3/3</a:t>
+              <a:t>2026/3/16</a:t>
             </a:fld>
             <a:endParaRPr lang="zh-CN" altLang="en-US"/>
           </a:p>
@@ -907,7 +913,7 @@
           <a:p>
             <a:fld id="{FC19A4FA-3D9A-4114-B0D5-759CBD56F1AB}" type="datetimeFigureOut">
               <a:rPr lang="zh-CN" altLang="en-US" smtClean="0"/>
-              <a:t>2025/3/3</a:t>
+              <a:t>2026/3/16</a:t>
             </a:fld>
             <a:endParaRPr lang="zh-CN" altLang="en-US"/>
           </a:p>
@@ -1085,7 +1091,7 @@
           <a:p>
             <a:fld id="{FC19A4FA-3D9A-4114-B0D5-759CBD56F1AB}" type="datetimeFigureOut">
               <a:rPr lang="zh-CN" altLang="en-US" smtClean="0"/>
-              <a:t>2025/3/3</a:t>
+              <a:t>2026/3/16</a:t>
             </a:fld>
             <a:endParaRPr lang="zh-CN" altLang="en-US"/>
           </a:p>
@@ -1309,7 +1315,7 @@
           <a:p>
             <a:fld id="{FC19A4FA-3D9A-4114-B0D5-759CBD56F1AB}" type="datetimeFigureOut">
               <a:rPr lang="zh-CN" altLang="en-US" smtClean="0"/>
-              <a:t>2025/3/3</a:t>
+              <a:t>2026/3/16</a:t>
             </a:fld>
             <a:endParaRPr lang="zh-CN" altLang="en-US"/>
           </a:p>
@@ -1543,7 +1549,7 @@
           <a:p>
             <a:fld id="{FC19A4FA-3D9A-4114-B0D5-759CBD56F1AB}" type="datetimeFigureOut">
               <a:rPr lang="zh-CN" altLang="en-US" smtClean="0"/>
-              <a:t>2025/3/3</a:t>
+              <a:t>2026/3/16</a:t>
             </a:fld>
             <a:endParaRPr lang="zh-CN" altLang="en-US"/>
           </a:p>
@@ -1942,7 +1948,7 @@
           <a:p>
             <a:fld id="{FC19A4FA-3D9A-4114-B0D5-759CBD56F1AB}" type="datetimeFigureOut">
               <a:rPr lang="zh-CN" altLang="en-US" smtClean="0"/>
-              <a:t>2025/3/3</a:t>
+              <a:t>2026/3/16</a:t>
             </a:fld>
             <a:endParaRPr lang="zh-CN" altLang="en-US"/>
           </a:p>
@@ -2222,7 +2228,7 @@
           <a:p>
             <a:fld id="{FC19A4FA-3D9A-4114-B0D5-759CBD56F1AB}" type="datetimeFigureOut">
               <a:rPr lang="zh-CN" altLang="en-US" smtClean="0"/>
-              <a:t>2025/3/3</a:t>
+              <a:t>2026/3/16</a:t>
             </a:fld>
             <a:endParaRPr lang="zh-CN" altLang="en-US"/>
           </a:p>
@@ -2374,7 +2380,7 @@
           <a:p>
             <a:fld id="{FC19A4FA-3D9A-4114-B0D5-759CBD56F1AB}" type="datetimeFigureOut">
               <a:rPr lang="zh-CN" altLang="en-US" smtClean="0"/>
-              <a:t>2025/3/3</a:t>
+              <a:t>2026/3/16</a:t>
             </a:fld>
             <a:endParaRPr lang="zh-CN" altLang="en-US"/>
           </a:p>
@@ -2504,7 +2510,7 @@
           <a:p>
             <a:fld id="{FC19A4FA-3D9A-4114-B0D5-759CBD56F1AB}" type="datetimeFigureOut">
               <a:rPr lang="zh-CN" altLang="en-US" smtClean="0"/>
-              <a:t>2025/3/3</a:t>
+              <a:t>2026/3/16</a:t>
             </a:fld>
             <a:endParaRPr lang="zh-CN" altLang="en-US"/>
           </a:p>
@@ -2814,7 +2820,7 @@
           <a:p>
             <a:fld id="{FC19A4FA-3D9A-4114-B0D5-759CBD56F1AB}" type="datetimeFigureOut">
               <a:rPr lang="zh-CN" altLang="en-US" smtClean="0"/>
-              <a:t>2025/3/3</a:t>
+              <a:t>2026/3/16</a:t>
             </a:fld>
             <a:endParaRPr lang="zh-CN" altLang="en-US"/>
           </a:p>
@@ -3101,7 +3107,7 @@
           <a:p>
             <a:fld id="{FC19A4FA-3D9A-4114-B0D5-759CBD56F1AB}" type="datetimeFigureOut">
               <a:rPr lang="zh-CN" altLang="en-US" smtClean="0"/>
-              <a:t>2025/3/3</a:t>
+              <a:t>2026/3/16</a:t>
             </a:fld>
             <a:endParaRPr lang="zh-CN" altLang="en-US"/>
           </a:p>
@@ -3394,7 +3400,7 @@
           <a:p>
             <a:fld id="{FC19A4FA-3D9A-4114-B0D5-759CBD56F1AB}" type="datetimeFigureOut">
               <a:rPr lang="zh-CN" altLang="en-US" smtClean="0"/>
-              <a:t>2025/3/3</a:t>
+              <a:t>2026/3/16</a:t>
             </a:fld>
             <a:endParaRPr lang="zh-CN" altLang="en-US"/>
           </a:p>
@@ -3965,6 +3971,3224 @@
 </file>
 
 <file path=ppt/slides/slide10.xml><?xml version="1.0" encoding="utf-8"?>
+<p:sld xmlns:a="http://schemas.openxmlformats.org/drawingml/2006/main" xmlns:r="http://schemas.openxmlformats.org/officeDocument/2006/relationships" xmlns:p="http://schemas.openxmlformats.org/presentationml/2006/main">
+  <p:cSld>
+    <p:spTree>
+      <p:nvGrpSpPr>
+        <p:cNvPr id="1" name=""/>
+        <p:cNvGrpSpPr/>
+        <p:nvPr/>
+      </p:nvGrpSpPr>
+      <p:grpSpPr>
+        <a:xfrm>
+          <a:off x="0" y="0"/>
+          <a:ext cx="0" cy="0"/>
+          <a:chOff x="0" y="0"/>
+          <a:chExt cx="0" cy="0"/>
+        </a:xfrm>
+      </p:grpSpPr>
+      <p:sp>
+        <p:nvSpPr>
+          <p:cNvPr id="2" name="标题 1">
+            <a:extLst>
+              <a:ext uri="{FF2B5EF4-FFF2-40B4-BE49-F238E27FC236}">
+                <a16:creationId xmlns:a16="http://schemas.microsoft.com/office/drawing/2014/main" id="{1AA56D52-9D7A-5848-86B4-F90E3C0E0A5D}"/>
+              </a:ext>
+            </a:extLst>
+          </p:cNvPr>
+          <p:cNvSpPr>
+            <a:spLocks noGrp="1"/>
+          </p:cNvSpPr>
+          <p:nvPr>
+            <p:ph type="title"/>
+          </p:nvPr>
+        </p:nvSpPr>
+        <p:spPr/>
+        <p:txBody>
+          <a:bodyPr/>
+          <a:lstStyle/>
+          <a:p>
+            <a:r>
+              <a:rPr kumimoji="1" lang="en-US" altLang="zh-CN" dirty="0"/>
+              <a:t>A little more complex</a:t>
+            </a:r>
+            <a:endParaRPr kumimoji="1" lang="zh-CN" altLang="en-US" dirty="0"/>
+          </a:p>
+        </p:txBody>
+      </p:sp>
+      <p:sp>
+        <p:nvSpPr>
+          <p:cNvPr id="3" name="内容占位符 2">
+            <a:extLst>
+              <a:ext uri="{FF2B5EF4-FFF2-40B4-BE49-F238E27FC236}">
+                <a16:creationId xmlns:a16="http://schemas.microsoft.com/office/drawing/2014/main" id="{D1643C95-9A11-1E45-83F3-AF1ADCAB65B5}"/>
+              </a:ext>
+            </a:extLst>
+          </p:cNvPr>
+          <p:cNvSpPr>
+            <a:spLocks noGrp="1"/>
+          </p:cNvSpPr>
+          <p:nvPr>
+            <p:ph idx="1"/>
+          </p:nvPr>
+        </p:nvSpPr>
+        <p:spPr/>
+        <p:txBody>
+          <a:bodyPr/>
+          <a:lstStyle/>
+          <a:p>
+            <a:pPr marL="0" indent="0">
+              <a:buNone/>
+            </a:pPr>
+            <a:r>
+              <a:rPr kumimoji="1" lang="en-US" altLang="zh-CN" dirty="0"/>
+              <a:t>When will </a:t>
+            </a:r>
+            <a:r>
+              <a:rPr lang="en" altLang="zh-CN" sz="2400" dirty="0">
+                <a:solidFill>
+                  <a:srgbClr val="A31515"/>
+                </a:solidFill>
+                <a:latin typeface="Menlo" panose="020B0609030804020204" pitchFamily="49" charset="0"/>
+              </a:rPr>
+              <a:t>"Where I'm?"</a:t>
+            </a:r>
+            <a:r>
+              <a:rPr lang="en" altLang="zh-CN" sz="2400" dirty="0">
+                <a:solidFill>
+                  <a:srgbClr val="000000"/>
+                </a:solidFill>
+                <a:latin typeface="Menlo" panose="020B0609030804020204" pitchFamily="49" charset="0"/>
+              </a:rPr>
+              <a:t> </a:t>
+            </a:r>
+            <a:r>
+              <a:rPr kumimoji="1" lang="en-US" altLang="zh-CN" dirty="0"/>
+              <a:t>be printed? </a:t>
+            </a:r>
+          </a:p>
+          <a:p>
+            <a:pPr marL="0" indent="0">
+              <a:buNone/>
+            </a:pPr>
+            <a:r>
+              <a:rPr kumimoji="1" lang="en-US" altLang="zh-CN" dirty="0"/>
+              <a:t>How to make the code easier to understand?</a:t>
+            </a:r>
+          </a:p>
+          <a:p>
+            <a:endParaRPr kumimoji="1" lang="en-US" altLang="zh-CN" dirty="0"/>
+          </a:p>
+          <a:p>
+            <a:pPr marL="0" indent="0">
+              <a:buNone/>
+            </a:pPr>
+            <a:r>
+              <a:rPr lang="en" altLang="zh-CN" sz="2400" dirty="0">
+                <a:solidFill>
+                  <a:srgbClr val="AF00DB"/>
+                </a:solidFill>
+                <a:latin typeface="Menlo" panose="020B0609030804020204" pitchFamily="49" charset="0"/>
+              </a:rPr>
+              <a:t>if</a:t>
+            </a:r>
+            <a:r>
+              <a:rPr lang="en" altLang="zh-CN" sz="2400" dirty="0">
+                <a:solidFill>
+                  <a:srgbClr val="000000"/>
+                </a:solidFill>
+                <a:latin typeface="Menlo" panose="020B0609030804020204" pitchFamily="49" charset="0"/>
+              </a:rPr>
+              <a:t>(</a:t>
+            </a:r>
+            <a:r>
+              <a:rPr lang="en" altLang="zh-CN" sz="2400" dirty="0">
+                <a:solidFill>
+                  <a:srgbClr val="001080"/>
+                </a:solidFill>
+                <a:latin typeface="Menlo" panose="020B0609030804020204" pitchFamily="49" charset="0"/>
+              </a:rPr>
+              <a:t>num</a:t>
+            </a:r>
+            <a:r>
+              <a:rPr lang="en" altLang="zh-CN" sz="2400" dirty="0">
+                <a:solidFill>
+                  <a:srgbClr val="000000"/>
+                </a:solidFill>
+                <a:latin typeface="Menlo" panose="020B0609030804020204" pitchFamily="49" charset="0"/>
+              </a:rPr>
+              <a:t> &lt; </a:t>
+            </a:r>
+            <a:r>
+              <a:rPr lang="en" altLang="zh-CN" sz="2400" dirty="0">
+                <a:solidFill>
+                  <a:srgbClr val="098658"/>
+                </a:solidFill>
+                <a:latin typeface="Menlo" panose="020B0609030804020204" pitchFamily="49" charset="0"/>
+              </a:rPr>
+              <a:t>10</a:t>
+            </a:r>
+            <a:r>
+              <a:rPr lang="en" altLang="zh-CN" sz="2400" dirty="0">
+                <a:solidFill>
+                  <a:srgbClr val="000000"/>
+                </a:solidFill>
+                <a:latin typeface="Menlo" panose="020B0609030804020204" pitchFamily="49" charset="0"/>
+              </a:rPr>
+              <a:t>)</a:t>
+            </a:r>
+          </a:p>
+          <a:p>
+            <a:pPr marL="0" indent="0">
+              <a:buNone/>
+            </a:pPr>
+            <a:r>
+              <a:rPr lang="en" altLang="zh-CN" sz="2400" dirty="0">
+                <a:solidFill>
+                  <a:srgbClr val="AF00DB"/>
+                </a:solidFill>
+                <a:latin typeface="Menlo" panose="020B0609030804020204" pitchFamily="49" charset="0"/>
+              </a:rPr>
+              <a:t>if</a:t>
+            </a:r>
+            <a:r>
+              <a:rPr lang="en" altLang="zh-CN" sz="2400" dirty="0">
+                <a:solidFill>
+                  <a:srgbClr val="000000"/>
+                </a:solidFill>
+                <a:latin typeface="Menlo" panose="020B0609030804020204" pitchFamily="49" charset="0"/>
+              </a:rPr>
+              <a:t>(</a:t>
+            </a:r>
+            <a:r>
+              <a:rPr lang="en" altLang="zh-CN" sz="2400" dirty="0">
+                <a:solidFill>
+                  <a:srgbClr val="001080"/>
+                </a:solidFill>
+                <a:latin typeface="Menlo" panose="020B0609030804020204" pitchFamily="49" charset="0"/>
+              </a:rPr>
+              <a:t>num</a:t>
+            </a:r>
+            <a:r>
+              <a:rPr lang="en" altLang="zh-CN" sz="2400" dirty="0">
+                <a:solidFill>
+                  <a:srgbClr val="000000"/>
+                </a:solidFill>
+                <a:latin typeface="Menlo" panose="020B0609030804020204" pitchFamily="49" charset="0"/>
+              </a:rPr>
+              <a:t> &lt; </a:t>
+            </a:r>
+            <a:r>
+              <a:rPr lang="en" altLang="zh-CN" sz="2400" dirty="0">
+                <a:solidFill>
+                  <a:srgbClr val="098658"/>
+                </a:solidFill>
+                <a:latin typeface="Menlo" panose="020B0609030804020204" pitchFamily="49" charset="0"/>
+              </a:rPr>
+              <a:t>5</a:t>
+            </a:r>
+            <a:r>
+              <a:rPr lang="en" altLang="zh-CN" sz="2400" dirty="0">
+                <a:solidFill>
+                  <a:srgbClr val="000000"/>
+                </a:solidFill>
+                <a:latin typeface="Menlo" panose="020B0609030804020204" pitchFamily="49" charset="0"/>
+              </a:rPr>
+              <a:t>)</a:t>
+            </a:r>
+          </a:p>
+          <a:p>
+            <a:pPr marL="0" indent="0">
+              <a:buNone/>
+            </a:pPr>
+            <a:r>
+              <a:rPr lang="en" altLang="zh-CN" sz="2400" dirty="0" err="1">
+                <a:solidFill>
+                  <a:srgbClr val="001080"/>
+                </a:solidFill>
+                <a:latin typeface="Menlo" panose="020B0609030804020204" pitchFamily="49" charset="0"/>
+              </a:rPr>
+              <a:t>cout</a:t>
+            </a:r>
+            <a:r>
+              <a:rPr lang="en" altLang="zh-CN" sz="2400" dirty="0">
+                <a:solidFill>
+                  <a:srgbClr val="000000"/>
+                </a:solidFill>
+                <a:latin typeface="Menlo" panose="020B0609030804020204" pitchFamily="49" charset="0"/>
+              </a:rPr>
+              <a:t> </a:t>
+            </a:r>
+            <a:r>
+              <a:rPr lang="en" altLang="zh-CN" sz="2400" dirty="0">
+                <a:solidFill>
+                  <a:srgbClr val="795E26"/>
+                </a:solidFill>
+                <a:latin typeface="Menlo" panose="020B0609030804020204" pitchFamily="49" charset="0"/>
+              </a:rPr>
+              <a:t>&lt;&lt;</a:t>
+            </a:r>
+            <a:r>
+              <a:rPr lang="en" altLang="zh-CN" sz="2400" dirty="0">
+                <a:solidFill>
+                  <a:srgbClr val="000000"/>
+                </a:solidFill>
+                <a:latin typeface="Menlo" panose="020B0609030804020204" pitchFamily="49" charset="0"/>
+              </a:rPr>
+              <a:t> </a:t>
+            </a:r>
+            <a:r>
+              <a:rPr lang="en" altLang="zh-CN" sz="2400" dirty="0">
+                <a:solidFill>
+                  <a:srgbClr val="A31515"/>
+                </a:solidFill>
+                <a:latin typeface="Menlo" panose="020B0609030804020204" pitchFamily="49" charset="0"/>
+              </a:rPr>
+              <a:t>"The number is less than 5"</a:t>
+            </a:r>
+            <a:r>
+              <a:rPr lang="en" altLang="zh-CN" sz="2400" dirty="0">
+                <a:solidFill>
+                  <a:srgbClr val="000000"/>
+                </a:solidFill>
+                <a:latin typeface="Menlo" panose="020B0609030804020204" pitchFamily="49" charset="0"/>
+              </a:rPr>
+              <a:t> </a:t>
+            </a:r>
+            <a:r>
+              <a:rPr lang="en" altLang="zh-CN" sz="2400" dirty="0">
+                <a:solidFill>
+                  <a:srgbClr val="795E26"/>
+                </a:solidFill>
+                <a:latin typeface="Menlo" panose="020B0609030804020204" pitchFamily="49" charset="0"/>
+              </a:rPr>
+              <a:t>&lt;&lt;</a:t>
+            </a:r>
+            <a:r>
+              <a:rPr lang="en" altLang="zh-CN" sz="2400" dirty="0">
+                <a:solidFill>
+                  <a:srgbClr val="000000"/>
+                </a:solidFill>
+                <a:latin typeface="Menlo" panose="020B0609030804020204" pitchFamily="49" charset="0"/>
+              </a:rPr>
+              <a:t> </a:t>
+            </a:r>
+            <a:r>
+              <a:rPr lang="en" altLang="zh-CN" sz="2400" dirty="0" err="1">
+                <a:solidFill>
+                  <a:srgbClr val="795E26"/>
+                </a:solidFill>
+                <a:latin typeface="Menlo" panose="020B0609030804020204" pitchFamily="49" charset="0"/>
+              </a:rPr>
+              <a:t>endl</a:t>
+            </a:r>
+            <a:r>
+              <a:rPr lang="en" altLang="zh-CN" sz="2400" dirty="0">
+                <a:solidFill>
+                  <a:srgbClr val="000000"/>
+                </a:solidFill>
+                <a:latin typeface="Menlo" panose="020B0609030804020204" pitchFamily="49" charset="0"/>
+              </a:rPr>
+              <a:t>;</a:t>
+            </a:r>
+          </a:p>
+          <a:p>
+            <a:pPr marL="0" indent="0">
+              <a:buNone/>
+            </a:pPr>
+            <a:r>
+              <a:rPr lang="en" altLang="zh-CN" sz="2400" dirty="0">
+                <a:solidFill>
+                  <a:srgbClr val="AF00DB"/>
+                </a:solidFill>
+                <a:latin typeface="Menlo" panose="020B0609030804020204" pitchFamily="49" charset="0"/>
+              </a:rPr>
+              <a:t>else</a:t>
+            </a:r>
+            <a:endParaRPr lang="en" altLang="zh-CN" sz="2400" dirty="0">
+              <a:solidFill>
+                <a:srgbClr val="000000"/>
+              </a:solidFill>
+              <a:latin typeface="Menlo" panose="020B0609030804020204" pitchFamily="49" charset="0"/>
+            </a:endParaRPr>
+          </a:p>
+          <a:p>
+            <a:pPr marL="0" indent="0">
+              <a:buNone/>
+            </a:pPr>
+            <a:r>
+              <a:rPr lang="en" altLang="zh-CN" sz="2400" dirty="0" err="1">
+                <a:solidFill>
+                  <a:srgbClr val="001080"/>
+                </a:solidFill>
+                <a:latin typeface="Menlo" panose="020B0609030804020204" pitchFamily="49" charset="0"/>
+              </a:rPr>
+              <a:t>cout</a:t>
+            </a:r>
+            <a:r>
+              <a:rPr lang="en" altLang="zh-CN" sz="2400" dirty="0">
+                <a:solidFill>
+                  <a:srgbClr val="000000"/>
+                </a:solidFill>
+                <a:latin typeface="Menlo" panose="020B0609030804020204" pitchFamily="49" charset="0"/>
+              </a:rPr>
+              <a:t> </a:t>
+            </a:r>
+            <a:r>
+              <a:rPr lang="en" altLang="zh-CN" sz="2400" dirty="0">
+                <a:solidFill>
+                  <a:srgbClr val="795E26"/>
+                </a:solidFill>
+                <a:latin typeface="Menlo" panose="020B0609030804020204" pitchFamily="49" charset="0"/>
+              </a:rPr>
+              <a:t>&lt;&lt;</a:t>
+            </a:r>
+            <a:r>
+              <a:rPr lang="en" altLang="zh-CN" sz="2400" dirty="0">
+                <a:solidFill>
+                  <a:srgbClr val="000000"/>
+                </a:solidFill>
+                <a:latin typeface="Menlo" panose="020B0609030804020204" pitchFamily="49" charset="0"/>
+              </a:rPr>
+              <a:t> </a:t>
+            </a:r>
+            <a:r>
+              <a:rPr lang="en" altLang="zh-CN" sz="2400" dirty="0">
+                <a:solidFill>
+                  <a:srgbClr val="A31515"/>
+                </a:solidFill>
+                <a:latin typeface="Menlo" panose="020B0609030804020204" pitchFamily="49" charset="0"/>
+              </a:rPr>
+              <a:t>"Where I'm?"</a:t>
+            </a:r>
+            <a:r>
+              <a:rPr lang="en" altLang="zh-CN" sz="2400" dirty="0">
+                <a:solidFill>
+                  <a:srgbClr val="000000"/>
+                </a:solidFill>
+                <a:latin typeface="Menlo" panose="020B0609030804020204" pitchFamily="49" charset="0"/>
+              </a:rPr>
+              <a:t> </a:t>
+            </a:r>
+            <a:r>
+              <a:rPr lang="en" altLang="zh-CN" sz="2400" dirty="0">
+                <a:solidFill>
+                  <a:srgbClr val="795E26"/>
+                </a:solidFill>
+                <a:latin typeface="Menlo" panose="020B0609030804020204" pitchFamily="49" charset="0"/>
+              </a:rPr>
+              <a:t>&lt;&lt;</a:t>
+            </a:r>
+            <a:r>
+              <a:rPr lang="en" altLang="zh-CN" sz="2400" dirty="0">
+                <a:solidFill>
+                  <a:srgbClr val="000000"/>
+                </a:solidFill>
+                <a:latin typeface="Menlo" panose="020B0609030804020204" pitchFamily="49" charset="0"/>
+              </a:rPr>
+              <a:t> </a:t>
+            </a:r>
+            <a:r>
+              <a:rPr lang="en" altLang="zh-CN" sz="2400" dirty="0" err="1">
+                <a:solidFill>
+                  <a:srgbClr val="795E26"/>
+                </a:solidFill>
+                <a:latin typeface="Menlo" panose="020B0609030804020204" pitchFamily="49" charset="0"/>
+              </a:rPr>
+              <a:t>endl</a:t>
+            </a:r>
+            <a:r>
+              <a:rPr lang="en" altLang="zh-CN" sz="2400" dirty="0">
+                <a:solidFill>
+                  <a:srgbClr val="000000"/>
+                </a:solidFill>
+                <a:latin typeface="Menlo" panose="020B0609030804020204" pitchFamily="49" charset="0"/>
+              </a:rPr>
+              <a:t>;</a:t>
+            </a:r>
+          </a:p>
+          <a:p>
+            <a:endParaRPr kumimoji="1" lang="en-US" altLang="zh-CN" dirty="0"/>
+          </a:p>
+        </p:txBody>
+      </p:sp>
+    </p:spTree>
+    <p:extLst>
+      <p:ext uri="{BB962C8B-B14F-4D97-AF65-F5344CB8AC3E}">
+        <p14:creationId xmlns:p14="http://schemas.microsoft.com/office/powerpoint/2010/main" val="2074827456"/>
+      </p:ext>
+    </p:extLst>
+  </p:cSld>
+  <p:clrMapOvr>
+    <a:masterClrMapping/>
+  </p:clrMapOvr>
+</p:sld>
+</file>
+
+<file path=ppt/slides/slide11.xml><?xml version="1.0" encoding="utf-8"?>
+<p:sld xmlns:a="http://schemas.openxmlformats.org/drawingml/2006/main" xmlns:r="http://schemas.openxmlformats.org/officeDocument/2006/relationships" xmlns:p="http://schemas.openxmlformats.org/presentationml/2006/main">
+  <p:cSld>
+    <p:spTree>
+      <p:nvGrpSpPr>
+        <p:cNvPr id="1" name=""/>
+        <p:cNvGrpSpPr/>
+        <p:nvPr/>
+      </p:nvGrpSpPr>
+      <p:grpSpPr>
+        <a:xfrm>
+          <a:off x="0" y="0"/>
+          <a:ext cx="0" cy="0"/>
+          <a:chOff x="0" y="0"/>
+          <a:chExt cx="0" cy="0"/>
+        </a:xfrm>
+      </p:grpSpPr>
+      <p:sp>
+        <p:nvSpPr>
+          <p:cNvPr id="2" name="标题 1">
+            <a:extLst>
+              <a:ext uri="{FF2B5EF4-FFF2-40B4-BE49-F238E27FC236}">
+                <a16:creationId xmlns:a16="http://schemas.microsoft.com/office/drawing/2014/main" id="{F44EACC6-150B-134D-95F7-6080594AA6AE}"/>
+              </a:ext>
+            </a:extLst>
+          </p:cNvPr>
+          <p:cNvSpPr>
+            <a:spLocks noGrp="1"/>
+          </p:cNvSpPr>
+          <p:nvPr>
+            <p:ph type="title"/>
+          </p:nvPr>
+        </p:nvSpPr>
+        <p:spPr/>
+        <p:txBody>
+          <a:bodyPr>
+            <a:normAutofit/>
+          </a:bodyPr>
+          <a:lstStyle/>
+          <a:p>
+            <a:r>
+              <a:rPr kumimoji="1" lang="en" altLang="zh-CN" dirty="0">
+                <a:solidFill>
+                  <a:srgbClr val="0000CC"/>
+                </a:solidFill>
+                <a:latin typeface="Courier" pitchFamily="2" charset="0"/>
+              </a:rPr>
+              <a:t>? : </a:t>
+            </a:r>
+            <a:r>
+              <a:rPr kumimoji="1" lang="en" altLang="zh-CN" dirty="0"/>
+              <a:t>operator</a:t>
+            </a:r>
+            <a:endParaRPr kumimoji="1" lang="zh-CN" altLang="en-US" dirty="0"/>
+          </a:p>
+        </p:txBody>
+      </p:sp>
+      <p:sp>
+        <p:nvSpPr>
+          <p:cNvPr id="3" name="内容占位符 2">
+            <a:extLst>
+              <a:ext uri="{FF2B5EF4-FFF2-40B4-BE49-F238E27FC236}">
+                <a16:creationId xmlns:a16="http://schemas.microsoft.com/office/drawing/2014/main" id="{0918E25A-4E65-524C-8739-719C7D631057}"/>
+              </a:ext>
+            </a:extLst>
+          </p:cNvPr>
+          <p:cNvSpPr>
+            <a:spLocks noGrp="1"/>
+          </p:cNvSpPr>
+          <p:nvPr>
+            <p:ph idx="1"/>
+          </p:nvPr>
+        </p:nvSpPr>
+        <p:spPr>
+          <a:xfrm>
+            <a:off x="838199" y="1326996"/>
+            <a:ext cx="11053879" cy="580198"/>
+          </a:xfrm>
+        </p:spPr>
+        <p:txBody>
+          <a:bodyPr/>
+          <a:lstStyle/>
+          <a:p>
+            <a:r>
+              <a:rPr kumimoji="1" lang="en-US" altLang="zh-CN" dirty="0"/>
+              <a:t>When can we use the ternary conditional operator?</a:t>
+            </a:r>
+          </a:p>
+          <a:p>
+            <a:endParaRPr kumimoji="1" lang="en-US" altLang="zh-CN" dirty="0"/>
+          </a:p>
+        </p:txBody>
+      </p:sp>
+      <p:sp>
+        <p:nvSpPr>
+          <p:cNvPr id="4" name="矩形 3">
+            <a:extLst>
+              <a:ext uri="{FF2B5EF4-FFF2-40B4-BE49-F238E27FC236}">
+                <a16:creationId xmlns:a16="http://schemas.microsoft.com/office/drawing/2014/main" id="{3154EB7F-116A-5548-A162-FF0602F8A4A8}"/>
+              </a:ext>
+            </a:extLst>
+          </p:cNvPr>
+          <p:cNvSpPr/>
+          <p:nvPr/>
+        </p:nvSpPr>
+        <p:spPr>
+          <a:xfrm>
+            <a:off x="1115504" y="1907193"/>
+            <a:ext cx="6891357" cy="2031325"/>
+          </a:xfrm>
+          <a:prstGeom prst="rect">
+            <a:avLst/>
+          </a:prstGeom>
+          <a:ln>
+            <a:solidFill>
+              <a:schemeClr val="accent1">
+                <a:shade val="50000"/>
+              </a:schemeClr>
+            </a:solidFill>
+          </a:ln>
+        </p:spPr>
+        <p:txBody>
+          <a:bodyPr wrap="square">
+            <a:spAutoFit/>
+          </a:bodyPr>
+          <a:lstStyle/>
+          <a:p>
+            <a:r>
+              <a:rPr lang="en" altLang="zh-CN" dirty="0">
+                <a:solidFill>
+                  <a:srgbClr val="0000FF"/>
+                </a:solidFill>
+                <a:latin typeface="Menlo" panose="020B0609030804020204" pitchFamily="49" charset="0"/>
+              </a:rPr>
+              <a:t>bool</a:t>
+            </a:r>
+            <a:r>
+              <a:rPr lang="en" altLang="zh-CN" dirty="0">
+                <a:solidFill>
+                  <a:srgbClr val="000000"/>
+                </a:solidFill>
+                <a:latin typeface="Menlo" panose="020B0609030804020204" pitchFamily="49" charset="0"/>
+              </a:rPr>
+              <a:t> </a:t>
+            </a:r>
+            <a:r>
+              <a:rPr lang="en" altLang="zh-CN" dirty="0" err="1">
+                <a:solidFill>
+                  <a:srgbClr val="001080"/>
+                </a:solidFill>
+                <a:latin typeface="Menlo" panose="020B0609030804020204" pitchFamily="49" charset="0"/>
+              </a:rPr>
+              <a:t>isPositive</a:t>
+            </a:r>
+            <a:r>
+              <a:rPr lang="en" altLang="zh-CN" dirty="0">
+                <a:solidFill>
+                  <a:srgbClr val="000000"/>
+                </a:solidFill>
+                <a:latin typeface="Menlo" panose="020B0609030804020204" pitchFamily="49" charset="0"/>
+              </a:rPr>
+              <a:t> = </a:t>
+            </a:r>
+            <a:r>
+              <a:rPr lang="en" altLang="zh-CN" dirty="0">
+                <a:solidFill>
+                  <a:srgbClr val="0000FF"/>
+                </a:solidFill>
+                <a:latin typeface="Menlo" panose="020B0609030804020204" pitchFamily="49" charset="0"/>
+              </a:rPr>
+              <a:t>true</a:t>
+            </a:r>
+            <a:r>
+              <a:rPr lang="en" altLang="zh-CN" dirty="0">
+                <a:solidFill>
+                  <a:srgbClr val="000000"/>
+                </a:solidFill>
+                <a:latin typeface="Menlo" panose="020B0609030804020204" pitchFamily="49" charset="0"/>
+              </a:rPr>
+              <a:t>;</a:t>
+            </a:r>
+          </a:p>
+          <a:p>
+            <a:r>
+              <a:rPr lang="en" altLang="zh-CN" dirty="0">
+                <a:solidFill>
+                  <a:srgbClr val="0000FF"/>
+                </a:solidFill>
+                <a:latin typeface="Menlo" panose="020B0609030804020204" pitchFamily="49" charset="0"/>
+              </a:rPr>
+              <a:t>int</a:t>
+            </a:r>
+            <a:r>
+              <a:rPr lang="en" altLang="zh-CN" dirty="0">
+                <a:solidFill>
+                  <a:srgbClr val="000000"/>
+                </a:solidFill>
+                <a:latin typeface="Menlo" panose="020B0609030804020204" pitchFamily="49" charset="0"/>
+              </a:rPr>
+              <a:t> </a:t>
+            </a:r>
+            <a:r>
+              <a:rPr lang="en" altLang="zh-CN" dirty="0">
+                <a:solidFill>
+                  <a:srgbClr val="001080"/>
+                </a:solidFill>
+                <a:latin typeface="Menlo" panose="020B0609030804020204" pitchFamily="49" charset="0"/>
+              </a:rPr>
+              <a:t>factor</a:t>
+            </a:r>
+            <a:r>
+              <a:rPr lang="en" altLang="zh-CN" dirty="0">
+                <a:solidFill>
+                  <a:srgbClr val="000000"/>
+                </a:solidFill>
+                <a:latin typeface="Menlo" panose="020B0609030804020204" pitchFamily="49" charset="0"/>
+              </a:rPr>
+              <a:t> = </a:t>
+            </a:r>
+            <a:r>
+              <a:rPr lang="en" altLang="zh-CN" dirty="0">
+                <a:solidFill>
+                  <a:srgbClr val="098658"/>
+                </a:solidFill>
+                <a:latin typeface="Menlo" panose="020B0609030804020204" pitchFamily="49" charset="0"/>
+              </a:rPr>
+              <a:t>0</a:t>
+            </a:r>
+            <a:r>
+              <a:rPr lang="en" altLang="zh-CN" dirty="0">
+                <a:solidFill>
+                  <a:srgbClr val="000000"/>
+                </a:solidFill>
+                <a:latin typeface="Menlo" panose="020B0609030804020204" pitchFamily="49" charset="0"/>
+              </a:rPr>
+              <a:t>;</a:t>
+            </a:r>
+          </a:p>
+          <a:p>
+            <a:r>
+              <a:rPr lang="en" altLang="zh-CN" dirty="0">
+                <a:solidFill>
+                  <a:srgbClr val="008000"/>
+                </a:solidFill>
+                <a:latin typeface="Menlo" panose="020B0609030804020204" pitchFamily="49" charset="0"/>
+              </a:rPr>
+              <a:t>//some operations may change </a:t>
+            </a:r>
+            <a:r>
+              <a:rPr lang="en" altLang="zh-CN" dirty="0" err="1">
+                <a:solidFill>
+                  <a:srgbClr val="008000"/>
+                </a:solidFill>
+                <a:latin typeface="Menlo" panose="020B0609030804020204" pitchFamily="49" charset="0"/>
+              </a:rPr>
+              <a:t>isPositive's</a:t>
+            </a:r>
+            <a:r>
+              <a:rPr lang="en" altLang="zh-CN" dirty="0">
+                <a:solidFill>
+                  <a:srgbClr val="008000"/>
+                </a:solidFill>
+                <a:latin typeface="Menlo" panose="020B0609030804020204" pitchFamily="49" charset="0"/>
+              </a:rPr>
+              <a:t> value</a:t>
+            </a:r>
+            <a:endParaRPr lang="en" altLang="zh-CN" dirty="0">
+              <a:solidFill>
+                <a:srgbClr val="000000"/>
+              </a:solidFill>
+              <a:latin typeface="Menlo" panose="020B0609030804020204" pitchFamily="49" charset="0"/>
+            </a:endParaRPr>
+          </a:p>
+          <a:p>
+            <a:r>
+              <a:rPr lang="en" altLang="zh-CN" dirty="0">
+                <a:solidFill>
+                  <a:srgbClr val="AF00DB"/>
+                </a:solidFill>
+                <a:latin typeface="Menlo" panose="020B0609030804020204" pitchFamily="49" charset="0"/>
+              </a:rPr>
+              <a:t>if</a:t>
+            </a:r>
+            <a:r>
+              <a:rPr lang="en" altLang="zh-CN" dirty="0">
+                <a:solidFill>
+                  <a:srgbClr val="000000"/>
+                </a:solidFill>
+                <a:latin typeface="Menlo" panose="020B0609030804020204" pitchFamily="49" charset="0"/>
+              </a:rPr>
+              <a:t>(</a:t>
+            </a:r>
+            <a:r>
+              <a:rPr lang="en" altLang="zh-CN" dirty="0" err="1">
+                <a:solidFill>
+                  <a:srgbClr val="001080"/>
+                </a:solidFill>
+                <a:latin typeface="Menlo" panose="020B0609030804020204" pitchFamily="49" charset="0"/>
+              </a:rPr>
+              <a:t>isPositive</a:t>
+            </a:r>
+            <a:r>
+              <a:rPr lang="en" altLang="zh-CN" dirty="0">
+                <a:solidFill>
+                  <a:srgbClr val="000000"/>
+                </a:solidFill>
+                <a:latin typeface="Menlo" panose="020B0609030804020204" pitchFamily="49" charset="0"/>
+              </a:rPr>
+              <a:t>)</a:t>
+            </a:r>
+          </a:p>
+          <a:p>
+            <a:r>
+              <a:rPr lang="en" altLang="zh-CN" dirty="0">
+                <a:solidFill>
+                  <a:srgbClr val="001080"/>
+                </a:solidFill>
+                <a:latin typeface="Menlo" panose="020B0609030804020204" pitchFamily="49" charset="0"/>
+              </a:rPr>
+              <a:t>    factor</a:t>
+            </a:r>
+            <a:r>
+              <a:rPr lang="en" altLang="zh-CN" dirty="0">
+                <a:solidFill>
+                  <a:srgbClr val="000000"/>
+                </a:solidFill>
+                <a:latin typeface="Menlo" panose="020B0609030804020204" pitchFamily="49" charset="0"/>
+              </a:rPr>
+              <a:t> = </a:t>
+            </a:r>
+            <a:r>
+              <a:rPr lang="en" altLang="zh-CN" dirty="0">
+                <a:solidFill>
+                  <a:srgbClr val="098658"/>
+                </a:solidFill>
+                <a:latin typeface="Menlo" panose="020B0609030804020204" pitchFamily="49" charset="0"/>
+              </a:rPr>
+              <a:t>1</a:t>
+            </a:r>
+            <a:r>
+              <a:rPr lang="en" altLang="zh-CN" dirty="0">
+                <a:solidFill>
+                  <a:srgbClr val="000000"/>
+                </a:solidFill>
+                <a:latin typeface="Menlo" panose="020B0609030804020204" pitchFamily="49" charset="0"/>
+              </a:rPr>
+              <a:t>;</a:t>
+            </a:r>
+          </a:p>
+          <a:p>
+            <a:r>
+              <a:rPr lang="en" altLang="zh-CN" dirty="0">
+                <a:solidFill>
+                  <a:srgbClr val="AF00DB"/>
+                </a:solidFill>
+                <a:latin typeface="Menlo" panose="020B0609030804020204" pitchFamily="49" charset="0"/>
+              </a:rPr>
+              <a:t>else</a:t>
+            </a:r>
+            <a:endParaRPr lang="en" altLang="zh-CN" dirty="0">
+              <a:solidFill>
+                <a:srgbClr val="000000"/>
+              </a:solidFill>
+              <a:latin typeface="Menlo" panose="020B0609030804020204" pitchFamily="49" charset="0"/>
+            </a:endParaRPr>
+          </a:p>
+          <a:p>
+            <a:r>
+              <a:rPr lang="en" altLang="zh-CN" dirty="0">
+                <a:solidFill>
+                  <a:srgbClr val="001080"/>
+                </a:solidFill>
+                <a:latin typeface="Menlo" panose="020B0609030804020204" pitchFamily="49" charset="0"/>
+              </a:rPr>
+              <a:t>    factor</a:t>
+            </a:r>
+            <a:r>
+              <a:rPr lang="en" altLang="zh-CN" dirty="0">
+                <a:solidFill>
+                  <a:srgbClr val="000000"/>
+                </a:solidFill>
+                <a:latin typeface="Menlo" panose="020B0609030804020204" pitchFamily="49" charset="0"/>
+              </a:rPr>
+              <a:t> = -</a:t>
+            </a:r>
+            <a:r>
+              <a:rPr lang="en" altLang="zh-CN" dirty="0">
+                <a:solidFill>
+                  <a:srgbClr val="098658"/>
+                </a:solidFill>
+                <a:latin typeface="Menlo" panose="020B0609030804020204" pitchFamily="49" charset="0"/>
+              </a:rPr>
+              <a:t>1</a:t>
+            </a:r>
+            <a:r>
+              <a:rPr lang="en" altLang="zh-CN" dirty="0">
+                <a:solidFill>
+                  <a:srgbClr val="000000"/>
+                </a:solidFill>
+                <a:latin typeface="Menlo" panose="020B0609030804020204" pitchFamily="49" charset="0"/>
+              </a:rPr>
+              <a:t>;</a:t>
+            </a:r>
+            <a:endParaRPr lang="en" altLang="zh-CN" b="0" dirty="0">
+              <a:solidFill>
+                <a:srgbClr val="000000"/>
+              </a:solidFill>
+              <a:effectLst/>
+              <a:latin typeface="Menlo" panose="020B0609030804020204" pitchFamily="49" charset="0"/>
+            </a:endParaRPr>
+          </a:p>
+        </p:txBody>
+      </p:sp>
+      <p:sp>
+        <p:nvSpPr>
+          <p:cNvPr id="5" name="矩形 4">
+            <a:extLst>
+              <a:ext uri="{FF2B5EF4-FFF2-40B4-BE49-F238E27FC236}">
+                <a16:creationId xmlns:a16="http://schemas.microsoft.com/office/drawing/2014/main" id="{9B0A5B86-AF15-1542-B13B-10F8B85B921D}"/>
+              </a:ext>
+            </a:extLst>
+          </p:cNvPr>
+          <p:cNvSpPr/>
+          <p:nvPr/>
+        </p:nvSpPr>
+        <p:spPr>
+          <a:xfrm>
+            <a:off x="1115503" y="4842776"/>
+            <a:ext cx="6891357" cy="369332"/>
+          </a:xfrm>
+          <a:prstGeom prst="rect">
+            <a:avLst/>
+          </a:prstGeom>
+          <a:ln>
+            <a:solidFill>
+              <a:schemeClr val="accent1">
+                <a:shade val="50000"/>
+              </a:schemeClr>
+            </a:solidFill>
+          </a:ln>
+        </p:spPr>
+        <p:txBody>
+          <a:bodyPr wrap="square">
+            <a:spAutoFit/>
+          </a:bodyPr>
+          <a:lstStyle/>
+          <a:p>
+            <a:r>
+              <a:rPr lang="en" altLang="zh-CN" dirty="0">
+                <a:solidFill>
+                  <a:srgbClr val="001080"/>
+                </a:solidFill>
+                <a:latin typeface="Menlo" panose="020B0609030804020204" pitchFamily="49" charset="0"/>
+              </a:rPr>
+              <a:t>factor</a:t>
+            </a:r>
+            <a:r>
+              <a:rPr lang="en" altLang="zh-CN" dirty="0">
+                <a:solidFill>
+                  <a:srgbClr val="000000"/>
+                </a:solidFill>
+                <a:latin typeface="Menlo" panose="020B0609030804020204" pitchFamily="49" charset="0"/>
+              </a:rPr>
+              <a:t> = </a:t>
+            </a:r>
+            <a:r>
+              <a:rPr lang="en" altLang="zh-CN" dirty="0" err="1">
+                <a:solidFill>
+                  <a:srgbClr val="001080"/>
+                </a:solidFill>
+                <a:latin typeface="Menlo" panose="020B0609030804020204" pitchFamily="49" charset="0"/>
+              </a:rPr>
+              <a:t>isPositive</a:t>
+            </a:r>
+            <a:r>
+              <a:rPr lang="en" altLang="zh-CN" dirty="0">
+                <a:solidFill>
+                  <a:srgbClr val="000000"/>
+                </a:solidFill>
+                <a:latin typeface="Menlo" panose="020B0609030804020204" pitchFamily="49" charset="0"/>
+              </a:rPr>
+              <a:t> ? </a:t>
+            </a:r>
+            <a:r>
+              <a:rPr lang="en" altLang="zh-CN" dirty="0">
+                <a:solidFill>
+                  <a:srgbClr val="098658"/>
+                </a:solidFill>
+                <a:latin typeface="Menlo" panose="020B0609030804020204" pitchFamily="49" charset="0"/>
+              </a:rPr>
+              <a:t>1</a:t>
+            </a:r>
+            <a:r>
+              <a:rPr lang="en" altLang="zh-CN" dirty="0">
+                <a:solidFill>
+                  <a:srgbClr val="000000"/>
+                </a:solidFill>
+                <a:latin typeface="Menlo" panose="020B0609030804020204" pitchFamily="49" charset="0"/>
+              </a:rPr>
+              <a:t> : -</a:t>
+            </a:r>
+            <a:r>
+              <a:rPr lang="en" altLang="zh-CN" dirty="0">
+                <a:solidFill>
+                  <a:srgbClr val="098658"/>
+                </a:solidFill>
+                <a:latin typeface="Menlo" panose="020B0609030804020204" pitchFamily="49" charset="0"/>
+              </a:rPr>
+              <a:t>1</a:t>
+            </a:r>
+            <a:r>
+              <a:rPr lang="en" altLang="zh-CN" dirty="0">
+                <a:solidFill>
+                  <a:srgbClr val="000000"/>
+                </a:solidFill>
+                <a:latin typeface="Menlo" panose="020B0609030804020204" pitchFamily="49" charset="0"/>
+              </a:rPr>
+              <a:t>;</a:t>
+            </a:r>
+            <a:endParaRPr lang="en" altLang="zh-CN" b="0" dirty="0">
+              <a:solidFill>
+                <a:srgbClr val="000000"/>
+              </a:solidFill>
+              <a:effectLst/>
+              <a:latin typeface="Menlo" panose="020B0609030804020204" pitchFamily="49" charset="0"/>
+            </a:endParaRPr>
+          </a:p>
+        </p:txBody>
+      </p:sp>
+      <p:sp>
+        <p:nvSpPr>
+          <p:cNvPr id="6" name="矩形 5">
+            <a:extLst>
+              <a:ext uri="{FF2B5EF4-FFF2-40B4-BE49-F238E27FC236}">
+                <a16:creationId xmlns:a16="http://schemas.microsoft.com/office/drawing/2014/main" id="{338B4A6B-CD66-4542-9FCA-6C3A9242C754}"/>
+              </a:ext>
+            </a:extLst>
+          </p:cNvPr>
+          <p:cNvSpPr/>
+          <p:nvPr/>
+        </p:nvSpPr>
+        <p:spPr>
+          <a:xfrm>
+            <a:off x="1115505" y="5839365"/>
+            <a:ext cx="6891355" cy="369332"/>
+          </a:xfrm>
+          <a:prstGeom prst="rect">
+            <a:avLst/>
+          </a:prstGeom>
+          <a:ln>
+            <a:solidFill>
+              <a:schemeClr val="accent1">
+                <a:shade val="50000"/>
+              </a:schemeClr>
+            </a:solidFill>
+          </a:ln>
+        </p:spPr>
+        <p:txBody>
+          <a:bodyPr wrap="square">
+            <a:spAutoFit/>
+          </a:bodyPr>
+          <a:lstStyle/>
+          <a:p>
+            <a:r>
+              <a:rPr lang="en" altLang="zh-CN" dirty="0">
+                <a:solidFill>
+                  <a:srgbClr val="001080"/>
+                </a:solidFill>
+                <a:latin typeface="Menlo" panose="020B0609030804020204" pitchFamily="49" charset="0"/>
+              </a:rPr>
+              <a:t>factor</a:t>
+            </a:r>
+            <a:r>
+              <a:rPr lang="en" altLang="zh-CN" dirty="0">
+                <a:solidFill>
+                  <a:srgbClr val="000000"/>
+                </a:solidFill>
+                <a:latin typeface="Menlo" panose="020B0609030804020204" pitchFamily="49" charset="0"/>
+              </a:rPr>
+              <a:t> = (</a:t>
+            </a:r>
+            <a:r>
+              <a:rPr lang="en" altLang="zh-CN" dirty="0" err="1">
+                <a:solidFill>
+                  <a:srgbClr val="001080"/>
+                </a:solidFill>
+                <a:latin typeface="Menlo" panose="020B0609030804020204" pitchFamily="49" charset="0"/>
+              </a:rPr>
+              <a:t>isPositive</a:t>
+            </a:r>
+            <a:r>
+              <a:rPr lang="en" altLang="zh-CN" dirty="0">
+                <a:solidFill>
+                  <a:srgbClr val="000000"/>
+                </a:solidFill>
+                <a:latin typeface="Menlo" panose="020B0609030804020204" pitchFamily="49" charset="0"/>
+              </a:rPr>
+              <a:t>) * </a:t>
+            </a:r>
+            <a:r>
+              <a:rPr lang="en" altLang="zh-CN" dirty="0">
+                <a:solidFill>
+                  <a:srgbClr val="098658"/>
+                </a:solidFill>
+                <a:latin typeface="Menlo" panose="020B0609030804020204" pitchFamily="49" charset="0"/>
+              </a:rPr>
+              <a:t>2</a:t>
+            </a:r>
+            <a:r>
+              <a:rPr lang="en" altLang="zh-CN" dirty="0">
+                <a:solidFill>
+                  <a:srgbClr val="000000"/>
+                </a:solidFill>
+                <a:latin typeface="Menlo" panose="020B0609030804020204" pitchFamily="49" charset="0"/>
+              </a:rPr>
+              <a:t> - </a:t>
+            </a:r>
+            <a:r>
+              <a:rPr lang="en" altLang="zh-CN" dirty="0">
+                <a:solidFill>
+                  <a:srgbClr val="098658"/>
+                </a:solidFill>
+                <a:latin typeface="Menlo" panose="020B0609030804020204" pitchFamily="49" charset="0"/>
+              </a:rPr>
+              <a:t>1</a:t>
+            </a:r>
+            <a:r>
+              <a:rPr lang="en" altLang="zh-CN" dirty="0">
+                <a:solidFill>
+                  <a:srgbClr val="000000"/>
+                </a:solidFill>
+                <a:latin typeface="Menlo" panose="020B0609030804020204" pitchFamily="49" charset="0"/>
+              </a:rPr>
+              <a:t>;</a:t>
+            </a:r>
+            <a:endParaRPr lang="en" altLang="zh-CN" b="0" dirty="0">
+              <a:solidFill>
+                <a:srgbClr val="000000"/>
+              </a:solidFill>
+              <a:effectLst/>
+              <a:latin typeface="Menlo" panose="020B0609030804020204" pitchFamily="49" charset="0"/>
+            </a:endParaRPr>
+          </a:p>
+        </p:txBody>
+      </p:sp>
+      <p:sp>
+        <p:nvSpPr>
+          <p:cNvPr id="7" name="右箭头 6">
+            <a:extLst>
+              <a:ext uri="{FF2B5EF4-FFF2-40B4-BE49-F238E27FC236}">
+                <a16:creationId xmlns:a16="http://schemas.microsoft.com/office/drawing/2014/main" id="{638C31BB-86CA-1144-9D15-8537E25B5CD4}"/>
+              </a:ext>
+            </a:extLst>
+          </p:cNvPr>
+          <p:cNvSpPr/>
+          <p:nvPr/>
+        </p:nvSpPr>
+        <p:spPr>
+          <a:xfrm rot="5400000">
+            <a:off x="3353347" y="4261954"/>
+            <a:ext cx="627260" cy="534390"/>
+          </a:xfrm>
+          <a:prstGeom prst="rightArrow">
+            <a:avLst/>
+          </a:prstGeom>
+        </p:spPr>
+        <p:style>
+          <a:lnRef idx="2">
+            <a:schemeClr val="accent1">
+              <a:shade val="50000"/>
+            </a:schemeClr>
+          </a:lnRef>
+          <a:fillRef idx="1">
+            <a:schemeClr val="accent1"/>
+          </a:fillRef>
+          <a:effectRef idx="0">
+            <a:schemeClr val="accent1"/>
+          </a:effectRef>
+          <a:fontRef idx="minor">
+            <a:schemeClr val="lt1"/>
+          </a:fontRef>
+        </p:style>
+        <p:txBody>
+          <a:bodyPr rtlCol="0" anchor="ctr"/>
+          <a:lstStyle/>
+          <a:p>
+            <a:pPr algn="ctr"/>
+            <a:endParaRPr kumimoji="1" lang="zh-CN" altLang="en-US"/>
+          </a:p>
+        </p:txBody>
+      </p:sp>
+      <p:sp>
+        <p:nvSpPr>
+          <p:cNvPr id="8" name="右箭头 7">
+            <a:extLst>
+              <a:ext uri="{FF2B5EF4-FFF2-40B4-BE49-F238E27FC236}">
+                <a16:creationId xmlns:a16="http://schemas.microsoft.com/office/drawing/2014/main" id="{7611F77A-30E1-BA41-ACF5-51D4A0643A70}"/>
+              </a:ext>
+            </a:extLst>
+          </p:cNvPr>
+          <p:cNvSpPr/>
+          <p:nvPr/>
+        </p:nvSpPr>
+        <p:spPr>
+          <a:xfrm rot="5400000">
+            <a:off x="3353347" y="5265298"/>
+            <a:ext cx="627260" cy="534390"/>
+          </a:xfrm>
+          <a:prstGeom prst="rightArrow">
+            <a:avLst/>
+          </a:prstGeom>
+        </p:spPr>
+        <p:style>
+          <a:lnRef idx="2">
+            <a:schemeClr val="accent1">
+              <a:shade val="50000"/>
+            </a:schemeClr>
+          </a:lnRef>
+          <a:fillRef idx="1">
+            <a:schemeClr val="accent1"/>
+          </a:fillRef>
+          <a:effectRef idx="0">
+            <a:schemeClr val="accent1"/>
+          </a:effectRef>
+          <a:fontRef idx="minor">
+            <a:schemeClr val="lt1"/>
+          </a:fontRef>
+        </p:style>
+        <p:txBody>
+          <a:bodyPr rtlCol="0" anchor="ctr"/>
+          <a:lstStyle/>
+          <a:p>
+            <a:pPr algn="ctr"/>
+            <a:endParaRPr kumimoji="1" lang="zh-CN" altLang="en-US"/>
+          </a:p>
+        </p:txBody>
+      </p:sp>
+    </p:spTree>
+    <p:extLst>
+      <p:ext uri="{BB962C8B-B14F-4D97-AF65-F5344CB8AC3E}">
+        <p14:creationId xmlns:p14="http://schemas.microsoft.com/office/powerpoint/2010/main" val="1601599937"/>
+      </p:ext>
+    </p:extLst>
+  </p:cSld>
+  <p:clrMapOvr>
+    <a:masterClrMapping/>
+  </p:clrMapOvr>
+  <p:timing>
+    <p:tnLst>
+      <p:par>
+        <p:cTn id="1" dur="indefinite" restart="never" nodeType="tmRoot">
+          <p:childTnLst>
+            <p:seq concurrent="1" nextAc="seek">
+              <p:cTn id="2" dur="indefinite" nodeType="mainSeq">
+                <p:childTnLst>
+                  <p:par>
+                    <p:cTn id="3" fill="hold">
+                      <p:stCondLst>
+                        <p:cond delay="indefinite"/>
+                      </p:stCondLst>
+                      <p:childTnLst>
+                        <p:par>
+                          <p:cTn id="4" fill="hold">
+                            <p:stCondLst>
+                              <p:cond delay="0"/>
+                            </p:stCondLst>
+                            <p:childTnLst>
+                              <p:par>
+                                <p:cTn id="5" presetID="1" presetClass="entr" presetSubtype="0" fill="hold" grpId="0" nodeType="clickEffect">
+                                  <p:stCondLst>
+                                    <p:cond delay="0"/>
+                                  </p:stCondLst>
+                                  <p:childTnLst>
+                                    <p:set>
+                                      <p:cBhvr>
+                                        <p:cTn id="6" dur="1" fill="hold">
+                                          <p:stCondLst>
+                                            <p:cond delay="0"/>
+                                          </p:stCondLst>
+                                        </p:cTn>
+                                        <p:tgtEl>
+                                          <p:spTgt spid="7"/>
+                                        </p:tgtEl>
+                                        <p:attrNameLst>
+                                          <p:attrName>style.visibility</p:attrName>
+                                        </p:attrNameLst>
+                                      </p:cBhvr>
+                                      <p:to>
+                                        <p:strVal val="visible"/>
+                                      </p:to>
+                                    </p:set>
+                                  </p:childTnLst>
+                                </p:cTn>
+                              </p:par>
+                              <p:par>
+                                <p:cTn id="7" presetID="1" presetClass="entr" presetSubtype="0" fill="hold" grpId="0" nodeType="withEffect">
+                                  <p:stCondLst>
+                                    <p:cond delay="0"/>
+                                  </p:stCondLst>
+                                  <p:childTnLst>
+                                    <p:set>
+                                      <p:cBhvr>
+                                        <p:cTn id="8" dur="1" fill="hold">
+                                          <p:stCondLst>
+                                            <p:cond delay="0"/>
+                                          </p:stCondLst>
+                                        </p:cTn>
+                                        <p:tgtEl>
+                                          <p:spTgt spid="5"/>
+                                        </p:tgtEl>
+                                        <p:attrNameLst>
+                                          <p:attrName>style.visibility</p:attrName>
+                                        </p:attrNameLst>
+                                      </p:cBhvr>
+                                      <p:to>
+                                        <p:strVal val="visible"/>
+                                      </p:to>
+                                    </p:set>
+                                  </p:childTnLst>
+                                </p:cTn>
+                              </p:par>
+                            </p:childTnLst>
+                          </p:cTn>
+                        </p:par>
+                      </p:childTnLst>
+                    </p:cTn>
+                  </p:par>
+                  <p:par>
+                    <p:cTn id="9" fill="hold">
+                      <p:stCondLst>
+                        <p:cond delay="indefinite"/>
+                      </p:stCondLst>
+                      <p:childTnLst>
+                        <p:par>
+                          <p:cTn id="10" fill="hold">
+                            <p:stCondLst>
+                              <p:cond delay="0"/>
+                            </p:stCondLst>
+                            <p:childTnLst>
+                              <p:par>
+                                <p:cTn id="11" presetID="1" presetClass="entr" presetSubtype="0" fill="hold" grpId="0" nodeType="clickEffect">
+                                  <p:stCondLst>
+                                    <p:cond delay="0"/>
+                                  </p:stCondLst>
+                                  <p:childTnLst>
+                                    <p:set>
+                                      <p:cBhvr>
+                                        <p:cTn id="12" dur="1" fill="hold">
+                                          <p:stCondLst>
+                                            <p:cond delay="0"/>
+                                          </p:stCondLst>
+                                        </p:cTn>
+                                        <p:tgtEl>
+                                          <p:spTgt spid="8"/>
+                                        </p:tgtEl>
+                                        <p:attrNameLst>
+                                          <p:attrName>style.visibility</p:attrName>
+                                        </p:attrNameLst>
+                                      </p:cBhvr>
+                                      <p:to>
+                                        <p:strVal val="visible"/>
+                                      </p:to>
+                                    </p:set>
+                                  </p:childTnLst>
+                                </p:cTn>
+                              </p:par>
+                              <p:par>
+                                <p:cTn id="13" presetID="1" presetClass="entr" presetSubtype="0" fill="hold" grpId="0" nodeType="withEffect">
+                                  <p:stCondLst>
+                                    <p:cond delay="0"/>
+                                  </p:stCondLst>
+                                  <p:childTnLst>
+                                    <p:set>
+                                      <p:cBhvr>
+                                        <p:cTn id="14" dur="1" fill="hold">
+                                          <p:stCondLst>
+                                            <p:cond delay="0"/>
+                                          </p:stCondLst>
+                                        </p:cTn>
+                                        <p:tgtEl>
+                                          <p:spTgt spid="6"/>
+                                        </p:tgtEl>
+                                        <p:attrNameLst>
+                                          <p:attrName>style.visibility</p:attrName>
+                                        </p:attrNameLst>
+                                      </p:cBhvr>
+                                      <p:to>
+                                        <p:strVal val="visible"/>
+                                      </p:to>
+                                    </p:set>
+                                  </p:childTnLst>
+                                </p:cTn>
+                              </p:par>
+                            </p:childTnLst>
+                          </p:cTn>
+                        </p:par>
+                      </p:childTnLst>
+                    </p:cTn>
+                  </p:par>
+                </p:childTnLst>
+              </p:cTn>
+              <p:prevCondLst>
+                <p:cond evt="onPrev" delay="0">
+                  <p:tgtEl>
+                    <p:sldTgt/>
+                  </p:tgtEl>
+                </p:cond>
+              </p:prevCondLst>
+              <p:nextCondLst>
+                <p:cond evt="onNext" delay="0">
+                  <p:tgtEl>
+                    <p:sldTgt/>
+                  </p:tgtEl>
+                </p:cond>
+              </p:nextCondLst>
+            </p:seq>
+          </p:childTnLst>
+        </p:cTn>
+      </p:par>
+    </p:tnLst>
+    <p:bldLst>
+      <p:bldP spid="5" grpId="0" animBg="1"/>
+      <p:bldP spid="6" grpId="0" animBg="1"/>
+      <p:bldP spid="7" grpId="0" animBg="1"/>
+      <p:bldP spid="8" grpId="0" animBg="1"/>
+    </p:bldLst>
+  </p:timing>
+</p:sld>
+</file>
+
+<file path=ppt/slides/slide12.xml><?xml version="1.0" encoding="utf-8"?>
+<p:sld xmlns:a="http://schemas.openxmlformats.org/drawingml/2006/main" xmlns:r="http://schemas.openxmlformats.org/officeDocument/2006/relationships" xmlns:p="http://schemas.openxmlformats.org/presentationml/2006/main">
+  <p:cSld>
+    <p:spTree>
+      <p:nvGrpSpPr>
+        <p:cNvPr id="1" name=""/>
+        <p:cNvGrpSpPr/>
+        <p:nvPr/>
+      </p:nvGrpSpPr>
+      <p:grpSpPr>
+        <a:xfrm>
+          <a:off x="0" y="0"/>
+          <a:ext cx="0" cy="0"/>
+          <a:chOff x="0" y="0"/>
+          <a:chExt cx="0" cy="0"/>
+        </a:xfrm>
+      </p:grpSpPr>
+      <p:sp>
+        <p:nvSpPr>
+          <p:cNvPr id="4" name="标题 3">
+            <a:extLst>
+              <a:ext uri="{FF2B5EF4-FFF2-40B4-BE49-F238E27FC236}">
+                <a16:creationId xmlns:a16="http://schemas.microsoft.com/office/drawing/2014/main" id="{85E25EB2-BAEB-7241-9561-AB08FB4100F0}"/>
+              </a:ext>
+            </a:extLst>
+          </p:cNvPr>
+          <p:cNvSpPr>
+            <a:spLocks noGrp="1"/>
+          </p:cNvSpPr>
+          <p:nvPr>
+            <p:ph type="ctrTitle"/>
+          </p:nvPr>
+        </p:nvSpPr>
+        <p:spPr/>
+        <p:txBody>
+          <a:bodyPr/>
+          <a:lstStyle/>
+          <a:p>
+            <a:r>
+              <a:rPr lang="en-US" altLang="zh-CN" dirty="0"/>
+              <a:t>Conditions</a:t>
+            </a:r>
+            <a:endParaRPr lang="zh-CN" altLang="en-US" dirty="0"/>
+          </a:p>
+        </p:txBody>
+      </p:sp>
+      <p:sp>
+        <p:nvSpPr>
+          <p:cNvPr id="5" name="副标题 4">
+            <a:extLst>
+              <a:ext uri="{FF2B5EF4-FFF2-40B4-BE49-F238E27FC236}">
+                <a16:creationId xmlns:a16="http://schemas.microsoft.com/office/drawing/2014/main" id="{00640D8F-B127-2149-841B-D24060309C72}"/>
+              </a:ext>
+            </a:extLst>
+          </p:cNvPr>
+          <p:cNvSpPr>
+            <a:spLocks noGrp="1"/>
+          </p:cNvSpPr>
+          <p:nvPr>
+            <p:ph type="subTitle" idx="1"/>
+          </p:nvPr>
+        </p:nvSpPr>
+        <p:spPr/>
+        <p:txBody>
+          <a:bodyPr/>
+          <a:lstStyle/>
+          <a:p>
+            <a:endParaRPr lang="zh-CN" altLang="en-US"/>
+          </a:p>
+        </p:txBody>
+      </p:sp>
+    </p:spTree>
+    <p:extLst>
+      <p:ext uri="{BB962C8B-B14F-4D97-AF65-F5344CB8AC3E}">
+        <p14:creationId xmlns:p14="http://schemas.microsoft.com/office/powerpoint/2010/main" val="1423434014"/>
+      </p:ext>
+    </p:extLst>
+  </p:cSld>
+  <p:clrMapOvr>
+    <a:masterClrMapping/>
+  </p:clrMapOvr>
+</p:sld>
+</file>
+
+<file path=ppt/slides/slide13.xml><?xml version="1.0" encoding="utf-8"?>
+<p:sld xmlns:a="http://schemas.openxmlformats.org/drawingml/2006/main" xmlns:r="http://schemas.openxmlformats.org/officeDocument/2006/relationships" xmlns:p="http://schemas.openxmlformats.org/presentationml/2006/main">
+  <p:cSld>
+    <p:spTree>
+      <p:nvGrpSpPr>
+        <p:cNvPr id="1" name=""/>
+        <p:cNvGrpSpPr/>
+        <p:nvPr/>
+      </p:nvGrpSpPr>
+      <p:grpSpPr>
+        <a:xfrm>
+          <a:off x="0" y="0"/>
+          <a:ext cx="0" cy="0"/>
+          <a:chOff x="0" y="0"/>
+          <a:chExt cx="0" cy="0"/>
+        </a:xfrm>
+      </p:grpSpPr>
+      <p:sp>
+        <p:nvSpPr>
+          <p:cNvPr id="2" name="标题 1">
+            <a:extLst>
+              <a:ext uri="{FF2B5EF4-FFF2-40B4-BE49-F238E27FC236}">
+                <a16:creationId xmlns:a16="http://schemas.microsoft.com/office/drawing/2014/main" id="{897B92AE-D923-8D42-A8D0-B9EA9C08A908}"/>
+              </a:ext>
+            </a:extLst>
+          </p:cNvPr>
+          <p:cNvSpPr>
+            <a:spLocks noGrp="1"/>
+          </p:cNvSpPr>
+          <p:nvPr>
+            <p:ph type="title"/>
+          </p:nvPr>
+        </p:nvSpPr>
+        <p:spPr/>
+        <p:txBody>
+          <a:bodyPr/>
+          <a:lstStyle/>
+          <a:p>
+            <a:r>
+              <a:rPr kumimoji="1" lang="en-US" altLang="zh-CN" dirty="0"/>
+              <a:t>Condition</a:t>
+            </a:r>
+            <a:endParaRPr kumimoji="1" lang="zh-CN" altLang="en-US" dirty="0"/>
+          </a:p>
+        </p:txBody>
+      </p:sp>
+      <p:sp>
+        <p:nvSpPr>
+          <p:cNvPr id="3" name="内容占位符 2">
+            <a:extLst>
+              <a:ext uri="{FF2B5EF4-FFF2-40B4-BE49-F238E27FC236}">
+                <a16:creationId xmlns:a16="http://schemas.microsoft.com/office/drawing/2014/main" id="{16D15109-B03F-504F-9FC1-46213F2D956F}"/>
+              </a:ext>
+            </a:extLst>
+          </p:cNvPr>
+          <p:cNvSpPr>
+            <a:spLocks noGrp="1"/>
+          </p:cNvSpPr>
+          <p:nvPr>
+            <p:ph idx="1"/>
+          </p:nvPr>
+        </p:nvSpPr>
+        <p:spPr/>
+        <p:txBody>
+          <a:bodyPr/>
+          <a:lstStyle/>
+          <a:p>
+            <a:r>
+              <a:rPr kumimoji="1" lang="en-US" altLang="zh-CN" dirty="0"/>
+              <a:t>What should be a condition?</a:t>
+            </a:r>
+          </a:p>
+          <a:p>
+            <a:endParaRPr kumimoji="1" lang="en-US" altLang="zh-CN" dirty="0"/>
+          </a:p>
+          <a:p>
+            <a:endParaRPr kumimoji="1" lang="en-US" altLang="zh-CN" dirty="0"/>
+          </a:p>
+          <a:p>
+            <a:r>
+              <a:rPr kumimoji="1" lang="en-US" altLang="zh-CN" dirty="0"/>
+              <a:t>The condition should be an expression which is convertible to bool</a:t>
+            </a:r>
+          </a:p>
+          <a:p>
+            <a:pPr lvl="1"/>
+            <a:r>
+              <a:rPr kumimoji="1" lang="en-US" altLang="zh-CN" dirty="0"/>
+              <a:t>Its value can be </a:t>
+            </a:r>
+            <a:r>
+              <a:rPr kumimoji="1" lang="en-US" altLang="zh-CN" dirty="0">
+                <a:solidFill>
+                  <a:srgbClr val="0000CC"/>
+                </a:solidFill>
+                <a:latin typeface="Courier" pitchFamily="2" charset="0"/>
+              </a:rPr>
+              <a:t>bool, char, int, float</a:t>
+            </a:r>
+          </a:p>
+          <a:p>
+            <a:endParaRPr kumimoji="1" lang="en-US" altLang="zh-CN" dirty="0"/>
+          </a:p>
+          <a:p>
+            <a:endParaRPr kumimoji="1" lang="en-US" altLang="zh-CN" dirty="0"/>
+          </a:p>
+          <a:p>
+            <a:endParaRPr kumimoji="1" lang="zh-CN" altLang="en-US" dirty="0"/>
+          </a:p>
+        </p:txBody>
+      </p:sp>
+      <p:sp>
+        <p:nvSpPr>
+          <p:cNvPr id="4" name="矩形 3">
+            <a:extLst>
+              <a:ext uri="{FF2B5EF4-FFF2-40B4-BE49-F238E27FC236}">
+                <a16:creationId xmlns:a16="http://schemas.microsoft.com/office/drawing/2014/main" id="{682CF21F-4D42-BD4F-836F-355699BA0E73}"/>
+              </a:ext>
+            </a:extLst>
+          </p:cNvPr>
+          <p:cNvSpPr/>
+          <p:nvPr/>
+        </p:nvSpPr>
+        <p:spPr>
+          <a:xfrm>
+            <a:off x="1118570" y="1855821"/>
+            <a:ext cx="11031417" cy="923330"/>
+          </a:xfrm>
+          <a:prstGeom prst="rect">
+            <a:avLst/>
+          </a:prstGeom>
+        </p:spPr>
+        <p:txBody>
+          <a:bodyPr wrap="square">
+            <a:spAutoFit/>
+          </a:bodyPr>
+          <a:lstStyle/>
+          <a:p>
+            <a:r>
+              <a:rPr lang="en" altLang="zh-CN" dirty="0">
+                <a:solidFill>
+                  <a:srgbClr val="0000FF"/>
+                </a:solidFill>
+                <a:latin typeface="Menlo" panose="020B0609030804020204" pitchFamily="49" charset="0"/>
+              </a:rPr>
+              <a:t>int</a:t>
+            </a:r>
+            <a:r>
+              <a:rPr lang="en" altLang="zh-CN" dirty="0">
+                <a:solidFill>
+                  <a:srgbClr val="000000"/>
+                </a:solidFill>
+                <a:latin typeface="Menlo" panose="020B0609030804020204" pitchFamily="49" charset="0"/>
+              </a:rPr>
+              <a:t> </a:t>
+            </a:r>
+            <a:r>
+              <a:rPr lang="en" altLang="zh-CN" dirty="0">
+                <a:solidFill>
+                  <a:srgbClr val="001080"/>
+                </a:solidFill>
+                <a:latin typeface="Menlo" panose="020B0609030804020204" pitchFamily="49" charset="0"/>
+              </a:rPr>
+              <a:t>num</a:t>
+            </a:r>
+            <a:r>
+              <a:rPr lang="en" altLang="zh-CN" dirty="0">
+                <a:solidFill>
+                  <a:srgbClr val="000000"/>
+                </a:solidFill>
+                <a:latin typeface="Menlo" panose="020B0609030804020204" pitchFamily="49" charset="0"/>
+              </a:rPr>
+              <a:t> = </a:t>
+            </a:r>
+            <a:r>
+              <a:rPr lang="en" altLang="zh-CN" dirty="0">
+                <a:solidFill>
+                  <a:srgbClr val="098658"/>
+                </a:solidFill>
+                <a:latin typeface="Menlo" panose="020B0609030804020204" pitchFamily="49" charset="0"/>
+              </a:rPr>
+              <a:t>10</a:t>
+            </a:r>
+            <a:r>
+              <a:rPr lang="en" altLang="zh-CN" dirty="0">
+                <a:solidFill>
+                  <a:srgbClr val="000000"/>
+                </a:solidFill>
+                <a:latin typeface="Menlo" panose="020B0609030804020204" pitchFamily="49" charset="0"/>
+              </a:rPr>
+              <a:t>;</a:t>
+            </a:r>
+          </a:p>
+          <a:p>
+            <a:r>
+              <a:rPr lang="en" altLang="zh-CN" dirty="0">
+                <a:solidFill>
+                  <a:srgbClr val="AF00DB"/>
+                </a:solidFill>
+                <a:latin typeface="Menlo" panose="020B0609030804020204" pitchFamily="49" charset="0"/>
+              </a:rPr>
+              <a:t>if</a:t>
+            </a:r>
+            <a:r>
+              <a:rPr lang="en" altLang="zh-CN" dirty="0">
+                <a:solidFill>
+                  <a:srgbClr val="000000"/>
+                </a:solidFill>
+                <a:latin typeface="Menlo" panose="020B0609030804020204" pitchFamily="49" charset="0"/>
+              </a:rPr>
+              <a:t> (</a:t>
+            </a:r>
+            <a:r>
+              <a:rPr lang="en" altLang="zh-CN" dirty="0">
+                <a:solidFill>
+                  <a:srgbClr val="001080"/>
+                </a:solidFill>
+                <a:latin typeface="Menlo" panose="020B0609030804020204" pitchFamily="49" charset="0"/>
+              </a:rPr>
+              <a:t>num</a:t>
+            </a:r>
+            <a:r>
+              <a:rPr lang="en" altLang="zh-CN" dirty="0">
+                <a:solidFill>
+                  <a:srgbClr val="000000"/>
+                </a:solidFill>
+                <a:latin typeface="Menlo" panose="020B0609030804020204" pitchFamily="49" charset="0"/>
+              </a:rPr>
+              <a:t> &lt; </a:t>
+            </a:r>
+            <a:r>
+              <a:rPr lang="en" altLang="zh-CN" dirty="0">
+                <a:solidFill>
+                  <a:srgbClr val="098658"/>
+                </a:solidFill>
+                <a:latin typeface="Menlo" panose="020B0609030804020204" pitchFamily="49" charset="0"/>
+              </a:rPr>
+              <a:t>5</a:t>
+            </a:r>
+            <a:r>
+              <a:rPr lang="en" altLang="zh-CN" dirty="0">
+                <a:solidFill>
+                  <a:srgbClr val="000000"/>
+                </a:solidFill>
+                <a:latin typeface="Menlo" panose="020B0609030804020204" pitchFamily="49" charset="0"/>
+              </a:rPr>
+              <a:t>)</a:t>
+            </a:r>
+          </a:p>
+          <a:p>
+            <a:r>
+              <a:rPr lang="en" altLang="zh-CN" dirty="0">
+                <a:solidFill>
+                  <a:srgbClr val="001080"/>
+                </a:solidFill>
+                <a:latin typeface="Menlo" panose="020B0609030804020204" pitchFamily="49" charset="0"/>
+              </a:rPr>
+              <a:t>    </a:t>
+            </a:r>
+            <a:r>
+              <a:rPr lang="en" altLang="zh-CN" dirty="0" err="1">
+                <a:solidFill>
+                  <a:srgbClr val="001080"/>
+                </a:solidFill>
+                <a:latin typeface="Menlo" panose="020B0609030804020204" pitchFamily="49" charset="0"/>
+              </a:rPr>
+              <a:t>cout</a:t>
+            </a:r>
+            <a:r>
+              <a:rPr lang="en" altLang="zh-CN" dirty="0">
+                <a:solidFill>
+                  <a:srgbClr val="000000"/>
+                </a:solidFill>
+                <a:latin typeface="Menlo" panose="020B0609030804020204" pitchFamily="49" charset="0"/>
+              </a:rPr>
+              <a:t> </a:t>
+            </a:r>
+            <a:r>
+              <a:rPr lang="en" altLang="zh-CN" dirty="0">
+                <a:solidFill>
+                  <a:srgbClr val="795E26"/>
+                </a:solidFill>
+                <a:latin typeface="Menlo" panose="020B0609030804020204" pitchFamily="49" charset="0"/>
+              </a:rPr>
+              <a:t>&lt;&lt;</a:t>
+            </a:r>
+            <a:r>
+              <a:rPr lang="en" altLang="zh-CN" dirty="0">
+                <a:solidFill>
+                  <a:srgbClr val="000000"/>
+                </a:solidFill>
+                <a:latin typeface="Menlo" panose="020B0609030804020204" pitchFamily="49" charset="0"/>
+              </a:rPr>
+              <a:t> </a:t>
+            </a:r>
+            <a:r>
+              <a:rPr lang="en" altLang="zh-CN" dirty="0">
+                <a:solidFill>
+                  <a:srgbClr val="A31515"/>
+                </a:solidFill>
+                <a:latin typeface="Menlo" panose="020B0609030804020204" pitchFamily="49" charset="0"/>
+              </a:rPr>
+              <a:t>"The number is less than 5. "</a:t>
+            </a:r>
+            <a:r>
+              <a:rPr lang="en" altLang="zh-CN" dirty="0">
+                <a:solidFill>
+                  <a:srgbClr val="000000"/>
+                </a:solidFill>
+                <a:latin typeface="Menlo" panose="020B0609030804020204" pitchFamily="49" charset="0"/>
+              </a:rPr>
+              <a:t> </a:t>
+            </a:r>
+            <a:r>
+              <a:rPr lang="en" altLang="zh-CN" dirty="0">
+                <a:solidFill>
+                  <a:srgbClr val="795E26"/>
+                </a:solidFill>
+                <a:latin typeface="Menlo" panose="020B0609030804020204" pitchFamily="49" charset="0"/>
+              </a:rPr>
+              <a:t>&lt;&lt;</a:t>
+            </a:r>
+            <a:r>
+              <a:rPr lang="en" altLang="zh-CN" dirty="0">
+                <a:solidFill>
+                  <a:srgbClr val="000000"/>
+                </a:solidFill>
+                <a:latin typeface="Menlo" panose="020B0609030804020204" pitchFamily="49" charset="0"/>
+              </a:rPr>
+              <a:t> </a:t>
+            </a:r>
+            <a:r>
+              <a:rPr lang="en" altLang="zh-CN" dirty="0" err="1">
+                <a:solidFill>
+                  <a:srgbClr val="795E26"/>
+                </a:solidFill>
+                <a:latin typeface="Menlo" panose="020B0609030804020204" pitchFamily="49" charset="0"/>
+              </a:rPr>
+              <a:t>endl</a:t>
+            </a:r>
+            <a:r>
+              <a:rPr lang="en" altLang="zh-CN" dirty="0">
+                <a:solidFill>
+                  <a:srgbClr val="000000"/>
+                </a:solidFill>
+                <a:latin typeface="Menlo" panose="020B0609030804020204" pitchFamily="49" charset="0"/>
+              </a:rPr>
+              <a:t>;</a:t>
+            </a:r>
+          </a:p>
+        </p:txBody>
+      </p:sp>
+      <p:sp>
+        <p:nvSpPr>
+          <p:cNvPr id="5" name="矩形 4">
+            <a:extLst>
+              <a:ext uri="{FF2B5EF4-FFF2-40B4-BE49-F238E27FC236}">
+                <a16:creationId xmlns:a16="http://schemas.microsoft.com/office/drawing/2014/main" id="{AE808BE4-E12D-0645-BB6E-B03A7EB72933}"/>
+              </a:ext>
+            </a:extLst>
+          </p:cNvPr>
+          <p:cNvSpPr/>
+          <p:nvPr/>
+        </p:nvSpPr>
+        <p:spPr>
+          <a:xfrm>
+            <a:off x="1746738" y="2133600"/>
+            <a:ext cx="996462" cy="339969"/>
+          </a:xfrm>
+          <a:prstGeom prst="rect">
+            <a:avLst/>
+          </a:prstGeom>
+          <a:noFill/>
+          <a:ln w="63500">
+            <a:solidFill>
+              <a:srgbClr val="FF0000"/>
+            </a:solidFill>
+          </a:ln>
+        </p:spPr>
+        <p:style>
+          <a:lnRef idx="2">
+            <a:schemeClr val="accent1">
+              <a:shade val="50000"/>
+            </a:schemeClr>
+          </a:lnRef>
+          <a:fillRef idx="1">
+            <a:schemeClr val="accent1"/>
+          </a:fillRef>
+          <a:effectRef idx="0">
+            <a:schemeClr val="accent1"/>
+          </a:effectRef>
+          <a:fontRef idx="minor">
+            <a:schemeClr val="lt1"/>
+          </a:fontRef>
+        </p:style>
+        <p:txBody>
+          <a:bodyPr rtlCol="0" anchor="ctr"/>
+          <a:lstStyle/>
+          <a:p>
+            <a:pPr algn="ctr"/>
+            <a:endParaRPr kumimoji="1" lang="zh-CN" altLang="en-US"/>
+          </a:p>
+        </p:txBody>
+      </p:sp>
+      <p:sp>
+        <p:nvSpPr>
+          <p:cNvPr id="6" name="下箭头 5">
+            <a:extLst>
+              <a:ext uri="{FF2B5EF4-FFF2-40B4-BE49-F238E27FC236}">
+                <a16:creationId xmlns:a16="http://schemas.microsoft.com/office/drawing/2014/main" id="{05AA1919-9B9E-244F-80CD-E5657988C058}"/>
+              </a:ext>
+            </a:extLst>
+          </p:cNvPr>
+          <p:cNvSpPr/>
+          <p:nvPr/>
+        </p:nvSpPr>
+        <p:spPr>
+          <a:xfrm rot="2558456">
+            <a:off x="3231337" y="859193"/>
+            <a:ext cx="571500" cy="1664258"/>
+          </a:xfrm>
+          <a:prstGeom prst="downArrow">
+            <a:avLst>
+              <a:gd name="adj1" fmla="val 50000"/>
+              <a:gd name="adj2" fmla="val 84286"/>
+            </a:avLst>
+          </a:prstGeom>
+          <a:solidFill>
+            <a:srgbClr val="FF0000">
+              <a:alpha val="58000"/>
+            </a:srgbClr>
+          </a:solidFill>
+          <a:ln>
+            <a:noFill/>
+          </a:ln>
+        </p:spPr>
+        <p:style>
+          <a:lnRef idx="2">
+            <a:schemeClr val="accent1">
+              <a:shade val="50000"/>
+            </a:schemeClr>
+          </a:lnRef>
+          <a:fillRef idx="1">
+            <a:schemeClr val="accent1"/>
+          </a:fillRef>
+          <a:effectRef idx="0">
+            <a:schemeClr val="accent1"/>
+          </a:effectRef>
+          <a:fontRef idx="minor">
+            <a:schemeClr val="lt1"/>
+          </a:fontRef>
+        </p:style>
+        <p:txBody>
+          <a:bodyPr rtlCol="0" anchor="ctr"/>
+          <a:lstStyle/>
+          <a:p>
+            <a:pPr algn="ctr"/>
+            <a:endParaRPr kumimoji="1" lang="zh-CN" altLang="en-US"/>
+          </a:p>
+        </p:txBody>
+      </p:sp>
+    </p:spTree>
+    <p:extLst>
+      <p:ext uri="{BB962C8B-B14F-4D97-AF65-F5344CB8AC3E}">
+        <p14:creationId xmlns:p14="http://schemas.microsoft.com/office/powerpoint/2010/main" val="918786018"/>
+      </p:ext>
+    </p:extLst>
+  </p:cSld>
+  <p:clrMapOvr>
+    <a:masterClrMapping/>
+  </p:clrMapOvr>
+  <p:timing>
+    <p:tnLst>
+      <p:par>
+        <p:cTn id="1" dur="indefinite" restart="never" nodeType="tmRoot">
+          <p:childTnLst>
+            <p:seq concurrent="1" nextAc="seek">
+              <p:cTn id="2" dur="indefinite" nodeType="mainSeq">
+                <p:childTnLst>
+                  <p:par>
+                    <p:cTn id="3" fill="hold">
+                      <p:stCondLst>
+                        <p:cond delay="indefinite"/>
+                      </p:stCondLst>
+                      <p:childTnLst>
+                        <p:par>
+                          <p:cTn id="4" fill="hold">
+                            <p:stCondLst>
+                              <p:cond delay="0"/>
+                            </p:stCondLst>
+                            <p:childTnLst>
+                              <p:par>
+                                <p:cTn id="5" presetID="1" presetClass="entr" presetSubtype="0" fill="hold" nodeType="clickEffect">
+                                  <p:stCondLst>
+                                    <p:cond delay="0"/>
+                                  </p:stCondLst>
+                                  <p:childTnLst>
+                                    <p:set>
+                                      <p:cBhvr>
+                                        <p:cTn id="6" dur="1" fill="hold">
+                                          <p:stCondLst>
+                                            <p:cond delay="0"/>
+                                          </p:stCondLst>
+                                        </p:cTn>
+                                        <p:tgtEl>
+                                          <p:spTgt spid="3">
+                                            <p:txEl>
+                                              <p:pRg st="3" end="3"/>
+                                            </p:txEl>
+                                          </p:spTgt>
+                                        </p:tgtEl>
+                                        <p:attrNameLst>
+                                          <p:attrName>style.visibility</p:attrName>
+                                        </p:attrNameLst>
+                                      </p:cBhvr>
+                                      <p:to>
+                                        <p:strVal val="visible"/>
+                                      </p:to>
+                                    </p:set>
+                                  </p:childTnLst>
+                                </p:cTn>
+                              </p:par>
+                              <p:par>
+                                <p:cTn id="7" presetID="1" presetClass="entr" presetSubtype="0" fill="hold" nodeType="withEffect">
+                                  <p:stCondLst>
+                                    <p:cond delay="0"/>
+                                  </p:stCondLst>
+                                  <p:childTnLst>
+                                    <p:set>
+                                      <p:cBhvr>
+                                        <p:cTn id="8" dur="1" fill="hold">
+                                          <p:stCondLst>
+                                            <p:cond delay="0"/>
+                                          </p:stCondLst>
+                                        </p:cTn>
+                                        <p:tgtEl>
+                                          <p:spTgt spid="3">
+                                            <p:txEl>
+                                              <p:pRg st="4" end="4"/>
+                                            </p:txEl>
+                                          </p:spTgt>
+                                        </p:tgtEl>
+                                        <p:attrNameLst>
+                                          <p:attrName>style.visibility</p:attrName>
+                                        </p:attrNameLst>
+                                      </p:cBhvr>
+                                      <p:to>
+                                        <p:strVal val="visible"/>
+                                      </p:to>
+                                    </p:set>
+                                  </p:childTnLst>
+                                </p:cTn>
+                              </p:par>
+                            </p:childTnLst>
+                          </p:cTn>
+                        </p:par>
+                      </p:childTnLst>
+                    </p:cTn>
+                  </p:par>
+                </p:childTnLst>
+              </p:cTn>
+              <p:prevCondLst>
+                <p:cond evt="onPrev" delay="0">
+                  <p:tgtEl>
+                    <p:sldTgt/>
+                  </p:tgtEl>
+                </p:cond>
+              </p:prevCondLst>
+              <p:nextCondLst>
+                <p:cond evt="onNext" delay="0">
+                  <p:tgtEl>
+                    <p:sldTgt/>
+                  </p:tgtEl>
+                </p:cond>
+              </p:nextCondLst>
+            </p:seq>
+          </p:childTnLst>
+        </p:cTn>
+      </p:par>
+    </p:tnLst>
+  </p:timing>
+</p:sld>
+</file>
+
+<file path=ppt/slides/slide14.xml><?xml version="1.0" encoding="utf-8"?>
+<p:sld xmlns:a="http://schemas.openxmlformats.org/drawingml/2006/main" xmlns:r="http://schemas.openxmlformats.org/officeDocument/2006/relationships" xmlns:p="http://schemas.openxmlformats.org/presentationml/2006/main">
+  <p:cSld>
+    <p:spTree>
+      <p:nvGrpSpPr>
+        <p:cNvPr id="1" name=""/>
+        <p:cNvGrpSpPr/>
+        <p:nvPr/>
+      </p:nvGrpSpPr>
+      <p:grpSpPr>
+        <a:xfrm>
+          <a:off x="0" y="0"/>
+          <a:ext cx="0" cy="0"/>
+          <a:chOff x="0" y="0"/>
+          <a:chExt cx="0" cy="0"/>
+        </a:xfrm>
+      </p:grpSpPr>
+      <p:sp>
+        <p:nvSpPr>
+          <p:cNvPr id="2" name="标题 1">
+            <a:extLst>
+              <a:ext uri="{FF2B5EF4-FFF2-40B4-BE49-F238E27FC236}">
+                <a16:creationId xmlns:a16="http://schemas.microsoft.com/office/drawing/2014/main" id="{3FC1A68A-6D8D-094B-9F52-F4FFBBC2FF2D}"/>
+              </a:ext>
+            </a:extLst>
+          </p:cNvPr>
+          <p:cNvSpPr>
+            <a:spLocks noGrp="1"/>
+          </p:cNvSpPr>
+          <p:nvPr>
+            <p:ph type="title"/>
+          </p:nvPr>
+        </p:nvSpPr>
+        <p:spPr/>
+        <p:txBody>
+          <a:bodyPr/>
+          <a:lstStyle/>
+          <a:p>
+            <a:r>
+              <a:rPr kumimoji="1" lang="en-US" altLang="zh-CN" dirty="0"/>
+              <a:t>Relational Expressions</a:t>
+            </a:r>
+            <a:endParaRPr kumimoji="1" lang="zh-CN" altLang="en-US" dirty="0"/>
+          </a:p>
+        </p:txBody>
+      </p:sp>
+      <p:sp>
+        <p:nvSpPr>
+          <p:cNvPr id="3" name="内容占位符 2">
+            <a:extLst>
+              <a:ext uri="{FF2B5EF4-FFF2-40B4-BE49-F238E27FC236}">
+                <a16:creationId xmlns:a16="http://schemas.microsoft.com/office/drawing/2014/main" id="{32D04BFD-D833-6F4B-B3D5-74584C331ABE}"/>
+              </a:ext>
+            </a:extLst>
+          </p:cNvPr>
+          <p:cNvSpPr>
+            <a:spLocks noGrp="1"/>
+          </p:cNvSpPr>
+          <p:nvPr>
+            <p:ph idx="1"/>
+          </p:nvPr>
+        </p:nvSpPr>
+        <p:spPr>
+          <a:xfrm>
+            <a:off x="838199" y="1326995"/>
+            <a:ext cx="11053879" cy="5266784"/>
+          </a:xfrm>
+        </p:spPr>
+        <p:txBody>
+          <a:bodyPr>
+            <a:normAutofit/>
+          </a:bodyPr>
+          <a:lstStyle/>
+          <a:p>
+            <a:r>
+              <a:rPr kumimoji="1" lang="en-US" altLang="zh-CN" dirty="0"/>
+              <a:t>The condition can be a relational expression</a:t>
+            </a:r>
+          </a:p>
+          <a:p>
+            <a:r>
+              <a:rPr kumimoji="1" lang="en-US" altLang="zh-CN" dirty="0"/>
+              <a:t>The 6 relational/comparison operators</a:t>
+            </a:r>
+          </a:p>
+          <a:p>
+            <a:endParaRPr kumimoji="1" lang="en-US" altLang="zh-CN" dirty="0"/>
+          </a:p>
+          <a:p>
+            <a:endParaRPr kumimoji="1" lang="en-US" altLang="zh-CN" dirty="0"/>
+          </a:p>
+          <a:p>
+            <a:endParaRPr kumimoji="1" lang="en-US" altLang="zh-CN" dirty="0"/>
+          </a:p>
+          <a:p>
+            <a:endParaRPr kumimoji="1" lang="en-US" altLang="zh-CN" dirty="0"/>
+          </a:p>
+          <a:p>
+            <a:endParaRPr kumimoji="1" lang="en-US" altLang="zh-CN" dirty="0"/>
+          </a:p>
+          <a:p>
+            <a:endParaRPr kumimoji="1" lang="en-US" altLang="zh-CN" dirty="0"/>
+          </a:p>
+          <a:p>
+            <a:r>
+              <a:rPr kumimoji="1" lang="en-US" altLang="zh-CN" dirty="0"/>
+              <a:t>Return </a:t>
+            </a:r>
+            <a:r>
+              <a:rPr kumimoji="1" lang="en-US" altLang="zh-CN" dirty="0">
+                <a:solidFill>
+                  <a:srgbClr val="FF0000"/>
+                </a:solidFill>
+              </a:rPr>
+              <a:t>1</a:t>
+            </a:r>
+            <a:r>
+              <a:rPr kumimoji="1" lang="en-US" altLang="zh-CN" dirty="0"/>
+              <a:t> if the condition (such as a==b) is true, </a:t>
+            </a:r>
+          </a:p>
+          <a:p>
+            <a:r>
+              <a:rPr kumimoji="1" lang="en-US" altLang="zh-CN" dirty="0"/>
+              <a:t>Return </a:t>
+            </a:r>
+            <a:r>
+              <a:rPr kumimoji="1" lang="en-US" altLang="zh-CN" dirty="0">
+                <a:solidFill>
+                  <a:srgbClr val="FF0000"/>
+                </a:solidFill>
+              </a:rPr>
+              <a:t>0</a:t>
+            </a:r>
+            <a:r>
+              <a:rPr kumimoji="1" lang="en-US" altLang="zh-CN" dirty="0"/>
+              <a:t> if the condition is false.</a:t>
+            </a:r>
+          </a:p>
+          <a:p>
+            <a:endParaRPr kumimoji="1" lang="en-US" altLang="zh-CN" dirty="0"/>
+          </a:p>
+          <a:p>
+            <a:endParaRPr kumimoji="1" lang="zh-CN" altLang="en-US" dirty="0"/>
+          </a:p>
+        </p:txBody>
+      </p:sp>
+      <p:graphicFrame>
+        <p:nvGraphicFramePr>
+          <p:cNvPr id="4" name="表格 3">
+            <a:extLst>
+              <a:ext uri="{FF2B5EF4-FFF2-40B4-BE49-F238E27FC236}">
+                <a16:creationId xmlns:a16="http://schemas.microsoft.com/office/drawing/2014/main" id="{50C801AF-7580-8C41-956B-F9CF0293EBB9}"/>
+              </a:ext>
+            </a:extLst>
+          </p:cNvPr>
+          <p:cNvGraphicFramePr>
+            <a:graphicFrameLocks noGrp="1"/>
+          </p:cNvGraphicFramePr>
+          <p:nvPr>
+            <p:extLst>
+              <p:ext uri="{D42A27DB-BD31-4B8C-83A1-F6EECF244321}">
+                <p14:modId xmlns:p14="http://schemas.microsoft.com/office/powerpoint/2010/main" val="4096309256"/>
+              </p:ext>
+            </p:extLst>
+          </p:nvPr>
+        </p:nvGraphicFramePr>
+        <p:xfrm>
+          <a:off x="1574469" y="2497329"/>
+          <a:ext cx="5257800" cy="2560320"/>
+        </p:xfrm>
+        <a:graphic>
+          <a:graphicData uri="http://schemas.openxmlformats.org/drawingml/2006/table">
+            <a:tbl>
+              <a:tblPr/>
+              <a:tblGrid>
+                <a:gridCol w="2628900">
+                  <a:extLst>
+                    <a:ext uri="{9D8B030D-6E8A-4147-A177-3AD203B41FA5}">
+                      <a16:colId xmlns:a16="http://schemas.microsoft.com/office/drawing/2014/main" val="2960181136"/>
+                    </a:ext>
+                  </a:extLst>
+                </a:gridCol>
+                <a:gridCol w="2628900">
+                  <a:extLst>
+                    <a:ext uri="{9D8B030D-6E8A-4147-A177-3AD203B41FA5}">
+                      <a16:colId xmlns:a16="http://schemas.microsoft.com/office/drawing/2014/main" val="3710773185"/>
+                    </a:ext>
+                  </a:extLst>
+                </a:gridCol>
+              </a:tblGrid>
+              <a:tr h="0">
+                <a:tc>
+                  <a:txBody>
+                    <a:bodyPr/>
+                    <a:lstStyle/>
+                    <a:p>
+                      <a:pPr algn="ctr"/>
+                      <a:r>
+                        <a:rPr lang="en" b="1" dirty="0">
+                          <a:effectLst/>
+                        </a:rPr>
+                        <a:t>Operator name</a:t>
+                      </a:r>
+                    </a:p>
+                  </a:txBody>
+                  <a:tcPr anchor="ctr">
+                    <a:lnL w="9525" cap="flat" cmpd="sng" algn="ctr">
+                      <a:solidFill>
+                        <a:srgbClr val="AAAAAA"/>
+                      </a:solidFill>
+                      <a:prstDash val="solid"/>
+                      <a:round/>
+                      <a:headEnd type="none" w="med" len="med"/>
+                      <a:tailEnd type="none" w="med" len="med"/>
+                    </a:lnL>
+                    <a:lnR w="9525" cap="flat" cmpd="sng" algn="ctr">
+                      <a:solidFill>
+                        <a:srgbClr val="AAAAAA"/>
+                      </a:solidFill>
+                      <a:prstDash val="solid"/>
+                      <a:round/>
+                      <a:headEnd type="none" w="med" len="med"/>
+                      <a:tailEnd type="none" w="med" len="med"/>
+                    </a:lnR>
+                    <a:lnT w="9525" cap="flat" cmpd="sng" algn="ctr">
+                      <a:solidFill>
+                        <a:srgbClr val="AAAAAA"/>
+                      </a:solidFill>
+                      <a:prstDash val="solid"/>
+                      <a:round/>
+                      <a:headEnd type="none" w="med" len="med"/>
+                      <a:tailEnd type="none" w="med" len="med"/>
+                    </a:lnT>
+                    <a:lnB w="9525" cap="flat" cmpd="sng" algn="ctr">
+                      <a:solidFill>
+                        <a:srgbClr val="AAAAAA"/>
+                      </a:solidFill>
+                      <a:prstDash val="solid"/>
+                      <a:round/>
+                      <a:headEnd type="none" w="med" len="med"/>
+                      <a:tailEnd type="none" w="med" len="med"/>
+                    </a:lnB>
+                    <a:solidFill>
+                      <a:srgbClr val="F2F2F2"/>
+                    </a:solidFill>
+                  </a:tcPr>
+                </a:tc>
+                <a:tc>
+                  <a:txBody>
+                    <a:bodyPr/>
+                    <a:lstStyle/>
+                    <a:p>
+                      <a:pPr algn="ctr"/>
+                      <a:r>
+                        <a:rPr lang="en" b="1" dirty="0">
+                          <a:effectLst/>
+                        </a:rPr>
+                        <a:t>Example</a:t>
+                      </a:r>
+                    </a:p>
+                  </a:txBody>
+                  <a:tcPr anchor="ctr">
+                    <a:lnL w="9525" cap="flat" cmpd="sng" algn="ctr">
+                      <a:solidFill>
+                        <a:srgbClr val="AAAAAA"/>
+                      </a:solidFill>
+                      <a:prstDash val="solid"/>
+                      <a:round/>
+                      <a:headEnd type="none" w="med" len="med"/>
+                      <a:tailEnd type="none" w="med" len="med"/>
+                    </a:lnL>
+                    <a:lnR w="9525" cap="flat" cmpd="sng" algn="ctr">
+                      <a:solidFill>
+                        <a:srgbClr val="AAAAAA"/>
+                      </a:solidFill>
+                      <a:prstDash val="solid"/>
+                      <a:round/>
+                      <a:headEnd type="none" w="med" len="med"/>
+                      <a:tailEnd type="none" w="med" len="med"/>
+                    </a:lnR>
+                    <a:lnT w="9525" cap="flat" cmpd="sng" algn="ctr">
+                      <a:solidFill>
+                        <a:srgbClr val="AAAAAA"/>
+                      </a:solidFill>
+                      <a:prstDash val="solid"/>
+                      <a:round/>
+                      <a:headEnd type="none" w="med" len="med"/>
+                      <a:tailEnd type="none" w="med" len="med"/>
+                    </a:lnT>
+                    <a:lnB w="9525" cap="flat" cmpd="sng" algn="ctr">
+                      <a:solidFill>
+                        <a:srgbClr val="AAAAAA"/>
+                      </a:solidFill>
+                      <a:prstDash val="solid"/>
+                      <a:round/>
+                      <a:headEnd type="none" w="med" len="med"/>
+                      <a:tailEnd type="none" w="med" len="med"/>
+                    </a:lnB>
+                    <a:solidFill>
+                      <a:srgbClr val="F2F2F2"/>
+                    </a:solidFill>
+                  </a:tcPr>
+                </a:tc>
+                <a:extLst>
+                  <a:ext uri="{0D108BD9-81ED-4DB2-BD59-A6C34878D82A}">
+                    <a16:rowId xmlns:a16="http://schemas.microsoft.com/office/drawing/2014/main" val="1585777870"/>
+                  </a:ext>
+                </a:extLst>
+              </a:tr>
+              <a:tr h="0">
+                <a:tc>
+                  <a:txBody>
+                    <a:bodyPr/>
+                    <a:lstStyle/>
+                    <a:p>
+                      <a:r>
+                        <a:rPr lang="en" dirty="0">
+                          <a:effectLst/>
+                        </a:rPr>
+                        <a:t>equal to</a:t>
+                      </a:r>
+                    </a:p>
+                  </a:txBody>
+                  <a:tcPr anchor="ctr">
+                    <a:lnL w="9525" cap="flat" cmpd="sng" algn="ctr">
+                      <a:solidFill>
+                        <a:srgbClr val="AAAAAA"/>
+                      </a:solidFill>
+                      <a:prstDash val="solid"/>
+                      <a:round/>
+                      <a:headEnd type="none" w="med" len="med"/>
+                      <a:tailEnd type="none" w="med" len="med"/>
+                    </a:lnL>
+                    <a:lnR w="9525" cap="flat" cmpd="sng" algn="ctr">
+                      <a:solidFill>
+                        <a:srgbClr val="AAAAAA"/>
+                      </a:solidFill>
+                      <a:prstDash val="solid"/>
+                      <a:round/>
+                      <a:headEnd type="none" w="med" len="med"/>
+                      <a:tailEnd type="none" w="med" len="med"/>
+                    </a:lnR>
+                    <a:lnT w="9525" cap="flat" cmpd="sng" algn="ctr">
+                      <a:solidFill>
+                        <a:srgbClr val="AAAAAA"/>
+                      </a:solidFill>
+                      <a:prstDash val="solid"/>
+                      <a:round/>
+                      <a:headEnd type="none" w="med" len="med"/>
+                      <a:tailEnd type="none" w="med" len="med"/>
+                    </a:lnT>
+                    <a:lnB w="9525" cap="flat" cmpd="sng" algn="ctr">
+                      <a:solidFill>
+                        <a:srgbClr val="AAAAAA"/>
+                      </a:solidFill>
+                      <a:prstDash val="solid"/>
+                      <a:round/>
+                      <a:headEnd type="none" w="med" len="med"/>
+                      <a:tailEnd type="none" w="med" len="med"/>
+                    </a:lnB>
+                    <a:solidFill>
+                      <a:srgbClr val="F9F9F9"/>
+                    </a:solidFill>
+                  </a:tcPr>
+                </a:tc>
+                <a:tc>
+                  <a:txBody>
+                    <a:bodyPr/>
+                    <a:lstStyle/>
+                    <a:p>
+                      <a:r>
+                        <a:rPr lang="en">
+                          <a:effectLst/>
+                          <a:latin typeface="Courier New" panose="02070309020205020404" pitchFamily="49" charset="0"/>
+                        </a:rPr>
+                        <a:t>a </a:t>
+                      </a:r>
+                      <a:r>
+                        <a:rPr lang="en">
+                          <a:solidFill>
+                            <a:srgbClr val="000080"/>
+                          </a:solidFill>
+                          <a:effectLst/>
+                          <a:latin typeface="Courier New" panose="02070309020205020404" pitchFamily="49" charset="0"/>
+                        </a:rPr>
+                        <a:t>==</a:t>
+                      </a:r>
+                      <a:r>
+                        <a:rPr lang="en">
+                          <a:effectLst/>
+                          <a:latin typeface="Courier New" panose="02070309020205020404" pitchFamily="49" charset="0"/>
+                        </a:rPr>
+                        <a:t> b</a:t>
+                      </a:r>
+                      <a:endParaRPr lang="en">
+                        <a:effectLst/>
+                      </a:endParaRPr>
+                    </a:p>
+                  </a:txBody>
+                  <a:tcPr anchor="ctr">
+                    <a:lnL w="9525" cap="flat" cmpd="sng" algn="ctr">
+                      <a:solidFill>
+                        <a:srgbClr val="AAAAAA"/>
+                      </a:solidFill>
+                      <a:prstDash val="solid"/>
+                      <a:round/>
+                      <a:headEnd type="none" w="med" len="med"/>
+                      <a:tailEnd type="none" w="med" len="med"/>
+                    </a:lnL>
+                    <a:lnR w="9525" cap="flat" cmpd="sng" algn="ctr">
+                      <a:solidFill>
+                        <a:srgbClr val="AAAAAA"/>
+                      </a:solidFill>
+                      <a:prstDash val="solid"/>
+                      <a:round/>
+                      <a:headEnd type="none" w="med" len="med"/>
+                      <a:tailEnd type="none" w="med" len="med"/>
+                    </a:lnR>
+                    <a:lnT w="9525" cap="flat" cmpd="sng" algn="ctr">
+                      <a:solidFill>
+                        <a:srgbClr val="AAAAAA"/>
+                      </a:solidFill>
+                      <a:prstDash val="solid"/>
+                      <a:round/>
+                      <a:headEnd type="none" w="med" len="med"/>
+                      <a:tailEnd type="none" w="med" len="med"/>
+                    </a:lnT>
+                    <a:lnB w="9525" cap="flat" cmpd="sng" algn="ctr">
+                      <a:solidFill>
+                        <a:srgbClr val="AAAAAA"/>
+                      </a:solidFill>
+                      <a:prstDash val="solid"/>
+                      <a:round/>
+                      <a:headEnd type="none" w="med" len="med"/>
+                      <a:tailEnd type="none" w="med" len="med"/>
+                    </a:lnB>
+                    <a:solidFill>
+                      <a:srgbClr val="F9F9F9"/>
+                    </a:solidFill>
+                  </a:tcPr>
+                </a:tc>
+                <a:extLst>
+                  <a:ext uri="{0D108BD9-81ED-4DB2-BD59-A6C34878D82A}">
+                    <a16:rowId xmlns:a16="http://schemas.microsoft.com/office/drawing/2014/main" val="3253263833"/>
+                  </a:ext>
+                </a:extLst>
+              </a:tr>
+              <a:tr h="0">
+                <a:tc>
+                  <a:txBody>
+                    <a:bodyPr/>
+                    <a:lstStyle/>
+                    <a:p>
+                      <a:r>
+                        <a:rPr lang="en">
+                          <a:effectLst/>
+                        </a:rPr>
+                        <a:t>not equal to</a:t>
+                      </a:r>
+                    </a:p>
+                  </a:txBody>
+                  <a:tcPr anchor="ctr">
+                    <a:lnL w="9525" cap="flat" cmpd="sng" algn="ctr">
+                      <a:solidFill>
+                        <a:srgbClr val="AAAAAA"/>
+                      </a:solidFill>
+                      <a:prstDash val="solid"/>
+                      <a:round/>
+                      <a:headEnd type="none" w="med" len="med"/>
+                      <a:tailEnd type="none" w="med" len="med"/>
+                    </a:lnL>
+                    <a:lnR w="9525" cap="flat" cmpd="sng" algn="ctr">
+                      <a:solidFill>
+                        <a:srgbClr val="AAAAAA"/>
+                      </a:solidFill>
+                      <a:prstDash val="solid"/>
+                      <a:round/>
+                      <a:headEnd type="none" w="med" len="med"/>
+                      <a:tailEnd type="none" w="med" len="med"/>
+                    </a:lnR>
+                    <a:lnT w="9525" cap="flat" cmpd="sng" algn="ctr">
+                      <a:solidFill>
+                        <a:srgbClr val="AAAAAA"/>
+                      </a:solidFill>
+                      <a:prstDash val="solid"/>
+                      <a:round/>
+                      <a:headEnd type="none" w="med" len="med"/>
+                      <a:tailEnd type="none" w="med" len="med"/>
+                    </a:lnT>
+                    <a:lnB w="9525" cap="flat" cmpd="sng" algn="ctr">
+                      <a:solidFill>
+                        <a:srgbClr val="AAAAAA"/>
+                      </a:solidFill>
+                      <a:prstDash val="solid"/>
+                      <a:round/>
+                      <a:headEnd type="none" w="med" len="med"/>
+                      <a:tailEnd type="none" w="med" len="med"/>
+                    </a:lnB>
+                    <a:solidFill>
+                      <a:srgbClr val="F9F9F9"/>
+                    </a:solidFill>
+                  </a:tcPr>
+                </a:tc>
+                <a:tc>
+                  <a:txBody>
+                    <a:bodyPr/>
+                    <a:lstStyle/>
+                    <a:p>
+                      <a:r>
+                        <a:rPr lang="en">
+                          <a:effectLst/>
+                          <a:latin typeface="Courier New" panose="02070309020205020404" pitchFamily="49" charset="0"/>
+                        </a:rPr>
+                        <a:t>a </a:t>
+                      </a:r>
+                      <a:r>
+                        <a:rPr lang="en">
+                          <a:solidFill>
+                            <a:srgbClr val="000040"/>
+                          </a:solidFill>
+                          <a:effectLst/>
+                          <a:latin typeface="Courier New" panose="02070309020205020404" pitchFamily="49" charset="0"/>
+                        </a:rPr>
+                        <a:t>!</a:t>
+                      </a:r>
+                      <a:r>
+                        <a:rPr lang="en">
+                          <a:solidFill>
+                            <a:srgbClr val="000080"/>
+                          </a:solidFill>
+                          <a:effectLst/>
+                          <a:latin typeface="Courier New" panose="02070309020205020404" pitchFamily="49" charset="0"/>
+                        </a:rPr>
+                        <a:t>=</a:t>
+                      </a:r>
+                      <a:r>
+                        <a:rPr lang="en">
+                          <a:effectLst/>
+                          <a:latin typeface="Courier New" panose="02070309020205020404" pitchFamily="49" charset="0"/>
+                        </a:rPr>
+                        <a:t> b</a:t>
+                      </a:r>
+                      <a:endParaRPr lang="en">
+                        <a:effectLst/>
+                      </a:endParaRPr>
+                    </a:p>
+                  </a:txBody>
+                  <a:tcPr anchor="ctr">
+                    <a:lnL w="9525" cap="flat" cmpd="sng" algn="ctr">
+                      <a:solidFill>
+                        <a:srgbClr val="AAAAAA"/>
+                      </a:solidFill>
+                      <a:prstDash val="solid"/>
+                      <a:round/>
+                      <a:headEnd type="none" w="med" len="med"/>
+                      <a:tailEnd type="none" w="med" len="med"/>
+                    </a:lnL>
+                    <a:lnR w="9525" cap="flat" cmpd="sng" algn="ctr">
+                      <a:solidFill>
+                        <a:srgbClr val="AAAAAA"/>
+                      </a:solidFill>
+                      <a:prstDash val="solid"/>
+                      <a:round/>
+                      <a:headEnd type="none" w="med" len="med"/>
+                      <a:tailEnd type="none" w="med" len="med"/>
+                    </a:lnR>
+                    <a:lnT w="9525" cap="flat" cmpd="sng" algn="ctr">
+                      <a:solidFill>
+                        <a:srgbClr val="AAAAAA"/>
+                      </a:solidFill>
+                      <a:prstDash val="solid"/>
+                      <a:round/>
+                      <a:headEnd type="none" w="med" len="med"/>
+                      <a:tailEnd type="none" w="med" len="med"/>
+                    </a:lnT>
+                    <a:lnB w="9525" cap="flat" cmpd="sng" algn="ctr">
+                      <a:solidFill>
+                        <a:srgbClr val="AAAAAA"/>
+                      </a:solidFill>
+                      <a:prstDash val="solid"/>
+                      <a:round/>
+                      <a:headEnd type="none" w="med" len="med"/>
+                      <a:tailEnd type="none" w="med" len="med"/>
+                    </a:lnB>
+                    <a:solidFill>
+                      <a:srgbClr val="F9F9F9"/>
+                    </a:solidFill>
+                  </a:tcPr>
+                </a:tc>
+                <a:extLst>
+                  <a:ext uri="{0D108BD9-81ED-4DB2-BD59-A6C34878D82A}">
+                    <a16:rowId xmlns:a16="http://schemas.microsoft.com/office/drawing/2014/main" val="28837203"/>
+                  </a:ext>
+                </a:extLst>
+              </a:tr>
+              <a:tr h="0">
+                <a:tc>
+                  <a:txBody>
+                    <a:bodyPr/>
+                    <a:lstStyle/>
+                    <a:p>
+                      <a:r>
+                        <a:rPr lang="en">
+                          <a:effectLst/>
+                        </a:rPr>
+                        <a:t>less than</a:t>
+                      </a:r>
+                    </a:p>
+                  </a:txBody>
+                  <a:tcPr anchor="ctr">
+                    <a:lnL w="9525" cap="flat" cmpd="sng" algn="ctr">
+                      <a:solidFill>
+                        <a:srgbClr val="AAAAAA"/>
+                      </a:solidFill>
+                      <a:prstDash val="solid"/>
+                      <a:round/>
+                      <a:headEnd type="none" w="med" len="med"/>
+                      <a:tailEnd type="none" w="med" len="med"/>
+                    </a:lnL>
+                    <a:lnR w="9525" cap="flat" cmpd="sng" algn="ctr">
+                      <a:solidFill>
+                        <a:srgbClr val="AAAAAA"/>
+                      </a:solidFill>
+                      <a:prstDash val="solid"/>
+                      <a:round/>
+                      <a:headEnd type="none" w="med" len="med"/>
+                      <a:tailEnd type="none" w="med" len="med"/>
+                    </a:lnR>
+                    <a:lnT w="9525" cap="flat" cmpd="sng" algn="ctr">
+                      <a:solidFill>
+                        <a:srgbClr val="AAAAAA"/>
+                      </a:solidFill>
+                      <a:prstDash val="solid"/>
+                      <a:round/>
+                      <a:headEnd type="none" w="med" len="med"/>
+                      <a:tailEnd type="none" w="med" len="med"/>
+                    </a:lnT>
+                    <a:lnB w="9525" cap="flat" cmpd="sng" algn="ctr">
+                      <a:solidFill>
+                        <a:srgbClr val="AAAAAA"/>
+                      </a:solidFill>
+                      <a:prstDash val="solid"/>
+                      <a:round/>
+                      <a:headEnd type="none" w="med" len="med"/>
+                      <a:tailEnd type="none" w="med" len="med"/>
+                    </a:lnB>
+                    <a:solidFill>
+                      <a:srgbClr val="F9F9F9"/>
+                    </a:solidFill>
+                  </a:tcPr>
+                </a:tc>
+                <a:tc>
+                  <a:txBody>
+                    <a:bodyPr/>
+                    <a:lstStyle/>
+                    <a:p>
+                      <a:r>
+                        <a:rPr lang="en">
+                          <a:effectLst/>
+                          <a:latin typeface="Courier New" panose="02070309020205020404" pitchFamily="49" charset="0"/>
+                        </a:rPr>
+                        <a:t>a </a:t>
+                      </a:r>
+                      <a:r>
+                        <a:rPr lang="en">
+                          <a:solidFill>
+                            <a:srgbClr val="000080"/>
+                          </a:solidFill>
+                          <a:effectLst/>
+                          <a:latin typeface="Courier New" panose="02070309020205020404" pitchFamily="49" charset="0"/>
+                        </a:rPr>
+                        <a:t>&lt;</a:t>
+                      </a:r>
+                      <a:r>
+                        <a:rPr lang="en">
+                          <a:effectLst/>
+                          <a:latin typeface="Courier New" panose="02070309020205020404" pitchFamily="49" charset="0"/>
+                        </a:rPr>
+                        <a:t> b</a:t>
+                      </a:r>
+                      <a:endParaRPr lang="en">
+                        <a:effectLst/>
+                      </a:endParaRPr>
+                    </a:p>
+                  </a:txBody>
+                  <a:tcPr anchor="ctr">
+                    <a:lnL w="9525" cap="flat" cmpd="sng" algn="ctr">
+                      <a:solidFill>
+                        <a:srgbClr val="AAAAAA"/>
+                      </a:solidFill>
+                      <a:prstDash val="solid"/>
+                      <a:round/>
+                      <a:headEnd type="none" w="med" len="med"/>
+                      <a:tailEnd type="none" w="med" len="med"/>
+                    </a:lnL>
+                    <a:lnR w="9525" cap="flat" cmpd="sng" algn="ctr">
+                      <a:solidFill>
+                        <a:srgbClr val="AAAAAA"/>
+                      </a:solidFill>
+                      <a:prstDash val="solid"/>
+                      <a:round/>
+                      <a:headEnd type="none" w="med" len="med"/>
+                      <a:tailEnd type="none" w="med" len="med"/>
+                    </a:lnR>
+                    <a:lnT w="9525" cap="flat" cmpd="sng" algn="ctr">
+                      <a:solidFill>
+                        <a:srgbClr val="AAAAAA"/>
+                      </a:solidFill>
+                      <a:prstDash val="solid"/>
+                      <a:round/>
+                      <a:headEnd type="none" w="med" len="med"/>
+                      <a:tailEnd type="none" w="med" len="med"/>
+                    </a:lnT>
+                    <a:lnB w="9525" cap="flat" cmpd="sng" algn="ctr">
+                      <a:solidFill>
+                        <a:srgbClr val="AAAAAA"/>
+                      </a:solidFill>
+                      <a:prstDash val="solid"/>
+                      <a:round/>
+                      <a:headEnd type="none" w="med" len="med"/>
+                      <a:tailEnd type="none" w="med" len="med"/>
+                    </a:lnB>
+                    <a:solidFill>
+                      <a:srgbClr val="F9F9F9"/>
+                    </a:solidFill>
+                  </a:tcPr>
+                </a:tc>
+                <a:extLst>
+                  <a:ext uri="{0D108BD9-81ED-4DB2-BD59-A6C34878D82A}">
+                    <a16:rowId xmlns:a16="http://schemas.microsoft.com/office/drawing/2014/main" val="1168153131"/>
+                  </a:ext>
+                </a:extLst>
+              </a:tr>
+              <a:tr h="0">
+                <a:tc>
+                  <a:txBody>
+                    <a:bodyPr/>
+                    <a:lstStyle/>
+                    <a:p>
+                      <a:r>
+                        <a:rPr lang="en">
+                          <a:effectLst/>
+                        </a:rPr>
+                        <a:t>greater than</a:t>
+                      </a:r>
+                    </a:p>
+                  </a:txBody>
+                  <a:tcPr anchor="ctr">
+                    <a:lnL w="9525" cap="flat" cmpd="sng" algn="ctr">
+                      <a:solidFill>
+                        <a:srgbClr val="AAAAAA"/>
+                      </a:solidFill>
+                      <a:prstDash val="solid"/>
+                      <a:round/>
+                      <a:headEnd type="none" w="med" len="med"/>
+                      <a:tailEnd type="none" w="med" len="med"/>
+                    </a:lnL>
+                    <a:lnR w="9525" cap="flat" cmpd="sng" algn="ctr">
+                      <a:solidFill>
+                        <a:srgbClr val="AAAAAA"/>
+                      </a:solidFill>
+                      <a:prstDash val="solid"/>
+                      <a:round/>
+                      <a:headEnd type="none" w="med" len="med"/>
+                      <a:tailEnd type="none" w="med" len="med"/>
+                    </a:lnR>
+                    <a:lnT w="9525" cap="flat" cmpd="sng" algn="ctr">
+                      <a:solidFill>
+                        <a:srgbClr val="AAAAAA"/>
+                      </a:solidFill>
+                      <a:prstDash val="solid"/>
+                      <a:round/>
+                      <a:headEnd type="none" w="med" len="med"/>
+                      <a:tailEnd type="none" w="med" len="med"/>
+                    </a:lnT>
+                    <a:lnB w="9525" cap="flat" cmpd="sng" algn="ctr">
+                      <a:solidFill>
+                        <a:srgbClr val="AAAAAA"/>
+                      </a:solidFill>
+                      <a:prstDash val="solid"/>
+                      <a:round/>
+                      <a:headEnd type="none" w="med" len="med"/>
+                      <a:tailEnd type="none" w="med" len="med"/>
+                    </a:lnB>
+                    <a:solidFill>
+                      <a:srgbClr val="F9F9F9"/>
+                    </a:solidFill>
+                  </a:tcPr>
+                </a:tc>
+                <a:tc>
+                  <a:txBody>
+                    <a:bodyPr/>
+                    <a:lstStyle/>
+                    <a:p>
+                      <a:r>
+                        <a:rPr lang="en">
+                          <a:effectLst/>
+                          <a:latin typeface="Courier New" panose="02070309020205020404" pitchFamily="49" charset="0"/>
+                        </a:rPr>
+                        <a:t>a </a:t>
+                      </a:r>
+                      <a:r>
+                        <a:rPr lang="en">
+                          <a:solidFill>
+                            <a:srgbClr val="000080"/>
+                          </a:solidFill>
+                          <a:effectLst/>
+                          <a:latin typeface="Courier New" panose="02070309020205020404" pitchFamily="49" charset="0"/>
+                        </a:rPr>
+                        <a:t>&gt;</a:t>
+                      </a:r>
+                      <a:r>
+                        <a:rPr lang="en">
+                          <a:effectLst/>
+                          <a:latin typeface="Courier New" panose="02070309020205020404" pitchFamily="49" charset="0"/>
+                        </a:rPr>
+                        <a:t> b</a:t>
+                      </a:r>
+                      <a:endParaRPr lang="en">
+                        <a:effectLst/>
+                      </a:endParaRPr>
+                    </a:p>
+                  </a:txBody>
+                  <a:tcPr anchor="ctr">
+                    <a:lnL w="9525" cap="flat" cmpd="sng" algn="ctr">
+                      <a:solidFill>
+                        <a:srgbClr val="AAAAAA"/>
+                      </a:solidFill>
+                      <a:prstDash val="solid"/>
+                      <a:round/>
+                      <a:headEnd type="none" w="med" len="med"/>
+                      <a:tailEnd type="none" w="med" len="med"/>
+                    </a:lnL>
+                    <a:lnR w="9525" cap="flat" cmpd="sng" algn="ctr">
+                      <a:solidFill>
+                        <a:srgbClr val="AAAAAA"/>
+                      </a:solidFill>
+                      <a:prstDash val="solid"/>
+                      <a:round/>
+                      <a:headEnd type="none" w="med" len="med"/>
+                      <a:tailEnd type="none" w="med" len="med"/>
+                    </a:lnR>
+                    <a:lnT w="9525" cap="flat" cmpd="sng" algn="ctr">
+                      <a:solidFill>
+                        <a:srgbClr val="AAAAAA"/>
+                      </a:solidFill>
+                      <a:prstDash val="solid"/>
+                      <a:round/>
+                      <a:headEnd type="none" w="med" len="med"/>
+                      <a:tailEnd type="none" w="med" len="med"/>
+                    </a:lnT>
+                    <a:lnB w="9525" cap="flat" cmpd="sng" algn="ctr">
+                      <a:solidFill>
+                        <a:srgbClr val="AAAAAA"/>
+                      </a:solidFill>
+                      <a:prstDash val="solid"/>
+                      <a:round/>
+                      <a:headEnd type="none" w="med" len="med"/>
+                      <a:tailEnd type="none" w="med" len="med"/>
+                    </a:lnB>
+                    <a:solidFill>
+                      <a:srgbClr val="F9F9F9"/>
+                    </a:solidFill>
+                  </a:tcPr>
+                </a:tc>
+                <a:extLst>
+                  <a:ext uri="{0D108BD9-81ED-4DB2-BD59-A6C34878D82A}">
+                    <a16:rowId xmlns:a16="http://schemas.microsoft.com/office/drawing/2014/main" val="1762171246"/>
+                  </a:ext>
+                </a:extLst>
+              </a:tr>
+              <a:tr h="0">
+                <a:tc>
+                  <a:txBody>
+                    <a:bodyPr/>
+                    <a:lstStyle/>
+                    <a:p>
+                      <a:r>
+                        <a:rPr lang="en">
+                          <a:effectLst/>
+                        </a:rPr>
+                        <a:t>less than or equal to</a:t>
+                      </a:r>
+                    </a:p>
+                  </a:txBody>
+                  <a:tcPr anchor="ctr">
+                    <a:lnL w="9525" cap="flat" cmpd="sng" algn="ctr">
+                      <a:solidFill>
+                        <a:srgbClr val="AAAAAA"/>
+                      </a:solidFill>
+                      <a:prstDash val="solid"/>
+                      <a:round/>
+                      <a:headEnd type="none" w="med" len="med"/>
+                      <a:tailEnd type="none" w="med" len="med"/>
+                    </a:lnL>
+                    <a:lnR w="9525" cap="flat" cmpd="sng" algn="ctr">
+                      <a:solidFill>
+                        <a:srgbClr val="AAAAAA"/>
+                      </a:solidFill>
+                      <a:prstDash val="solid"/>
+                      <a:round/>
+                      <a:headEnd type="none" w="med" len="med"/>
+                      <a:tailEnd type="none" w="med" len="med"/>
+                    </a:lnR>
+                    <a:lnT w="9525" cap="flat" cmpd="sng" algn="ctr">
+                      <a:solidFill>
+                        <a:srgbClr val="AAAAAA"/>
+                      </a:solidFill>
+                      <a:prstDash val="solid"/>
+                      <a:round/>
+                      <a:headEnd type="none" w="med" len="med"/>
+                      <a:tailEnd type="none" w="med" len="med"/>
+                    </a:lnT>
+                    <a:lnB w="9525" cap="flat" cmpd="sng" algn="ctr">
+                      <a:solidFill>
+                        <a:srgbClr val="AAAAAA"/>
+                      </a:solidFill>
+                      <a:prstDash val="solid"/>
+                      <a:round/>
+                      <a:headEnd type="none" w="med" len="med"/>
+                      <a:tailEnd type="none" w="med" len="med"/>
+                    </a:lnB>
+                    <a:solidFill>
+                      <a:srgbClr val="F9F9F9"/>
+                    </a:solidFill>
+                  </a:tcPr>
+                </a:tc>
+                <a:tc>
+                  <a:txBody>
+                    <a:bodyPr/>
+                    <a:lstStyle/>
+                    <a:p>
+                      <a:r>
+                        <a:rPr lang="en" dirty="0">
+                          <a:effectLst/>
+                          <a:latin typeface="Courier New" panose="02070309020205020404" pitchFamily="49" charset="0"/>
+                        </a:rPr>
+                        <a:t>a </a:t>
+                      </a:r>
+                      <a:r>
+                        <a:rPr lang="en" dirty="0">
+                          <a:solidFill>
+                            <a:srgbClr val="000080"/>
+                          </a:solidFill>
+                          <a:effectLst/>
+                          <a:latin typeface="Courier New" panose="02070309020205020404" pitchFamily="49" charset="0"/>
+                        </a:rPr>
+                        <a:t>&lt;=</a:t>
+                      </a:r>
+                      <a:r>
+                        <a:rPr lang="en" dirty="0">
+                          <a:effectLst/>
+                          <a:latin typeface="Courier New" panose="02070309020205020404" pitchFamily="49" charset="0"/>
+                        </a:rPr>
+                        <a:t> b</a:t>
+                      </a:r>
+                      <a:endParaRPr lang="en" dirty="0">
+                        <a:effectLst/>
+                      </a:endParaRPr>
+                    </a:p>
+                  </a:txBody>
+                  <a:tcPr anchor="ctr">
+                    <a:lnL w="9525" cap="flat" cmpd="sng" algn="ctr">
+                      <a:solidFill>
+                        <a:srgbClr val="AAAAAA"/>
+                      </a:solidFill>
+                      <a:prstDash val="solid"/>
+                      <a:round/>
+                      <a:headEnd type="none" w="med" len="med"/>
+                      <a:tailEnd type="none" w="med" len="med"/>
+                    </a:lnL>
+                    <a:lnR w="9525" cap="flat" cmpd="sng" algn="ctr">
+                      <a:solidFill>
+                        <a:srgbClr val="AAAAAA"/>
+                      </a:solidFill>
+                      <a:prstDash val="solid"/>
+                      <a:round/>
+                      <a:headEnd type="none" w="med" len="med"/>
+                      <a:tailEnd type="none" w="med" len="med"/>
+                    </a:lnR>
+                    <a:lnT w="9525" cap="flat" cmpd="sng" algn="ctr">
+                      <a:solidFill>
+                        <a:srgbClr val="AAAAAA"/>
+                      </a:solidFill>
+                      <a:prstDash val="solid"/>
+                      <a:round/>
+                      <a:headEnd type="none" w="med" len="med"/>
+                      <a:tailEnd type="none" w="med" len="med"/>
+                    </a:lnT>
+                    <a:lnB w="9525" cap="flat" cmpd="sng" algn="ctr">
+                      <a:solidFill>
+                        <a:srgbClr val="AAAAAA"/>
+                      </a:solidFill>
+                      <a:prstDash val="solid"/>
+                      <a:round/>
+                      <a:headEnd type="none" w="med" len="med"/>
+                      <a:tailEnd type="none" w="med" len="med"/>
+                    </a:lnB>
+                    <a:solidFill>
+                      <a:srgbClr val="F9F9F9"/>
+                    </a:solidFill>
+                  </a:tcPr>
+                </a:tc>
+                <a:extLst>
+                  <a:ext uri="{0D108BD9-81ED-4DB2-BD59-A6C34878D82A}">
+                    <a16:rowId xmlns:a16="http://schemas.microsoft.com/office/drawing/2014/main" val="562538222"/>
+                  </a:ext>
+                </a:extLst>
+              </a:tr>
+              <a:tr h="0">
+                <a:tc>
+                  <a:txBody>
+                    <a:bodyPr/>
+                    <a:lstStyle/>
+                    <a:p>
+                      <a:r>
+                        <a:rPr lang="en" dirty="0">
+                          <a:effectLst/>
+                        </a:rPr>
+                        <a:t>greater than or equal to</a:t>
+                      </a:r>
+                    </a:p>
+                  </a:txBody>
+                  <a:tcPr anchor="ctr">
+                    <a:lnL w="9525" cap="flat" cmpd="sng" algn="ctr">
+                      <a:solidFill>
+                        <a:srgbClr val="AAAAAA"/>
+                      </a:solidFill>
+                      <a:prstDash val="solid"/>
+                      <a:round/>
+                      <a:headEnd type="none" w="med" len="med"/>
+                      <a:tailEnd type="none" w="med" len="med"/>
+                    </a:lnL>
+                    <a:lnR w="9525" cap="flat" cmpd="sng" algn="ctr">
+                      <a:solidFill>
+                        <a:srgbClr val="AAAAAA"/>
+                      </a:solidFill>
+                      <a:prstDash val="solid"/>
+                      <a:round/>
+                      <a:headEnd type="none" w="med" len="med"/>
+                      <a:tailEnd type="none" w="med" len="med"/>
+                    </a:lnR>
+                    <a:lnT w="9525" cap="flat" cmpd="sng" algn="ctr">
+                      <a:solidFill>
+                        <a:srgbClr val="AAAAAA"/>
+                      </a:solidFill>
+                      <a:prstDash val="solid"/>
+                      <a:round/>
+                      <a:headEnd type="none" w="med" len="med"/>
+                      <a:tailEnd type="none" w="med" len="med"/>
+                    </a:lnT>
+                    <a:lnB w="9525" cap="flat" cmpd="sng" algn="ctr">
+                      <a:solidFill>
+                        <a:srgbClr val="AAAAAA"/>
+                      </a:solidFill>
+                      <a:prstDash val="solid"/>
+                      <a:round/>
+                      <a:headEnd type="none" w="med" len="med"/>
+                      <a:tailEnd type="none" w="med" len="med"/>
+                    </a:lnB>
+                    <a:solidFill>
+                      <a:srgbClr val="F9F9F9"/>
+                    </a:solidFill>
+                  </a:tcPr>
+                </a:tc>
+                <a:tc>
+                  <a:txBody>
+                    <a:bodyPr/>
+                    <a:lstStyle/>
+                    <a:p>
+                      <a:r>
+                        <a:rPr lang="en" dirty="0">
+                          <a:effectLst/>
+                          <a:latin typeface="Courier New" panose="02070309020205020404" pitchFamily="49" charset="0"/>
+                        </a:rPr>
+                        <a:t>a </a:t>
+                      </a:r>
+                      <a:r>
+                        <a:rPr lang="en" dirty="0">
+                          <a:solidFill>
+                            <a:srgbClr val="000080"/>
+                          </a:solidFill>
+                          <a:effectLst/>
+                          <a:latin typeface="Courier New" panose="02070309020205020404" pitchFamily="49" charset="0"/>
+                        </a:rPr>
+                        <a:t>&gt;=</a:t>
+                      </a:r>
+                      <a:r>
+                        <a:rPr lang="en" dirty="0">
+                          <a:effectLst/>
+                          <a:latin typeface="Courier New" panose="02070309020205020404" pitchFamily="49" charset="0"/>
+                        </a:rPr>
+                        <a:t> b</a:t>
+                      </a:r>
+                      <a:endParaRPr lang="en" dirty="0">
+                        <a:effectLst/>
+                      </a:endParaRPr>
+                    </a:p>
+                  </a:txBody>
+                  <a:tcPr anchor="ctr">
+                    <a:lnL w="9525" cap="flat" cmpd="sng" algn="ctr">
+                      <a:solidFill>
+                        <a:srgbClr val="AAAAAA"/>
+                      </a:solidFill>
+                      <a:prstDash val="solid"/>
+                      <a:round/>
+                      <a:headEnd type="none" w="med" len="med"/>
+                      <a:tailEnd type="none" w="med" len="med"/>
+                    </a:lnL>
+                    <a:lnR w="9525" cap="flat" cmpd="sng" algn="ctr">
+                      <a:solidFill>
+                        <a:srgbClr val="AAAAAA"/>
+                      </a:solidFill>
+                      <a:prstDash val="solid"/>
+                      <a:round/>
+                      <a:headEnd type="none" w="med" len="med"/>
+                      <a:tailEnd type="none" w="med" len="med"/>
+                    </a:lnR>
+                    <a:lnT w="9525" cap="flat" cmpd="sng" algn="ctr">
+                      <a:solidFill>
+                        <a:srgbClr val="AAAAAA"/>
+                      </a:solidFill>
+                      <a:prstDash val="solid"/>
+                      <a:round/>
+                      <a:headEnd type="none" w="med" len="med"/>
+                      <a:tailEnd type="none" w="med" len="med"/>
+                    </a:lnT>
+                    <a:lnB w="9525" cap="flat" cmpd="sng" algn="ctr">
+                      <a:solidFill>
+                        <a:srgbClr val="AAAAAA"/>
+                      </a:solidFill>
+                      <a:prstDash val="solid"/>
+                      <a:round/>
+                      <a:headEnd type="none" w="med" len="med"/>
+                      <a:tailEnd type="none" w="med" len="med"/>
+                    </a:lnB>
+                    <a:solidFill>
+                      <a:srgbClr val="F9F9F9"/>
+                    </a:solidFill>
+                  </a:tcPr>
+                </a:tc>
+                <a:extLst>
+                  <a:ext uri="{0D108BD9-81ED-4DB2-BD59-A6C34878D82A}">
+                    <a16:rowId xmlns:a16="http://schemas.microsoft.com/office/drawing/2014/main" val="3816769454"/>
+                  </a:ext>
+                </a:extLst>
+              </a:tr>
+            </a:tbl>
+          </a:graphicData>
+        </a:graphic>
+      </p:graphicFrame>
+    </p:spTree>
+    <p:extLst>
+      <p:ext uri="{BB962C8B-B14F-4D97-AF65-F5344CB8AC3E}">
+        <p14:creationId xmlns:p14="http://schemas.microsoft.com/office/powerpoint/2010/main" val="1953677503"/>
+      </p:ext>
+    </p:extLst>
+  </p:cSld>
+  <p:clrMapOvr>
+    <a:masterClrMapping/>
+  </p:clrMapOvr>
+</p:sld>
+</file>
+
+<file path=ppt/slides/slide15.xml><?xml version="1.0" encoding="utf-8"?>
 <p:sld xmlns:a="http://schemas.openxmlformats.org/drawingml/2006/main" xmlns:r="http://schemas.openxmlformats.org/officeDocument/2006/relationships" xmlns:p="http://schemas.openxmlformats.org/presentationml/2006/main">
   <p:cSld>
     <p:spTree>
@@ -5769,7 +8993,7 @@
 </p:sld>
 </file>
 
-<file path=ppt/slides/slide11.xml><?xml version="1.0" encoding="utf-8"?>
+<file path=ppt/slides/slide16.xml><?xml version="1.0" encoding="utf-8"?>
 <p:sld xmlns:a="http://schemas.openxmlformats.org/drawingml/2006/main" xmlns:r="http://schemas.openxmlformats.org/officeDocument/2006/relationships" xmlns:p="http://schemas.openxmlformats.org/presentationml/2006/main">
   <p:cSld>
     <p:spTree>
@@ -6346,7 +9570,7 @@
 </p:sld>
 </file>
 
-<file path=ppt/slides/slide12.xml><?xml version="1.0" encoding="utf-8"?>
+<file path=ppt/slides/slide17.xml><?xml version="1.0" encoding="utf-8"?>
 <p:sld xmlns:a="http://schemas.openxmlformats.org/drawingml/2006/main" xmlns:r="http://schemas.openxmlformats.org/officeDocument/2006/relationships" xmlns:p="http://schemas.openxmlformats.org/presentationml/2006/main">
   <p:cSld>
     <p:spTree>
@@ -6439,7 +9663,7 @@
 </p:sld>
 </file>
 
-<file path=ppt/slides/slide13.xml><?xml version="1.0" encoding="utf-8"?>
+<file path=ppt/slides/slide18.xml><?xml version="1.0" encoding="utf-8"?>
 <p:sld xmlns:a="http://schemas.openxmlformats.org/drawingml/2006/main" xmlns:r="http://schemas.openxmlformats.org/officeDocument/2006/relationships" xmlns:p="http://schemas.openxmlformats.org/presentationml/2006/main">
   <p:cSld>
     <p:spTree>
@@ -7164,7 +10388,7 @@
 </p:sld>
 </file>
 
-<file path=ppt/slides/slide14.xml><?xml version="1.0" encoding="utf-8"?>
+<file path=ppt/slides/slide19.xml><?xml version="1.0" encoding="utf-8"?>
 <p:sld xmlns:a="http://schemas.openxmlformats.org/drawingml/2006/main" xmlns:r="http://schemas.openxmlformats.org/officeDocument/2006/relationships" xmlns:p="http://schemas.openxmlformats.org/presentationml/2006/main">
   <p:cSld>
     <p:spTree>
@@ -7547,7 +10771,164 @@
 </p:sld>
 </file>
 
-<file path=ppt/slides/slide15.xml><?xml version="1.0" encoding="utf-8"?>
+<file path=ppt/slides/slide2.xml><?xml version="1.0" encoding="utf-8"?>
+<p:sld xmlns:a="http://schemas.openxmlformats.org/drawingml/2006/main" xmlns:r="http://schemas.openxmlformats.org/officeDocument/2006/relationships" xmlns:p="http://schemas.openxmlformats.org/presentationml/2006/main">
+  <p:cSld>
+    <p:spTree>
+      <p:nvGrpSpPr>
+        <p:cNvPr id="1" name=""/>
+        <p:cNvGrpSpPr/>
+        <p:nvPr/>
+      </p:nvGrpSpPr>
+      <p:grpSpPr>
+        <a:xfrm>
+          <a:off x="0" y="0"/>
+          <a:ext cx="0" cy="0"/>
+          <a:chOff x="0" y="0"/>
+          <a:chExt cx="0" cy="0"/>
+        </a:xfrm>
+      </p:grpSpPr>
+      <p:sp>
+        <p:nvSpPr>
+          <p:cNvPr id="2" name="标题 1">
+            <a:extLst>
+              <a:ext uri="{FF2B5EF4-FFF2-40B4-BE49-F238E27FC236}">
+                <a16:creationId xmlns:a16="http://schemas.microsoft.com/office/drawing/2014/main" id="{729CE55F-3988-0343-3314-497EC35E963A}"/>
+              </a:ext>
+            </a:extLst>
+          </p:cNvPr>
+          <p:cNvSpPr>
+            <a:spLocks noGrp="1"/>
+          </p:cNvSpPr>
+          <p:nvPr>
+            <p:ph type="title"/>
+          </p:nvPr>
+        </p:nvSpPr>
+        <p:spPr/>
+        <p:txBody>
+          <a:bodyPr/>
+          <a:lstStyle/>
+          <a:p>
+            <a:r>
+              <a:rPr kumimoji="1" lang="en-US" altLang="zh-CN" dirty="0"/>
+              <a:t>Questions</a:t>
+            </a:r>
+            <a:endParaRPr kumimoji="1" lang="zh-CN" altLang="en-US" dirty="0"/>
+          </a:p>
+        </p:txBody>
+      </p:sp>
+      <p:sp>
+        <p:nvSpPr>
+          <p:cNvPr id="3" name="内容占位符 2">
+            <a:extLst>
+              <a:ext uri="{FF2B5EF4-FFF2-40B4-BE49-F238E27FC236}">
+                <a16:creationId xmlns:a16="http://schemas.microsoft.com/office/drawing/2014/main" id="{7F8C31AE-A32E-DCE8-3FB2-C83113E37BD9}"/>
+              </a:ext>
+            </a:extLst>
+          </p:cNvPr>
+          <p:cNvSpPr>
+            <a:spLocks noGrp="1"/>
+          </p:cNvSpPr>
+          <p:nvPr>
+            <p:ph idx="1"/>
+          </p:nvPr>
+        </p:nvSpPr>
+        <p:spPr/>
+        <p:txBody>
+          <a:bodyPr/>
+          <a:lstStyle/>
+          <a:p>
+            <a:pPr marL="0" indent="0">
+              <a:buNone/>
+            </a:pPr>
+            <a:r>
+              <a:rPr kumimoji="1" lang="en-US" altLang="zh-CN" dirty="0"/>
+              <a:t>In OpenCV there is a class </a:t>
+            </a:r>
+            <a:r>
+              <a:rPr kumimoji="1" lang="en-US" altLang="zh-CN" dirty="0">
+                <a:latin typeface="Courier New" panose="02070309020205020404" pitchFamily="49" charset="0"/>
+                <a:cs typeface="Courier New" panose="02070309020205020404" pitchFamily="49" charset="0"/>
+              </a:rPr>
+              <a:t>cv::Mat </a:t>
+            </a:r>
+            <a:r>
+              <a:rPr kumimoji="1" lang="en-US" altLang="zh-CN" dirty="0"/>
+              <a:t>for matrices. Find the answers to the questions from the source code of OpenCV at </a:t>
+            </a:r>
+            <a:r>
+              <a:rPr kumimoji="1" lang="en-US" altLang="zh-CN" dirty="0">
+                <a:hlinkClick r:id="rId2"/>
+              </a:rPr>
+              <a:t>https://github.com/opencv/opencv</a:t>
+            </a:r>
+            <a:r>
+              <a:rPr kumimoji="1" lang="en-US" altLang="zh-CN" dirty="0"/>
+              <a:t> </a:t>
+            </a:r>
+          </a:p>
+          <a:p>
+            <a:r>
+              <a:rPr kumimoji="1" lang="en-US" altLang="zh-CN" dirty="0"/>
+              <a:t>How many data types does OpenCV's </a:t>
+            </a:r>
+            <a:r>
+              <a:rPr kumimoji="1" lang="en-US" altLang="zh-CN" dirty="0">
+                <a:latin typeface="Courier New" panose="02070309020205020404" pitchFamily="49" charset="0"/>
+                <a:cs typeface="Courier New" panose="02070309020205020404" pitchFamily="49" charset="0"/>
+              </a:rPr>
+              <a:t>cv::Mat </a:t>
+            </a:r>
+            <a:r>
+              <a:rPr kumimoji="1" lang="en-US" altLang="zh-CN" dirty="0"/>
+              <a:t>class support for matrix elements?</a:t>
+            </a:r>
+          </a:p>
+          <a:p>
+            <a:r>
+              <a:rPr kumimoji="1" lang="en-US" altLang="zh-CN" dirty="0"/>
+              <a:t>How does </a:t>
+            </a:r>
+            <a:r>
+              <a:rPr kumimoji="1" lang="en-US" altLang="zh-CN" dirty="0">
+                <a:latin typeface="Courier New" panose="02070309020205020404" pitchFamily="49" charset="0"/>
+                <a:cs typeface="Courier New" panose="02070309020205020404" pitchFamily="49" charset="0"/>
+              </a:rPr>
+              <a:t>cv::Mat </a:t>
+            </a:r>
+            <a:r>
+              <a:rPr kumimoji="1" lang="en-US" altLang="zh-CN" dirty="0"/>
+              <a:t>handle data types when the size of </a:t>
+            </a:r>
+            <a:r>
+              <a:rPr kumimoji="1" lang="en-US" altLang="zh-CN" dirty="0">
+                <a:latin typeface="Courier New" panose="02070309020205020404" pitchFamily="49" charset="0"/>
+                <a:cs typeface="Courier New" panose="02070309020205020404" pitchFamily="49" charset="0"/>
+              </a:rPr>
+              <a:t>int</a:t>
+            </a:r>
+            <a:r>
+              <a:rPr kumimoji="1" lang="en-US" altLang="zh-CN" dirty="0"/>
+              <a:t> may not be 32 bits on different platforms?</a:t>
+            </a:r>
+            <a:endParaRPr kumimoji="1" lang="zh-CN" altLang="en-US" dirty="0"/>
+          </a:p>
+        </p:txBody>
+      </p:sp>
+    </p:spTree>
+    <p:extLst>
+      <p:ext uri="{BB962C8B-B14F-4D97-AF65-F5344CB8AC3E}">
+        <p14:creationId xmlns:p14="http://schemas.microsoft.com/office/powerpoint/2010/main" val="4281358624"/>
+      </p:ext>
+    </p:extLst>
+  </p:cSld>
+  <p:clrMapOvr>
+    <a:masterClrMapping/>
+  </p:clrMapOvr>
+</p:sld>
+</file>
+
+<file path=ppt/slides/slide20.xml><?xml version="1.0" encoding="utf-8"?>
 <p:sld xmlns:a="http://schemas.openxmlformats.org/drawingml/2006/main" xmlns:r="http://schemas.openxmlformats.org/officeDocument/2006/relationships" xmlns:p="http://schemas.openxmlformats.org/presentationml/2006/main">
   <p:cSld>
     <p:spTree>
@@ -7957,7 +11338,7 @@
 </p:sld>
 </file>
 
-<file path=ppt/slides/slide16.xml><?xml version="1.0" encoding="utf-8"?>
+<file path=ppt/slides/slide21.xml><?xml version="1.0" encoding="utf-8"?>
 <p:sld xmlns:a="http://schemas.openxmlformats.org/drawingml/2006/main" xmlns:r="http://schemas.openxmlformats.org/officeDocument/2006/relationships" xmlns:p="http://schemas.openxmlformats.org/presentationml/2006/main">
   <p:cSld>
     <p:spTree>
@@ -8367,7 +11748,7 @@
 </p:sld>
 </file>
 
-<file path=ppt/slides/slide17.xml><?xml version="1.0" encoding="utf-8"?>
+<file path=ppt/slides/slide22.xml><?xml version="1.0" encoding="utf-8"?>
 <p:sld xmlns:a="http://schemas.openxmlformats.org/drawingml/2006/main" xmlns:r="http://schemas.openxmlformats.org/officeDocument/2006/relationships" xmlns:p="http://schemas.openxmlformats.org/presentationml/2006/main">
   <p:cSld>
     <p:spTree>
@@ -8660,7 +12041,7 @@
 </p:sld>
 </file>
 
-<file path=ppt/slides/slide18.xml><?xml version="1.0" encoding="utf-8"?>
+<file path=ppt/slides/slide23.xml><?xml version="1.0" encoding="utf-8"?>
 <p:sld xmlns:a="http://schemas.openxmlformats.org/drawingml/2006/main" xmlns:r="http://schemas.openxmlformats.org/officeDocument/2006/relationships" xmlns:p="http://schemas.openxmlformats.org/presentationml/2006/main">
   <p:cSld>
     <p:spTree>
@@ -9312,7 +12693,7 @@
 </p:sld>
 </file>
 
-<file path=ppt/slides/slide19.xml><?xml version="1.0" encoding="utf-8"?>
+<file path=ppt/slides/slide24.xml><?xml version="1.0" encoding="utf-8"?>
 <p:sld xmlns:a="http://schemas.openxmlformats.org/drawingml/2006/main" xmlns:r="http://schemas.openxmlformats.org/officeDocument/2006/relationships" xmlns:p="http://schemas.openxmlformats.org/presentationml/2006/main">
   <p:cSld>
     <p:spTree>
@@ -9769,100 +13150,7 @@
 </p:sld>
 </file>
 
-<file path=ppt/slides/slide2.xml><?xml version="1.0" encoding="utf-8"?>
-<p:sld xmlns:a="http://schemas.openxmlformats.org/drawingml/2006/main" xmlns:r="http://schemas.openxmlformats.org/officeDocument/2006/relationships" xmlns:p="http://schemas.openxmlformats.org/presentationml/2006/main">
-  <p:cSld>
-    <p:spTree>
-      <p:nvGrpSpPr>
-        <p:cNvPr id="1" name=""/>
-        <p:cNvGrpSpPr/>
-        <p:nvPr/>
-      </p:nvGrpSpPr>
-      <p:grpSpPr>
-        <a:xfrm>
-          <a:off x="0" y="0"/>
-          <a:ext cx="0" cy="0"/>
-          <a:chOff x="0" y="0"/>
-          <a:chExt cx="0" cy="0"/>
-        </a:xfrm>
-      </p:grpSpPr>
-      <p:sp>
-        <p:nvSpPr>
-          <p:cNvPr id="4" name="标题 3">
-            <a:extLst>
-              <a:ext uri="{FF2B5EF4-FFF2-40B4-BE49-F238E27FC236}">
-                <a16:creationId xmlns:a16="http://schemas.microsoft.com/office/drawing/2014/main" id="{B0FA92D6-4BB7-BD42-BCAD-DD80549E59AA}"/>
-              </a:ext>
-            </a:extLst>
-          </p:cNvPr>
-          <p:cNvSpPr>
-            <a:spLocks noGrp="1"/>
-          </p:cNvSpPr>
-          <p:nvPr>
-            <p:ph type="ctrTitle"/>
-          </p:nvPr>
-        </p:nvSpPr>
-        <p:spPr/>
-        <p:txBody>
-          <a:bodyPr/>
-          <a:lstStyle/>
-          <a:p>
-            <a:r>
-              <a:rPr lang="en" altLang="zh-CN" dirty="0">
-                <a:solidFill>
-                  <a:srgbClr val="0000CC"/>
-                </a:solidFill>
-                <a:latin typeface="Courier" pitchFamily="2" charset="0"/>
-              </a:rPr>
-              <a:t>if</a:t>
-            </a:r>
-            <a:r>
-              <a:rPr lang="en" altLang="zh-CN" dirty="0"/>
-              <a:t> Statement</a:t>
-            </a:r>
-            <a:endParaRPr lang="zh-CN" altLang="en-US" dirty="0"/>
-          </a:p>
-        </p:txBody>
-      </p:sp>
-      <p:sp>
-        <p:nvSpPr>
-          <p:cNvPr id="5" name="副标题 4">
-            <a:extLst>
-              <a:ext uri="{FF2B5EF4-FFF2-40B4-BE49-F238E27FC236}">
-                <a16:creationId xmlns:a16="http://schemas.microsoft.com/office/drawing/2014/main" id="{B1B75FC0-F7E5-3640-AE81-27EBD76CF360}"/>
-              </a:ext>
-            </a:extLst>
-          </p:cNvPr>
-          <p:cNvSpPr>
-            <a:spLocks noGrp="1"/>
-          </p:cNvSpPr>
-          <p:nvPr>
-            <p:ph type="subTitle" idx="1"/>
-          </p:nvPr>
-        </p:nvSpPr>
-        <p:spPr/>
-        <p:txBody>
-          <a:bodyPr/>
-          <a:lstStyle/>
-          <a:p>
-            <a:endParaRPr lang="zh-CN" altLang="en-US"/>
-          </a:p>
-        </p:txBody>
-      </p:sp>
-    </p:spTree>
-    <p:extLst>
-      <p:ext uri="{BB962C8B-B14F-4D97-AF65-F5344CB8AC3E}">
-        <p14:creationId xmlns:p14="http://schemas.microsoft.com/office/powerpoint/2010/main" val="315370420"/>
-      </p:ext>
-    </p:extLst>
-  </p:cSld>
-  <p:clrMapOvr>
-    <a:masterClrMapping/>
-  </p:clrMapOvr>
-</p:sld>
-</file>
-
-<file path=ppt/slides/slide20.xml><?xml version="1.0" encoding="utf-8"?>
+<file path=ppt/slides/slide25.xml><?xml version="1.0" encoding="utf-8"?>
 <p:sld xmlns:a="http://schemas.openxmlformats.org/drawingml/2006/main" xmlns:r="http://schemas.openxmlformats.org/officeDocument/2006/relationships" xmlns:p="http://schemas.openxmlformats.org/presentationml/2006/main">
   <p:cSld>
     <p:spTree>
@@ -9955,7 +13243,7 @@
 </p:sld>
 </file>
 
-<file path=ppt/slides/slide21.xml><?xml version="1.0" encoding="utf-8"?>
+<file path=ppt/slides/slide26.xml><?xml version="1.0" encoding="utf-8"?>
 <p:sld xmlns:a="http://schemas.openxmlformats.org/drawingml/2006/main" xmlns:r="http://schemas.openxmlformats.org/officeDocument/2006/relationships" xmlns:p="http://schemas.openxmlformats.org/presentationml/2006/main">
   <p:cSld>
     <p:spTree>
@@ -10730,7 +14018,7 @@
 </p:sld>
 </file>
 
-<file path=ppt/slides/slide22.xml><?xml version="1.0" encoding="utf-8"?>
+<file path=ppt/slides/slide27.xml><?xml version="1.0" encoding="utf-8"?>
 <p:sld xmlns:a="http://schemas.openxmlformats.org/drawingml/2006/main" xmlns:r="http://schemas.openxmlformats.org/officeDocument/2006/relationships" xmlns:p="http://schemas.openxmlformats.org/presentationml/2006/main">
   <p:cSld>
     <p:spTree>
@@ -11941,7 +15229,7 @@
 </p:sld>
 </file>
 
-<file path=ppt/slides/slide23.xml><?xml version="1.0" encoding="utf-8"?>
+<file path=ppt/slides/slide28.xml><?xml version="1.0" encoding="utf-8"?>
 <p:sld xmlns:a="http://schemas.openxmlformats.org/drawingml/2006/main" xmlns:r="http://schemas.openxmlformats.org/officeDocument/2006/relationships" xmlns:p="http://schemas.openxmlformats.org/presentationml/2006/main">
   <p:cSld>
     <p:spTree>
@@ -12410,7 +15698,7 @@
 </p:sld>
 </file>
 
-<file path=ppt/slides/slide24.xml><?xml version="1.0" encoding="utf-8"?>
+<file path=ppt/slides/slide29.xml><?xml version="1.0" encoding="utf-8"?>
 <p:sld xmlns:a="http://schemas.openxmlformats.org/drawingml/2006/main" xmlns:r="http://schemas.openxmlformats.org/officeDocument/2006/relationships" xmlns:p="http://schemas.openxmlformats.org/presentationml/2006/main">
   <p:cSld>
     <p:spTree>
@@ -12846,7 +16134,170 @@
 </p:sld>
 </file>
 
-<file path=ppt/slides/slide25.xml><?xml version="1.0" encoding="utf-8"?>
+<file path=ppt/slides/slide3.xml><?xml version="1.0" encoding="utf-8"?>
+<p:sld xmlns:a="http://schemas.openxmlformats.org/drawingml/2006/main" xmlns:r="http://schemas.openxmlformats.org/officeDocument/2006/relationships" xmlns:p="http://schemas.openxmlformats.org/presentationml/2006/main">
+  <p:cSld>
+    <p:spTree>
+      <p:nvGrpSpPr>
+        <p:cNvPr id="1" name=""/>
+        <p:cNvGrpSpPr/>
+        <p:nvPr/>
+      </p:nvGrpSpPr>
+      <p:grpSpPr>
+        <a:xfrm>
+          <a:off x="0" y="0"/>
+          <a:ext cx="0" cy="0"/>
+          <a:chOff x="0" y="0"/>
+          <a:chExt cx="0" cy="0"/>
+        </a:xfrm>
+      </p:grpSpPr>
+      <p:sp>
+        <p:nvSpPr>
+          <p:cNvPr id="2" name="标题 1">
+            <a:extLst>
+              <a:ext uri="{FF2B5EF4-FFF2-40B4-BE49-F238E27FC236}">
+                <a16:creationId xmlns:a16="http://schemas.microsoft.com/office/drawing/2014/main" id="{DD4227F6-5BF4-C4D9-EEE1-F13F03FFC9FF}"/>
+              </a:ext>
+            </a:extLst>
+          </p:cNvPr>
+          <p:cNvSpPr>
+            <a:spLocks noGrp="1"/>
+          </p:cNvSpPr>
+          <p:nvPr>
+            <p:ph type="title"/>
+          </p:nvPr>
+        </p:nvSpPr>
+        <p:spPr/>
+        <p:txBody>
+          <a:bodyPr/>
+          <a:lstStyle/>
+          <a:p>
+            <a:r>
+              <a:rPr kumimoji="1" lang="en-US" altLang="zh-CN" dirty="0"/>
+              <a:t>Hints</a:t>
+            </a:r>
+            <a:endParaRPr kumimoji="1" lang="zh-CN" altLang="en-US" dirty="0"/>
+          </a:p>
+        </p:txBody>
+      </p:sp>
+      <p:sp>
+        <p:nvSpPr>
+          <p:cNvPr id="3" name="内容占位符 2">
+            <a:extLst>
+              <a:ext uri="{FF2B5EF4-FFF2-40B4-BE49-F238E27FC236}">
+                <a16:creationId xmlns:a16="http://schemas.microsoft.com/office/drawing/2014/main" id="{9D99A69B-582B-7EC0-26C9-D5FA40D38A78}"/>
+              </a:ext>
+            </a:extLst>
+          </p:cNvPr>
+          <p:cNvSpPr>
+            <a:spLocks noGrp="1"/>
+          </p:cNvSpPr>
+          <p:nvPr>
+            <p:ph idx="1"/>
+          </p:nvPr>
+        </p:nvSpPr>
+        <p:spPr>
+          <a:xfrm>
+            <a:off x="838200" y="1097853"/>
+            <a:ext cx="9308336" cy="962302"/>
+          </a:xfrm>
+        </p:spPr>
+        <p:txBody>
+          <a:bodyPr>
+            <a:normAutofit/>
+          </a:bodyPr>
+          <a:lstStyle/>
+          <a:p>
+            <a:pPr marL="0" indent="0">
+              <a:buNone/>
+            </a:pPr>
+            <a:r>
+              <a:rPr kumimoji="1" lang="en" altLang="zh-CN" sz="2400" dirty="0"/>
+              <a:t>/modules/core/include/opencv2/core/</a:t>
+            </a:r>
+            <a:r>
+              <a:rPr kumimoji="1" lang="en" altLang="zh-CN" sz="2400" dirty="0" err="1"/>
+              <a:t>hal</a:t>
+            </a:r>
+            <a:r>
+              <a:rPr kumimoji="1" lang="en" altLang="zh-CN" sz="2400" dirty="0"/>
+              <a:t>/</a:t>
+            </a:r>
+            <a:r>
+              <a:rPr kumimoji="1" lang="en" altLang="zh-CN" sz="2400" dirty="0" err="1"/>
+              <a:t>interface.h</a:t>
+            </a:r>
+            <a:endParaRPr kumimoji="1" lang="en" altLang="zh-CN" sz="2400" dirty="0"/>
+          </a:p>
+          <a:p>
+            <a:r>
+              <a:rPr kumimoji="1" lang="en-US" altLang="zh-CN" sz="2400" dirty="0"/>
+              <a:t>CV_8U</a:t>
+            </a:r>
+            <a:r>
+              <a:rPr kumimoji="1" lang="zh-CN" altLang="en-US" sz="2400" dirty="0"/>
+              <a:t> </a:t>
+            </a:r>
+            <a:r>
+              <a:rPr kumimoji="1" lang="en-US" altLang="zh-CN" sz="2400" dirty="0"/>
+              <a:t>-&gt;</a:t>
+            </a:r>
+            <a:r>
+              <a:rPr kumimoji="1" lang="zh-CN" altLang="en-US" sz="2400" dirty="0"/>
+              <a:t> </a:t>
+            </a:r>
+            <a:r>
+              <a:rPr kumimoji="1" lang="en-US" altLang="zh-CN" sz="2400" dirty="0"/>
+              <a:t>CV_MAKETYPE</a:t>
+            </a:r>
+            <a:endParaRPr kumimoji="1" lang="zh-CN" altLang="en-US" sz="2400" dirty="0"/>
+          </a:p>
+        </p:txBody>
+      </p:sp>
+      <p:pic>
+        <p:nvPicPr>
+          <p:cNvPr id="5" name="图片 4">
+            <a:extLst>
+              <a:ext uri="{FF2B5EF4-FFF2-40B4-BE49-F238E27FC236}">
+                <a16:creationId xmlns:a16="http://schemas.microsoft.com/office/drawing/2014/main" id="{FB15AA09-05BA-1006-6BCE-94E2CB26D171}"/>
+              </a:ext>
+            </a:extLst>
+          </p:cNvPr>
+          <p:cNvPicPr>
+            <a:picLocks noChangeAspect="1"/>
+          </p:cNvPicPr>
+          <p:nvPr/>
+        </p:nvPicPr>
+        <p:blipFill>
+          <a:blip r:embed="rId2"/>
+          <a:stretch>
+            <a:fillRect/>
+          </a:stretch>
+        </p:blipFill>
+        <p:spPr>
+          <a:xfrm>
+            <a:off x="2598865" y="2199806"/>
+            <a:ext cx="6218215" cy="4658194"/>
+          </a:xfrm>
+          <a:prstGeom prst="rect">
+            <a:avLst/>
+          </a:prstGeom>
+        </p:spPr>
+      </p:pic>
+    </p:spTree>
+    <p:extLst>
+      <p:ext uri="{BB962C8B-B14F-4D97-AF65-F5344CB8AC3E}">
+        <p14:creationId xmlns:p14="http://schemas.microsoft.com/office/powerpoint/2010/main" val="3151845367"/>
+      </p:ext>
+    </p:extLst>
+  </p:cSld>
+  <p:clrMapOvr>
+    <a:masterClrMapping/>
+  </p:clrMapOvr>
+</p:sld>
+</file>
+
+<file path=ppt/slides/slide30.xml><?xml version="1.0" encoding="utf-8"?>
 <p:sld xmlns:a="http://schemas.openxmlformats.org/drawingml/2006/main" xmlns:r="http://schemas.openxmlformats.org/officeDocument/2006/relationships" xmlns:p="http://schemas.openxmlformats.org/presentationml/2006/main">
   <p:cSld>
     <p:spTree>
@@ -12945,7 +16396,7 @@
 </p:sld>
 </file>
 
-<file path=ppt/slides/slide26.xml><?xml version="1.0" encoding="utf-8"?>
+<file path=ppt/slides/slide31.xml><?xml version="1.0" encoding="utf-8"?>
 <p:sld xmlns:a="http://schemas.openxmlformats.org/drawingml/2006/main" xmlns:r="http://schemas.openxmlformats.org/officeDocument/2006/relationships" xmlns:p="http://schemas.openxmlformats.org/presentationml/2006/main">
   <p:cSld>
     <p:spTree>
@@ -13060,7 +16511,7 @@
 </p:sld>
 </file>
 
-<file path=ppt/slides/slide27.xml><?xml version="1.0" encoding="utf-8"?>
+<file path=ppt/slides/slide32.xml><?xml version="1.0" encoding="utf-8"?>
 <p:sld xmlns:a="http://schemas.openxmlformats.org/drawingml/2006/main" xmlns:r="http://schemas.openxmlformats.org/officeDocument/2006/relationships" xmlns:p="http://schemas.openxmlformats.org/presentationml/2006/main">
   <p:cSld>
     <p:spTree>
@@ -13855,7 +17306,7 @@
 </p:sld>
 </file>
 
-<file path=ppt/slides/slide28.xml><?xml version="1.0" encoding="utf-8"?>
+<file path=ppt/slides/slide33.xml><?xml version="1.0" encoding="utf-8"?>
 <p:sld xmlns:a="http://schemas.openxmlformats.org/drawingml/2006/main" xmlns:r="http://schemas.openxmlformats.org/officeDocument/2006/relationships" xmlns:p="http://schemas.openxmlformats.org/presentationml/2006/main">
   <p:cSld>
     <p:spTree>
@@ -14730,7 +18181,747 @@
 </p:sld>
 </file>
 
-<file path=ppt/slides/slide3.xml><?xml version="1.0" encoding="utf-8"?>
+<file path=ppt/slides/slide34.xml><?xml version="1.0" encoding="utf-8"?>
+<p:sld xmlns:a="http://schemas.openxmlformats.org/drawingml/2006/main" xmlns:r="http://schemas.openxmlformats.org/officeDocument/2006/relationships" xmlns:p="http://schemas.openxmlformats.org/presentationml/2006/main">
+  <p:cSld>
+    <p:spTree>
+      <p:nvGrpSpPr>
+        <p:cNvPr id="1" name=""/>
+        <p:cNvGrpSpPr/>
+        <p:nvPr/>
+      </p:nvGrpSpPr>
+      <p:grpSpPr>
+        <a:xfrm>
+          <a:off x="0" y="0"/>
+          <a:ext cx="0" cy="0"/>
+          <a:chOff x="0" y="0"/>
+          <a:chExt cx="0" cy="0"/>
+        </a:xfrm>
+      </p:grpSpPr>
+      <p:sp>
+        <p:nvSpPr>
+          <p:cNvPr id="2" name="标题 1">
+            <a:extLst>
+              <a:ext uri="{FF2B5EF4-FFF2-40B4-BE49-F238E27FC236}">
+                <a16:creationId xmlns:a16="http://schemas.microsoft.com/office/drawing/2014/main" id="{613EE758-45AB-58C6-8CD9-E3DF99E82922}"/>
+              </a:ext>
+            </a:extLst>
+          </p:cNvPr>
+          <p:cNvSpPr>
+            <a:spLocks noGrp="1"/>
+          </p:cNvSpPr>
+          <p:nvPr>
+            <p:ph type="title"/>
+          </p:nvPr>
+        </p:nvSpPr>
+        <p:spPr/>
+        <p:txBody>
+          <a:bodyPr/>
+          <a:lstStyle/>
+          <a:p>
+            <a:r>
+              <a:rPr kumimoji="1" lang="en-US" altLang="zh-CN" dirty="0"/>
+              <a:t>Questions</a:t>
+            </a:r>
+            <a:endParaRPr kumimoji="1" lang="zh-CN" altLang="en-US" dirty="0"/>
+          </a:p>
+        </p:txBody>
+      </p:sp>
+      <p:sp>
+        <p:nvSpPr>
+          <p:cNvPr id="3" name="内容占位符 2">
+            <a:extLst>
+              <a:ext uri="{FF2B5EF4-FFF2-40B4-BE49-F238E27FC236}">
+                <a16:creationId xmlns:a16="http://schemas.microsoft.com/office/drawing/2014/main" id="{4F346AEB-C21B-077C-E42E-8DC657D6550F}"/>
+              </a:ext>
+            </a:extLst>
+          </p:cNvPr>
+          <p:cNvSpPr>
+            <a:spLocks noGrp="1"/>
+          </p:cNvSpPr>
+          <p:nvPr>
+            <p:ph idx="1"/>
+          </p:nvPr>
+        </p:nvSpPr>
+        <p:spPr/>
+        <p:txBody>
+          <a:bodyPr/>
+          <a:lstStyle/>
+          <a:p>
+            <a:pPr marL="0" indent="0">
+              <a:buNone/>
+            </a:pPr>
+            <a:r>
+              <a:rPr kumimoji="1" lang="en-US" altLang="zh-CN" dirty="0"/>
+              <a:t>In OpenCV, the function </a:t>
+            </a:r>
+            <a:r>
+              <a:rPr kumimoji="1" lang="en-US" altLang="zh-CN" dirty="0">
+                <a:latin typeface="Courier New" panose="02070309020205020404" pitchFamily="49" charset="0"/>
+                <a:cs typeface="Courier New" panose="02070309020205020404" pitchFamily="49" charset="0"/>
+              </a:rPr>
+              <a:t>cv::add() </a:t>
+            </a:r>
+            <a:r>
+              <a:rPr kumimoji="1" lang="en-US" altLang="zh-CN" dirty="0"/>
+              <a:t>add two matrices. Find the source code to implement the addition at </a:t>
+            </a:r>
+            <a:r>
+              <a:rPr kumimoji="1" lang="en-US" altLang="zh-CN" dirty="0">
+                <a:hlinkClick r:id="rId2"/>
+              </a:rPr>
+              <a:t>https://github.com/opencv/opencv</a:t>
+            </a:r>
+            <a:r>
+              <a:rPr kumimoji="1" lang="en-US" altLang="zh-CN" dirty="0"/>
+              <a:t> </a:t>
+            </a:r>
+          </a:p>
+          <a:p>
+            <a:r>
+              <a:rPr kumimoji="1" lang="en-US" altLang="zh-CN" dirty="0"/>
+              <a:t>How many data types does the function </a:t>
+            </a:r>
+            <a:r>
+              <a:rPr kumimoji="1" lang="en-US" altLang="zh-CN" dirty="0">
+                <a:latin typeface="Courier New" panose="02070309020205020404" pitchFamily="49" charset="0"/>
+                <a:cs typeface="Courier New" panose="02070309020205020404" pitchFamily="49" charset="0"/>
+              </a:rPr>
+              <a:t>cv::add()</a:t>
+            </a:r>
+            <a:r>
+              <a:rPr kumimoji="1" lang="en-US" altLang="zh-CN" dirty="0"/>
+              <a:t> support?</a:t>
+            </a:r>
+          </a:p>
+          <a:p>
+            <a:r>
+              <a:rPr kumimoji="1" lang="en-US" altLang="zh-CN" dirty="0"/>
+              <a:t>For 8-bit unsigned int matrices, what will be the results when overflow happens?</a:t>
+            </a:r>
+            <a:endParaRPr kumimoji="1" lang="zh-CN" altLang="en-US" dirty="0"/>
+          </a:p>
+        </p:txBody>
+      </p:sp>
+    </p:spTree>
+    <p:extLst>
+      <p:ext uri="{BB962C8B-B14F-4D97-AF65-F5344CB8AC3E}">
+        <p14:creationId xmlns:p14="http://schemas.microsoft.com/office/powerpoint/2010/main" val="3779394726"/>
+      </p:ext>
+    </p:extLst>
+  </p:cSld>
+  <p:clrMapOvr>
+    <a:masterClrMapping/>
+  </p:clrMapOvr>
+</p:sld>
+</file>
+
+<file path=ppt/slides/slide4.xml><?xml version="1.0" encoding="utf-8"?>
+<p:sld xmlns:a="http://schemas.openxmlformats.org/drawingml/2006/main" xmlns:r="http://schemas.openxmlformats.org/officeDocument/2006/relationships" xmlns:p="http://schemas.openxmlformats.org/presentationml/2006/main">
+  <p:cSld>
+    <p:spTree>
+      <p:nvGrpSpPr>
+        <p:cNvPr id="1" name=""/>
+        <p:cNvGrpSpPr/>
+        <p:nvPr/>
+      </p:nvGrpSpPr>
+      <p:grpSpPr>
+        <a:xfrm>
+          <a:off x="0" y="0"/>
+          <a:ext cx="0" cy="0"/>
+          <a:chOff x="0" y="0"/>
+          <a:chExt cx="0" cy="0"/>
+        </a:xfrm>
+      </p:grpSpPr>
+      <p:sp>
+        <p:nvSpPr>
+          <p:cNvPr id="2" name="标题 1">
+            <a:extLst>
+              <a:ext uri="{FF2B5EF4-FFF2-40B4-BE49-F238E27FC236}">
+                <a16:creationId xmlns:a16="http://schemas.microsoft.com/office/drawing/2014/main" id="{B174B084-AE13-BF32-D495-339A612BAD60}"/>
+              </a:ext>
+            </a:extLst>
+          </p:cNvPr>
+          <p:cNvSpPr>
+            <a:spLocks noGrp="1"/>
+          </p:cNvSpPr>
+          <p:nvPr>
+            <p:ph type="title"/>
+          </p:nvPr>
+        </p:nvSpPr>
+        <p:spPr/>
+        <p:txBody>
+          <a:bodyPr/>
+          <a:lstStyle/>
+          <a:p>
+            <a:r>
+              <a:rPr kumimoji="1" lang="en-US" altLang="zh-CN" dirty="0"/>
+              <a:t>Hints</a:t>
+            </a:r>
+            <a:endParaRPr kumimoji="1" lang="zh-CN" altLang="en-US" dirty="0"/>
+          </a:p>
+        </p:txBody>
+      </p:sp>
+      <p:sp>
+        <p:nvSpPr>
+          <p:cNvPr id="3" name="内容占位符 2">
+            <a:extLst>
+              <a:ext uri="{FF2B5EF4-FFF2-40B4-BE49-F238E27FC236}">
+                <a16:creationId xmlns:a16="http://schemas.microsoft.com/office/drawing/2014/main" id="{B1748420-50B9-A2E9-EA17-5B89DB56E4B7}"/>
+              </a:ext>
+            </a:extLst>
+          </p:cNvPr>
+          <p:cNvSpPr>
+            <a:spLocks noGrp="1"/>
+          </p:cNvSpPr>
+          <p:nvPr>
+            <p:ph idx="1"/>
+          </p:nvPr>
+        </p:nvSpPr>
+        <p:spPr>
+          <a:xfrm>
+            <a:off x="838199" y="1326995"/>
+            <a:ext cx="11053879" cy="578923"/>
+          </a:xfrm>
+        </p:spPr>
+        <p:txBody>
+          <a:bodyPr>
+            <a:normAutofit/>
+          </a:bodyPr>
+          <a:lstStyle/>
+          <a:p>
+            <a:pPr marL="0" indent="0">
+              <a:buNone/>
+            </a:pPr>
+            <a:r>
+              <a:rPr kumimoji="1" lang="en-US" altLang="zh-CN" sz="2400" dirty="0"/>
+              <a:t>/modules/core/</a:t>
+            </a:r>
+            <a:r>
+              <a:rPr kumimoji="1" lang="en-US" altLang="zh-CN" sz="2400" dirty="0" err="1"/>
+              <a:t>src</a:t>
+            </a:r>
+            <a:r>
+              <a:rPr kumimoji="1" lang="en-US" altLang="zh-CN" sz="2400" dirty="0"/>
+              <a:t>/</a:t>
+            </a:r>
+            <a:r>
+              <a:rPr kumimoji="1" lang="en-US" altLang="zh-CN" sz="2400" dirty="0" err="1"/>
+              <a:t>matrix.cpp</a:t>
+            </a:r>
+            <a:endParaRPr kumimoji="1" lang="zh-CN" altLang="en-US" sz="2400" dirty="0"/>
+          </a:p>
+        </p:txBody>
+      </p:sp>
+      <p:pic>
+        <p:nvPicPr>
+          <p:cNvPr id="4" name="图片 3">
+            <a:extLst>
+              <a:ext uri="{FF2B5EF4-FFF2-40B4-BE49-F238E27FC236}">
+                <a16:creationId xmlns:a16="http://schemas.microsoft.com/office/drawing/2014/main" id="{41D4C4FF-B60A-C96D-3687-4D15D382424D}"/>
+              </a:ext>
+            </a:extLst>
+          </p:cNvPr>
+          <p:cNvPicPr>
+            <a:picLocks noChangeAspect="1"/>
+          </p:cNvPicPr>
+          <p:nvPr/>
+        </p:nvPicPr>
+        <p:blipFill>
+          <a:blip r:embed="rId2"/>
+          <a:stretch>
+            <a:fillRect/>
+          </a:stretch>
+        </p:blipFill>
+        <p:spPr>
+          <a:xfrm>
+            <a:off x="2711066" y="1801997"/>
+            <a:ext cx="5257801" cy="2328797"/>
+          </a:xfrm>
+          <a:prstGeom prst="rect">
+            <a:avLst/>
+          </a:prstGeom>
+        </p:spPr>
+      </p:pic>
+      <p:pic>
+        <p:nvPicPr>
+          <p:cNvPr id="5" name="图片 4">
+            <a:extLst>
+              <a:ext uri="{FF2B5EF4-FFF2-40B4-BE49-F238E27FC236}">
+                <a16:creationId xmlns:a16="http://schemas.microsoft.com/office/drawing/2014/main" id="{96BBE0FD-6B64-942F-02B7-20051D83925C}"/>
+              </a:ext>
+            </a:extLst>
+          </p:cNvPr>
+          <p:cNvPicPr>
+            <a:picLocks noChangeAspect="1"/>
+          </p:cNvPicPr>
+          <p:nvPr/>
+        </p:nvPicPr>
+        <p:blipFill>
+          <a:blip r:embed="rId3"/>
+          <a:stretch>
+            <a:fillRect/>
+          </a:stretch>
+        </p:blipFill>
+        <p:spPr>
+          <a:xfrm>
+            <a:off x="2881514" y="4605796"/>
+            <a:ext cx="8852694" cy="1366763"/>
+          </a:xfrm>
+          <a:prstGeom prst="rect">
+            <a:avLst/>
+          </a:prstGeom>
+        </p:spPr>
+      </p:pic>
+    </p:spTree>
+    <p:extLst>
+      <p:ext uri="{BB962C8B-B14F-4D97-AF65-F5344CB8AC3E}">
+        <p14:creationId xmlns:p14="http://schemas.microsoft.com/office/powerpoint/2010/main" val="2478361764"/>
+      </p:ext>
+    </p:extLst>
+  </p:cSld>
+  <p:clrMapOvr>
+    <a:masterClrMapping/>
+  </p:clrMapOvr>
+</p:sld>
+</file>
+
+<file path=ppt/slides/slide5.xml><?xml version="1.0" encoding="utf-8"?>
+<p:sld xmlns:a="http://schemas.openxmlformats.org/drawingml/2006/main" xmlns:r="http://schemas.openxmlformats.org/officeDocument/2006/relationships" xmlns:p="http://schemas.openxmlformats.org/presentationml/2006/main">
+  <p:cSld>
+    <p:spTree>
+      <p:nvGrpSpPr>
+        <p:cNvPr id="1" name=""/>
+        <p:cNvGrpSpPr/>
+        <p:nvPr/>
+      </p:nvGrpSpPr>
+      <p:grpSpPr>
+        <a:xfrm>
+          <a:off x="0" y="0"/>
+          <a:ext cx="0" cy="0"/>
+          <a:chOff x="0" y="0"/>
+          <a:chExt cx="0" cy="0"/>
+        </a:xfrm>
+      </p:grpSpPr>
+      <p:sp>
+        <p:nvSpPr>
+          <p:cNvPr id="2" name="标题 1">
+            <a:extLst>
+              <a:ext uri="{FF2B5EF4-FFF2-40B4-BE49-F238E27FC236}">
+                <a16:creationId xmlns:a16="http://schemas.microsoft.com/office/drawing/2014/main" id="{8D308CCF-A5DD-D810-A46C-DB421A09E199}"/>
+              </a:ext>
+            </a:extLst>
+          </p:cNvPr>
+          <p:cNvSpPr>
+            <a:spLocks noGrp="1"/>
+          </p:cNvSpPr>
+          <p:nvPr>
+            <p:ph type="title"/>
+          </p:nvPr>
+        </p:nvSpPr>
+        <p:spPr/>
+        <p:txBody>
+          <a:bodyPr/>
+          <a:lstStyle/>
+          <a:p>
+            <a:r>
+              <a:rPr kumimoji="1" lang="en-US" altLang="zh-CN" dirty="0"/>
+              <a:t>Hints</a:t>
+            </a:r>
+            <a:endParaRPr kumimoji="1" lang="zh-CN" altLang="en-US" dirty="0"/>
+          </a:p>
+        </p:txBody>
+      </p:sp>
+      <p:sp>
+        <p:nvSpPr>
+          <p:cNvPr id="3" name="内容占位符 2">
+            <a:extLst>
+              <a:ext uri="{FF2B5EF4-FFF2-40B4-BE49-F238E27FC236}">
+                <a16:creationId xmlns:a16="http://schemas.microsoft.com/office/drawing/2014/main" id="{9E0C0D2B-AC99-011F-2563-15DD48050118}"/>
+              </a:ext>
+            </a:extLst>
+          </p:cNvPr>
+          <p:cNvSpPr>
+            <a:spLocks noGrp="1"/>
+          </p:cNvSpPr>
+          <p:nvPr>
+            <p:ph idx="1"/>
+          </p:nvPr>
+        </p:nvSpPr>
+        <p:spPr>
+          <a:xfrm>
+            <a:off x="155154" y="1170196"/>
+            <a:ext cx="4604133" cy="461665"/>
+          </a:xfrm>
+        </p:spPr>
+        <p:txBody>
+          <a:bodyPr>
+            <a:noAutofit/>
+          </a:bodyPr>
+          <a:lstStyle/>
+          <a:p>
+            <a:pPr marL="0" indent="0">
+              <a:buNone/>
+            </a:pPr>
+            <a:r>
+              <a:rPr kumimoji="1" lang="en-US" altLang="zh-CN" sz="2400" dirty="0"/>
+              <a:t>/modules/core/</a:t>
+            </a:r>
+            <a:r>
+              <a:rPr kumimoji="1" lang="en-US" altLang="zh-CN" sz="2400" dirty="0" err="1"/>
+              <a:t>src</a:t>
+            </a:r>
+            <a:r>
+              <a:rPr kumimoji="1" lang="en-US" altLang="zh-CN" sz="2400" dirty="0"/>
+              <a:t>/</a:t>
+            </a:r>
+            <a:r>
+              <a:rPr kumimoji="1" lang="en-US" altLang="zh-CN" sz="2400" dirty="0" err="1"/>
+              <a:t>matrix.cpp</a:t>
+            </a:r>
+            <a:endParaRPr kumimoji="1" lang="zh-CN" altLang="en-US" sz="2400" dirty="0"/>
+          </a:p>
+        </p:txBody>
+      </p:sp>
+      <p:pic>
+        <p:nvPicPr>
+          <p:cNvPr id="4" name="图片 3">
+            <a:extLst>
+              <a:ext uri="{FF2B5EF4-FFF2-40B4-BE49-F238E27FC236}">
+                <a16:creationId xmlns:a16="http://schemas.microsoft.com/office/drawing/2014/main" id="{73505501-2F10-E153-27B5-B556F8CF5D0B}"/>
+              </a:ext>
+            </a:extLst>
+          </p:cNvPr>
+          <p:cNvPicPr>
+            <a:picLocks noChangeAspect="1"/>
+          </p:cNvPicPr>
+          <p:nvPr/>
+        </p:nvPicPr>
+        <p:blipFill>
+          <a:blip r:embed="rId2"/>
+          <a:stretch>
+            <a:fillRect/>
+          </a:stretch>
+        </p:blipFill>
+        <p:spPr>
+          <a:xfrm>
+            <a:off x="0" y="1704206"/>
+            <a:ext cx="5585552" cy="4619476"/>
+          </a:xfrm>
+          <a:prstGeom prst="rect">
+            <a:avLst/>
+          </a:prstGeom>
+        </p:spPr>
+      </p:pic>
+      <p:sp>
+        <p:nvSpPr>
+          <p:cNvPr id="6" name="文本框 5">
+            <a:extLst>
+              <a:ext uri="{FF2B5EF4-FFF2-40B4-BE49-F238E27FC236}">
+                <a16:creationId xmlns:a16="http://schemas.microsoft.com/office/drawing/2014/main" id="{46CA6459-F400-8438-3FE4-08F435D3694D}"/>
+              </a:ext>
+            </a:extLst>
+          </p:cNvPr>
+          <p:cNvSpPr txBox="1"/>
+          <p:nvPr/>
+        </p:nvSpPr>
+        <p:spPr>
+          <a:xfrm>
+            <a:off x="5732059" y="1097852"/>
+            <a:ext cx="5949108" cy="461665"/>
+          </a:xfrm>
+          <a:prstGeom prst="rect">
+            <a:avLst/>
+          </a:prstGeom>
+          <a:noFill/>
+        </p:spPr>
+        <p:txBody>
+          <a:bodyPr wrap="square">
+            <a:spAutoFit/>
+          </a:bodyPr>
+          <a:lstStyle/>
+          <a:p>
+            <a:r>
+              <a:rPr lang="en" altLang="zh-CN" sz="2400" dirty="0"/>
+              <a:t>/modules/core/include/opencv2/core/</a:t>
+            </a:r>
+            <a:r>
+              <a:rPr lang="en" altLang="zh-CN" sz="2400" dirty="0" err="1"/>
+              <a:t>cvdef.h</a:t>
+            </a:r>
+            <a:endParaRPr lang="zh-CN" altLang="en-US" sz="2400" dirty="0"/>
+          </a:p>
+        </p:txBody>
+      </p:sp>
+      <p:pic>
+        <p:nvPicPr>
+          <p:cNvPr id="7" name="图片 6">
+            <a:extLst>
+              <a:ext uri="{FF2B5EF4-FFF2-40B4-BE49-F238E27FC236}">
+                <a16:creationId xmlns:a16="http://schemas.microsoft.com/office/drawing/2014/main" id="{ADBE0505-7EAF-EFF5-EA7B-4F35B780E663}"/>
+              </a:ext>
+            </a:extLst>
+          </p:cNvPr>
+          <p:cNvPicPr>
+            <a:picLocks noChangeAspect="1"/>
+          </p:cNvPicPr>
+          <p:nvPr/>
+        </p:nvPicPr>
+        <p:blipFill>
+          <a:blip r:embed="rId3"/>
+          <a:stretch>
+            <a:fillRect/>
+          </a:stretch>
+        </p:blipFill>
+        <p:spPr>
+          <a:xfrm>
+            <a:off x="5732059" y="1704206"/>
+            <a:ext cx="6459941" cy="4165501"/>
+          </a:xfrm>
+          <a:prstGeom prst="rect">
+            <a:avLst/>
+          </a:prstGeom>
+        </p:spPr>
+      </p:pic>
+    </p:spTree>
+    <p:extLst>
+      <p:ext uri="{BB962C8B-B14F-4D97-AF65-F5344CB8AC3E}">
+        <p14:creationId xmlns:p14="http://schemas.microsoft.com/office/powerpoint/2010/main" val="2116343566"/>
+      </p:ext>
+    </p:extLst>
+  </p:cSld>
+  <p:clrMapOvr>
+    <a:masterClrMapping/>
+  </p:clrMapOvr>
+</p:sld>
+</file>
+
+<file path=ppt/slides/slide6.xml><?xml version="1.0" encoding="utf-8"?>
+<p:sld xmlns:a="http://schemas.openxmlformats.org/drawingml/2006/main" xmlns:r="http://schemas.openxmlformats.org/officeDocument/2006/relationships" xmlns:p="http://schemas.openxmlformats.org/presentationml/2006/main">
+  <p:cSld>
+    <p:spTree>
+      <p:nvGrpSpPr>
+        <p:cNvPr id="1" name=""/>
+        <p:cNvGrpSpPr/>
+        <p:nvPr/>
+      </p:nvGrpSpPr>
+      <p:grpSpPr>
+        <a:xfrm>
+          <a:off x="0" y="0"/>
+          <a:ext cx="0" cy="0"/>
+          <a:chOff x="0" y="0"/>
+          <a:chExt cx="0" cy="0"/>
+        </a:xfrm>
+      </p:grpSpPr>
+      <p:sp>
+        <p:nvSpPr>
+          <p:cNvPr id="2" name="标题 1">
+            <a:extLst>
+              <a:ext uri="{FF2B5EF4-FFF2-40B4-BE49-F238E27FC236}">
+                <a16:creationId xmlns:a16="http://schemas.microsoft.com/office/drawing/2014/main" id="{E796C507-F2BD-26A7-9B67-F6F187DA93B9}"/>
+              </a:ext>
+            </a:extLst>
+          </p:cNvPr>
+          <p:cNvSpPr>
+            <a:spLocks noGrp="1"/>
+          </p:cNvSpPr>
+          <p:nvPr>
+            <p:ph type="title"/>
+          </p:nvPr>
+        </p:nvSpPr>
+        <p:spPr/>
+        <p:txBody>
+          <a:bodyPr/>
+          <a:lstStyle/>
+          <a:p>
+            <a:r>
+              <a:rPr kumimoji="1" lang="en-US" altLang="zh-CN" dirty="0"/>
+              <a:t>Hints</a:t>
+            </a:r>
+            <a:endParaRPr kumimoji="1" lang="zh-CN" altLang="en-US" dirty="0"/>
+          </a:p>
+        </p:txBody>
+      </p:sp>
+      <p:sp>
+        <p:nvSpPr>
+          <p:cNvPr id="3" name="内容占位符 2">
+            <a:extLst>
+              <a:ext uri="{FF2B5EF4-FFF2-40B4-BE49-F238E27FC236}">
+                <a16:creationId xmlns:a16="http://schemas.microsoft.com/office/drawing/2014/main" id="{F2FFC0A9-51FB-D9D2-7C9A-B72DD359C283}"/>
+              </a:ext>
+            </a:extLst>
+          </p:cNvPr>
+          <p:cNvSpPr>
+            <a:spLocks noGrp="1"/>
+          </p:cNvSpPr>
+          <p:nvPr>
+            <p:ph idx="1"/>
+          </p:nvPr>
+        </p:nvSpPr>
+        <p:spPr>
+          <a:xfrm>
+            <a:off x="838200" y="1326995"/>
+            <a:ext cx="7303266" cy="479771"/>
+          </a:xfrm>
+        </p:spPr>
+        <p:txBody>
+          <a:bodyPr>
+            <a:normAutofit/>
+          </a:bodyPr>
+          <a:lstStyle/>
+          <a:p>
+            <a:pPr marL="0" indent="0">
+              <a:buNone/>
+            </a:pPr>
+            <a:r>
+              <a:rPr kumimoji="1" lang="en" altLang="zh-CN" sz="2400" dirty="0"/>
+              <a:t>modules/core/include/opencv2/core/</a:t>
+            </a:r>
+            <a:r>
+              <a:rPr kumimoji="1" lang="en" altLang="zh-CN" sz="2400" dirty="0" err="1"/>
+              <a:t>mat.hpp</a:t>
+            </a:r>
+            <a:endParaRPr kumimoji="1" lang="zh-CN" altLang="en-US" sz="2400" dirty="0"/>
+          </a:p>
+        </p:txBody>
+      </p:sp>
+      <p:pic>
+        <p:nvPicPr>
+          <p:cNvPr id="4" name="图片 3">
+            <a:extLst>
+              <a:ext uri="{FF2B5EF4-FFF2-40B4-BE49-F238E27FC236}">
+                <a16:creationId xmlns:a16="http://schemas.microsoft.com/office/drawing/2014/main" id="{BE50DF97-C88E-375A-51C9-2D87C07F34C4}"/>
+              </a:ext>
+            </a:extLst>
+          </p:cNvPr>
+          <p:cNvPicPr>
+            <a:picLocks noChangeAspect="1"/>
+          </p:cNvPicPr>
+          <p:nvPr/>
+        </p:nvPicPr>
+        <p:blipFill>
+          <a:blip r:embed="rId2"/>
+          <a:stretch>
+            <a:fillRect/>
+          </a:stretch>
+        </p:blipFill>
+        <p:spPr>
+          <a:xfrm>
+            <a:off x="1802176" y="2592367"/>
+            <a:ext cx="7772400" cy="4265633"/>
+          </a:xfrm>
+          <a:prstGeom prst="rect">
+            <a:avLst/>
+          </a:prstGeom>
+        </p:spPr>
+      </p:pic>
+    </p:spTree>
+    <p:extLst>
+      <p:ext uri="{BB962C8B-B14F-4D97-AF65-F5344CB8AC3E}">
+        <p14:creationId xmlns:p14="http://schemas.microsoft.com/office/powerpoint/2010/main" val="2930055884"/>
+      </p:ext>
+    </p:extLst>
+  </p:cSld>
+  <p:clrMapOvr>
+    <a:masterClrMapping/>
+  </p:clrMapOvr>
+</p:sld>
+</file>
+
+<file path=ppt/slides/slide7.xml><?xml version="1.0" encoding="utf-8"?>
+<p:sld xmlns:a="http://schemas.openxmlformats.org/drawingml/2006/main" xmlns:r="http://schemas.openxmlformats.org/officeDocument/2006/relationships" xmlns:p="http://schemas.openxmlformats.org/presentationml/2006/main">
+  <p:cSld>
+    <p:spTree>
+      <p:nvGrpSpPr>
+        <p:cNvPr id="1" name=""/>
+        <p:cNvGrpSpPr/>
+        <p:nvPr/>
+      </p:nvGrpSpPr>
+      <p:grpSpPr>
+        <a:xfrm>
+          <a:off x="0" y="0"/>
+          <a:ext cx="0" cy="0"/>
+          <a:chOff x="0" y="0"/>
+          <a:chExt cx="0" cy="0"/>
+        </a:xfrm>
+      </p:grpSpPr>
+      <p:sp>
+        <p:nvSpPr>
+          <p:cNvPr id="4" name="标题 3">
+            <a:extLst>
+              <a:ext uri="{FF2B5EF4-FFF2-40B4-BE49-F238E27FC236}">
+                <a16:creationId xmlns:a16="http://schemas.microsoft.com/office/drawing/2014/main" id="{B0FA92D6-4BB7-BD42-BCAD-DD80549E59AA}"/>
+              </a:ext>
+            </a:extLst>
+          </p:cNvPr>
+          <p:cNvSpPr>
+            <a:spLocks noGrp="1"/>
+          </p:cNvSpPr>
+          <p:nvPr>
+            <p:ph type="ctrTitle"/>
+          </p:nvPr>
+        </p:nvSpPr>
+        <p:spPr/>
+        <p:txBody>
+          <a:bodyPr/>
+          <a:lstStyle/>
+          <a:p>
+            <a:r>
+              <a:rPr lang="en" altLang="zh-CN" dirty="0">
+                <a:solidFill>
+                  <a:srgbClr val="0000CC"/>
+                </a:solidFill>
+                <a:latin typeface="Courier" pitchFamily="2" charset="0"/>
+              </a:rPr>
+              <a:t>if</a:t>
+            </a:r>
+            <a:r>
+              <a:rPr lang="en" altLang="zh-CN" dirty="0"/>
+              <a:t> Statement</a:t>
+            </a:r>
+            <a:endParaRPr lang="zh-CN" altLang="en-US" dirty="0"/>
+          </a:p>
+        </p:txBody>
+      </p:sp>
+      <p:sp>
+        <p:nvSpPr>
+          <p:cNvPr id="5" name="副标题 4">
+            <a:extLst>
+              <a:ext uri="{FF2B5EF4-FFF2-40B4-BE49-F238E27FC236}">
+                <a16:creationId xmlns:a16="http://schemas.microsoft.com/office/drawing/2014/main" id="{B1B75FC0-F7E5-3640-AE81-27EBD76CF360}"/>
+              </a:ext>
+            </a:extLst>
+          </p:cNvPr>
+          <p:cNvSpPr>
+            <a:spLocks noGrp="1"/>
+          </p:cNvSpPr>
+          <p:nvPr>
+            <p:ph type="subTitle" idx="1"/>
+          </p:nvPr>
+        </p:nvSpPr>
+        <p:spPr/>
+        <p:txBody>
+          <a:bodyPr/>
+          <a:lstStyle/>
+          <a:p>
+            <a:endParaRPr lang="zh-CN" altLang="en-US"/>
+          </a:p>
+        </p:txBody>
+      </p:sp>
+    </p:spTree>
+    <p:extLst>
+      <p:ext uri="{BB962C8B-B14F-4D97-AF65-F5344CB8AC3E}">
+        <p14:creationId xmlns:p14="http://schemas.microsoft.com/office/powerpoint/2010/main" val="315370420"/>
+      </p:ext>
+    </p:extLst>
+  </p:cSld>
+  <p:clrMapOvr>
+    <a:masterClrMapping/>
+  </p:clrMapOvr>
+</p:sld>
+</file>
+
+<file path=ppt/slides/slide8.xml><?xml version="1.0" encoding="utf-8"?>
 <p:sld xmlns:a="http://schemas.openxmlformats.org/drawingml/2006/main" xmlns:r="http://schemas.openxmlformats.org/officeDocument/2006/relationships" xmlns:p="http://schemas.openxmlformats.org/presentationml/2006/main">
   <p:cSld>
     <p:spTree>
@@ -15492,7 +19683,7 @@
 </p:sld>
 </file>
 
-<file path=ppt/slides/slide4.xml><?xml version="1.0" encoding="utf-8"?>
+<file path=ppt/slides/slide9.xml><?xml version="1.0" encoding="utf-8"?>
 <p:sld xmlns:a="http://schemas.openxmlformats.org/drawingml/2006/main" xmlns:r="http://schemas.openxmlformats.org/officeDocument/2006/relationships" xmlns:p="http://schemas.openxmlformats.org/presentationml/2006/main">
   <p:cSld>
     <p:spTree>
@@ -16045,3224 +20236,6 @@
     <p:extLst>
       <p:ext uri="{BB962C8B-B14F-4D97-AF65-F5344CB8AC3E}">
         <p14:creationId xmlns:p14="http://schemas.microsoft.com/office/powerpoint/2010/main" val="1417884461"/>
-      </p:ext>
-    </p:extLst>
-  </p:cSld>
-  <p:clrMapOvr>
-    <a:masterClrMapping/>
-  </p:clrMapOvr>
-</p:sld>
-</file>
-
-<file path=ppt/slides/slide5.xml><?xml version="1.0" encoding="utf-8"?>
-<p:sld xmlns:a="http://schemas.openxmlformats.org/drawingml/2006/main" xmlns:r="http://schemas.openxmlformats.org/officeDocument/2006/relationships" xmlns:p="http://schemas.openxmlformats.org/presentationml/2006/main">
-  <p:cSld>
-    <p:spTree>
-      <p:nvGrpSpPr>
-        <p:cNvPr id="1" name=""/>
-        <p:cNvGrpSpPr/>
-        <p:nvPr/>
-      </p:nvGrpSpPr>
-      <p:grpSpPr>
-        <a:xfrm>
-          <a:off x="0" y="0"/>
-          <a:ext cx="0" cy="0"/>
-          <a:chOff x="0" y="0"/>
-          <a:chExt cx="0" cy="0"/>
-        </a:xfrm>
-      </p:grpSpPr>
-      <p:sp>
-        <p:nvSpPr>
-          <p:cNvPr id="2" name="标题 1">
-            <a:extLst>
-              <a:ext uri="{FF2B5EF4-FFF2-40B4-BE49-F238E27FC236}">
-                <a16:creationId xmlns:a16="http://schemas.microsoft.com/office/drawing/2014/main" id="{1AA56D52-9D7A-5848-86B4-F90E3C0E0A5D}"/>
-              </a:ext>
-            </a:extLst>
-          </p:cNvPr>
-          <p:cNvSpPr>
-            <a:spLocks noGrp="1"/>
-          </p:cNvSpPr>
-          <p:nvPr>
-            <p:ph type="title"/>
-          </p:nvPr>
-        </p:nvSpPr>
-        <p:spPr/>
-        <p:txBody>
-          <a:bodyPr/>
-          <a:lstStyle/>
-          <a:p>
-            <a:r>
-              <a:rPr kumimoji="1" lang="en-US" altLang="zh-CN" dirty="0"/>
-              <a:t>A little more complex</a:t>
-            </a:r>
-            <a:endParaRPr kumimoji="1" lang="zh-CN" altLang="en-US" dirty="0"/>
-          </a:p>
-        </p:txBody>
-      </p:sp>
-      <p:sp>
-        <p:nvSpPr>
-          <p:cNvPr id="3" name="内容占位符 2">
-            <a:extLst>
-              <a:ext uri="{FF2B5EF4-FFF2-40B4-BE49-F238E27FC236}">
-                <a16:creationId xmlns:a16="http://schemas.microsoft.com/office/drawing/2014/main" id="{D1643C95-9A11-1E45-83F3-AF1ADCAB65B5}"/>
-              </a:ext>
-            </a:extLst>
-          </p:cNvPr>
-          <p:cNvSpPr>
-            <a:spLocks noGrp="1"/>
-          </p:cNvSpPr>
-          <p:nvPr>
-            <p:ph idx="1"/>
-          </p:nvPr>
-        </p:nvSpPr>
-        <p:spPr/>
-        <p:txBody>
-          <a:bodyPr/>
-          <a:lstStyle/>
-          <a:p>
-            <a:pPr marL="0" indent="0">
-              <a:buNone/>
-            </a:pPr>
-            <a:r>
-              <a:rPr kumimoji="1" lang="en-US" altLang="zh-CN" dirty="0"/>
-              <a:t>When will </a:t>
-            </a:r>
-            <a:r>
-              <a:rPr lang="en" altLang="zh-CN" sz="2400" dirty="0">
-                <a:solidFill>
-                  <a:srgbClr val="A31515"/>
-                </a:solidFill>
-                <a:latin typeface="Menlo" panose="020B0609030804020204" pitchFamily="49" charset="0"/>
-              </a:rPr>
-              <a:t>"Where I'm?"</a:t>
-            </a:r>
-            <a:r>
-              <a:rPr lang="en" altLang="zh-CN" sz="2400" dirty="0">
-                <a:solidFill>
-                  <a:srgbClr val="000000"/>
-                </a:solidFill>
-                <a:latin typeface="Menlo" panose="020B0609030804020204" pitchFamily="49" charset="0"/>
-              </a:rPr>
-              <a:t> </a:t>
-            </a:r>
-            <a:r>
-              <a:rPr kumimoji="1" lang="en-US" altLang="zh-CN" dirty="0"/>
-              <a:t>be printed? </a:t>
-            </a:r>
-          </a:p>
-          <a:p>
-            <a:pPr marL="0" indent="0">
-              <a:buNone/>
-            </a:pPr>
-            <a:r>
-              <a:rPr kumimoji="1" lang="en-US" altLang="zh-CN" dirty="0"/>
-              <a:t>How to make the code easier to understand?</a:t>
-            </a:r>
-          </a:p>
-          <a:p>
-            <a:endParaRPr kumimoji="1" lang="en-US" altLang="zh-CN" dirty="0"/>
-          </a:p>
-          <a:p>
-            <a:pPr marL="0" indent="0">
-              <a:buNone/>
-            </a:pPr>
-            <a:r>
-              <a:rPr lang="en" altLang="zh-CN" sz="2400" dirty="0">
-                <a:solidFill>
-                  <a:srgbClr val="AF00DB"/>
-                </a:solidFill>
-                <a:latin typeface="Menlo" panose="020B0609030804020204" pitchFamily="49" charset="0"/>
-              </a:rPr>
-              <a:t>if</a:t>
-            </a:r>
-            <a:r>
-              <a:rPr lang="en" altLang="zh-CN" sz="2400" dirty="0">
-                <a:solidFill>
-                  <a:srgbClr val="000000"/>
-                </a:solidFill>
-                <a:latin typeface="Menlo" panose="020B0609030804020204" pitchFamily="49" charset="0"/>
-              </a:rPr>
-              <a:t>(</a:t>
-            </a:r>
-            <a:r>
-              <a:rPr lang="en" altLang="zh-CN" sz="2400" dirty="0">
-                <a:solidFill>
-                  <a:srgbClr val="001080"/>
-                </a:solidFill>
-                <a:latin typeface="Menlo" panose="020B0609030804020204" pitchFamily="49" charset="0"/>
-              </a:rPr>
-              <a:t>num</a:t>
-            </a:r>
-            <a:r>
-              <a:rPr lang="en" altLang="zh-CN" sz="2400" dirty="0">
-                <a:solidFill>
-                  <a:srgbClr val="000000"/>
-                </a:solidFill>
-                <a:latin typeface="Menlo" panose="020B0609030804020204" pitchFamily="49" charset="0"/>
-              </a:rPr>
-              <a:t> &lt; </a:t>
-            </a:r>
-            <a:r>
-              <a:rPr lang="en" altLang="zh-CN" sz="2400" dirty="0">
-                <a:solidFill>
-                  <a:srgbClr val="098658"/>
-                </a:solidFill>
-                <a:latin typeface="Menlo" panose="020B0609030804020204" pitchFamily="49" charset="0"/>
-              </a:rPr>
-              <a:t>10</a:t>
-            </a:r>
-            <a:r>
-              <a:rPr lang="en" altLang="zh-CN" sz="2400" dirty="0">
-                <a:solidFill>
-                  <a:srgbClr val="000000"/>
-                </a:solidFill>
-                <a:latin typeface="Menlo" panose="020B0609030804020204" pitchFamily="49" charset="0"/>
-              </a:rPr>
-              <a:t>)</a:t>
-            </a:r>
-          </a:p>
-          <a:p>
-            <a:pPr marL="0" indent="0">
-              <a:buNone/>
-            </a:pPr>
-            <a:r>
-              <a:rPr lang="en" altLang="zh-CN" sz="2400" dirty="0">
-                <a:solidFill>
-                  <a:srgbClr val="AF00DB"/>
-                </a:solidFill>
-                <a:latin typeface="Menlo" panose="020B0609030804020204" pitchFamily="49" charset="0"/>
-              </a:rPr>
-              <a:t>if</a:t>
-            </a:r>
-            <a:r>
-              <a:rPr lang="en" altLang="zh-CN" sz="2400" dirty="0">
-                <a:solidFill>
-                  <a:srgbClr val="000000"/>
-                </a:solidFill>
-                <a:latin typeface="Menlo" panose="020B0609030804020204" pitchFamily="49" charset="0"/>
-              </a:rPr>
-              <a:t>(</a:t>
-            </a:r>
-            <a:r>
-              <a:rPr lang="en" altLang="zh-CN" sz="2400" dirty="0">
-                <a:solidFill>
-                  <a:srgbClr val="001080"/>
-                </a:solidFill>
-                <a:latin typeface="Menlo" panose="020B0609030804020204" pitchFamily="49" charset="0"/>
-              </a:rPr>
-              <a:t>num</a:t>
-            </a:r>
-            <a:r>
-              <a:rPr lang="en" altLang="zh-CN" sz="2400" dirty="0">
-                <a:solidFill>
-                  <a:srgbClr val="000000"/>
-                </a:solidFill>
-                <a:latin typeface="Menlo" panose="020B0609030804020204" pitchFamily="49" charset="0"/>
-              </a:rPr>
-              <a:t> &lt; </a:t>
-            </a:r>
-            <a:r>
-              <a:rPr lang="en" altLang="zh-CN" sz="2400" dirty="0">
-                <a:solidFill>
-                  <a:srgbClr val="098658"/>
-                </a:solidFill>
-                <a:latin typeface="Menlo" panose="020B0609030804020204" pitchFamily="49" charset="0"/>
-              </a:rPr>
-              <a:t>5</a:t>
-            </a:r>
-            <a:r>
-              <a:rPr lang="en" altLang="zh-CN" sz="2400" dirty="0">
-                <a:solidFill>
-                  <a:srgbClr val="000000"/>
-                </a:solidFill>
-                <a:latin typeface="Menlo" panose="020B0609030804020204" pitchFamily="49" charset="0"/>
-              </a:rPr>
-              <a:t>)</a:t>
-            </a:r>
-          </a:p>
-          <a:p>
-            <a:pPr marL="0" indent="0">
-              <a:buNone/>
-            </a:pPr>
-            <a:r>
-              <a:rPr lang="en" altLang="zh-CN" sz="2400" dirty="0" err="1">
-                <a:solidFill>
-                  <a:srgbClr val="001080"/>
-                </a:solidFill>
-                <a:latin typeface="Menlo" panose="020B0609030804020204" pitchFamily="49" charset="0"/>
-              </a:rPr>
-              <a:t>cout</a:t>
-            </a:r>
-            <a:r>
-              <a:rPr lang="en" altLang="zh-CN" sz="2400" dirty="0">
-                <a:solidFill>
-                  <a:srgbClr val="000000"/>
-                </a:solidFill>
-                <a:latin typeface="Menlo" panose="020B0609030804020204" pitchFamily="49" charset="0"/>
-              </a:rPr>
-              <a:t> </a:t>
-            </a:r>
-            <a:r>
-              <a:rPr lang="en" altLang="zh-CN" sz="2400" dirty="0">
-                <a:solidFill>
-                  <a:srgbClr val="795E26"/>
-                </a:solidFill>
-                <a:latin typeface="Menlo" panose="020B0609030804020204" pitchFamily="49" charset="0"/>
-              </a:rPr>
-              <a:t>&lt;&lt;</a:t>
-            </a:r>
-            <a:r>
-              <a:rPr lang="en" altLang="zh-CN" sz="2400" dirty="0">
-                <a:solidFill>
-                  <a:srgbClr val="000000"/>
-                </a:solidFill>
-                <a:latin typeface="Menlo" panose="020B0609030804020204" pitchFamily="49" charset="0"/>
-              </a:rPr>
-              <a:t> </a:t>
-            </a:r>
-            <a:r>
-              <a:rPr lang="en" altLang="zh-CN" sz="2400" dirty="0">
-                <a:solidFill>
-                  <a:srgbClr val="A31515"/>
-                </a:solidFill>
-                <a:latin typeface="Menlo" panose="020B0609030804020204" pitchFamily="49" charset="0"/>
-              </a:rPr>
-              <a:t>"The number is less than 5"</a:t>
-            </a:r>
-            <a:r>
-              <a:rPr lang="en" altLang="zh-CN" sz="2400" dirty="0">
-                <a:solidFill>
-                  <a:srgbClr val="000000"/>
-                </a:solidFill>
-                <a:latin typeface="Menlo" panose="020B0609030804020204" pitchFamily="49" charset="0"/>
-              </a:rPr>
-              <a:t> </a:t>
-            </a:r>
-            <a:r>
-              <a:rPr lang="en" altLang="zh-CN" sz="2400" dirty="0">
-                <a:solidFill>
-                  <a:srgbClr val="795E26"/>
-                </a:solidFill>
-                <a:latin typeface="Menlo" panose="020B0609030804020204" pitchFamily="49" charset="0"/>
-              </a:rPr>
-              <a:t>&lt;&lt;</a:t>
-            </a:r>
-            <a:r>
-              <a:rPr lang="en" altLang="zh-CN" sz="2400" dirty="0">
-                <a:solidFill>
-                  <a:srgbClr val="000000"/>
-                </a:solidFill>
-                <a:latin typeface="Menlo" panose="020B0609030804020204" pitchFamily="49" charset="0"/>
-              </a:rPr>
-              <a:t> </a:t>
-            </a:r>
-            <a:r>
-              <a:rPr lang="en" altLang="zh-CN" sz="2400" dirty="0" err="1">
-                <a:solidFill>
-                  <a:srgbClr val="795E26"/>
-                </a:solidFill>
-                <a:latin typeface="Menlo" panose="020B0609030804020204" pitchFamily="49" charset="0"/>
-              </a:rPr>
-              <a:t>endl</a:t>
-            </a:r>
-            <a:r>
-              <a:rPr lang="en" altLang="zh-CN" sz="2400" dirty="0">
-                <a:solidFill>
-                  <a:srgbClr val="000000"/>
-                </a:solidFill>
-                <a:latin typeface="Menlo" panose="020B0609030804020204" pitchFamily="49" charset="0"/>
-              </a:rPr>
-              <a:t>;</a:t>
-            </a:r>
-          </a:p>
-          <a:p>
-            <a:pPr marL="0" indent="0">
-              <a:buNone/>
-            </a:pPr>
-            <a:r>
-              <a:rPr lang="en" altLang="zh-CN" sz="2400" dirty="0">
-                <a:solidFill>
-                  <a:srgbClr val="AF00DB"/>
-                </a:solidFill>
-                <a:latin typeface="Menlo" panose="020B0609030804020204" pitchFamily="49" charset="0"/>
-              </a:rPr>
-              <a:t>else</a:t>
-            </a:r>
-            <a:endParaRPr lang="en" altLang="zh-CN" sz="2400" dirty="0">
-              <a:solidFill>
-                <a:srgbClr val="000000"/>
-              </a:solidFill>
-              <a:latin typeface="Menlo" panose="020B0609030804020204" pitchFamily="49" charset="0"/>
-            </a:endParaRPr>
-          </a:p>
-          <a:p>
-            <a:pPr marL="0" indent="0">
-              <a:buNone/>
-            </a:pPr>
-            <a:r>
-              <a:rPr lang="en" altLang="zh-CN" sz="2400" dirty="0" err="1">
-                <a:solidFill>
-                  <a:srgbClr val="001080"/>
-                </a:solidFill>
-                <a:latin typeface="Menlo" panose="020B0609030804020204" pitchFamily="49" charset="0"/>
-              </a:rPr>
-              <a:t>cout</a:t>
-            </a:r>
-            <a:r>
-              <a:rPr lang="en" altLang="zh-CN" sz="2400" dirty="0">
-                <a:solidFill>
-                  <a:srgbClr val="000000"/>
-                </a:solidFill>
-                <a:latin typeface="Menlo" panose="020B0609030804020204" pitchFamily="49" charset="0"/>
-              </a:rPr>
-              <a:t> </a:t>
-            </a:r>
-            <a:r>
-              <a:rPr lang="en" altLang="zh-CN" sz="2400" dirty="0">
-                <a:solidFill>
-                  <a:srgbClr val="795E26"/>
-                </a:solidFill>
-                <a:latin typeface="Menlo" panose="020B0609030804020204" pitchFamily="49" charset="0"/>
-              </a:rPr>
-              <a:t>&lt;&lt;</a:t>
-            </a:r>
-            <a:r>
-              <a:rPr lang="en" altLang="zh-CN" sz="2400" dirty="0">
-                <a:solidFill>
-                  <a:srgbClr val="000000"/>
-                </a:solidFill>
-                <a:latin typeface="Menlo" panose="020B0609030804020204" pitchFamily="49" charset="0"/>
-              </a:rPr>
-              <a:t> </a:t>
-            </a:r>
-            <a:r>
-              <a:rPr lang="en" altLang="zh-CN" sz="2400" dirty="0">
-                <a:solidFill>
-                  <a:srgbClr val="A31515"/>
-                </a:solidFill>
-                <a:latin typeface="Menlo" panose="020B0609030804020204" pitchFamily="49" charset="0"/>
-              </a:rPr>
-              <a:t>"Where I'm?"</a:t>
-            </a:r>
-            <a:r>
-              <a:rPr lang="en" altLang="zh-CN" sz="2400" dirty="0">
-                <a:solidFill>
-                  <a:srgbClr val="000000"/>
-                </a:solidFill>
-                <a:latin typeface="Menlo" panose="020B0609030804020204" pitchFamily="49" charset="0"/>
-              </a:rPr>
-              <a:t> </a:t>
-            </a:r>
-            <a:r>
-              <a:rPr lang="en" altLang="zh-CN" sz="2400" dirty="0">
-                <a:solidFill>
-                  <a:srgbClr val="795E26"/>
-                </a:solidFill>
-                <a:latin typeface="Menlo" panose="020B0609030804020204" pitchFamily="49" charset="0"/>
-              </a:rPr>
-              <a:t>&lt;&lt;</a:t>
-            </a:r>
-            <a:r>
-              <a:rPr lang="en" altLang="zh-CN" sz="2400" dirty="0">
-                <a:solidFill>
-                  <a:srgbClr val="000000"/>
-                </a:solidFill>
-                <a:latin typeface="Menlo" panose="020B0609030804020204" pitchFamily="49" charset="0"/>
-              </a:rPr>
-              <a:t> </a:t>
-            </a:r>
-            <a:r>
-              <a:rPr lang="en" altLang="zh-CN" sz="2400" dirty="0" err="1">
-                <a:solidFill>
-                  <a:srgbClr val="795E26"/>
-                </a:solidFill>
-                <a:latin typeface="Menlo" panose="020B0609030804020204" pitchFamily="49" charset="0"/>
-              </a:rPr>
-              <a:t>endl</a:t>
-            </a:r>
-            <a:r>
-              <a:rPr lang="en" altLang="zh-CN" sz="2400" dirty="0">
-                <a:solidFill>
-                  <a:srgbClr val="000000"/>
-                </a:solidFill>
-                <a:latin typeface="Menlo" panose="020B0609030804020204" pitchFamily="49" charset="0"/>
-              </a:rPr>
-              <a:t>;</a:t>
-            </a:r>
-          </a:p>
-          <a:p>
-            <a:endParaRPr kumimoji="1" lang="en-US" altLang="zh-CN" dirty="0"/>
-          </a:p>
-        </p:txBody>
-      </p:sp>
-    </p:spTree>
-    <p:extLst>
-      <p:ext uri="{BB962C8B-B14F-4D97-AF65-F5344CB8AC3E}">
-        <p14:creationId xmlns:p14="http://schemas.microsoft.com/office/powerpoint/2010/main" val="2074827456"/>
-      </p:ext>
-    </p:extLst>
-  </p:cSld>
-  <p:clrMapOvr>
-    <a:masterClrMapping/>
-  </p:clrMapOvr>
-</p:sld>
-</file>
-
-<file path=ppt/slides/slide6.xml><?xml version="1.0" encoding="utf-8"?>
-<p:sld xmlns:a="http://schemas.openxmlformats.org/drawingml/2006/main" xmlns:r="http://schemas.openxmlformats.org/officeDocument/2006/relationships" xmlns:p="http://schemas.openxmlformats.org/presentationml/2006/main">
-  <p:cSld>
-    <p:spTree>
-      <p:nvGrpSpPr>
-        <p:cNvPr id="1" name=""/>
-        <p:cNvGrpSpPr/>
-        <p:nvPr/>
-      </p:nvGrpSpPr>
-      <p:grpSpPr>
-        <a:xfrm>
-          <a:off x="0" y="0"/>
-          <a:ext cx="0" cy="0"/>
-          <a:chOff x="0" y="0"/>
-          <a:chExt cx="0" cy="0"/>
-        </a:xfrm>
-      </p:grpSpPr>
-      <p:sp>
-        <p:nvSpPr>
-          <p:cNvPr id="2" name="标题 1">
-            <a:extLst>
-              <a:ext uri="{FF2B5EF4-FFF2-40B4-BE49-F238E27FC236}">
-                <a16:creationId xmlns:a16="http://schemas.microsoft.com/office/drawing/2014/main" id="{F44EACC6-150B-134D-95F7-6080594AA6AE}"/>
-              </a:ext>
-            </a:extLst>
-          </p:cNvPr>
-          <p:cNvSpPr>
-            <a:spLocks noGrp="1"/>
-          </p:cNvSpPr>
-          <p:nvPr>
-            <p:ph type="title"/>
-          </p:nvPr>
-        </p:nvSpPr>
-        <p:spPr/>
-        <p:txBody>
-          <a:bodyPr>
-            <a:normAutofit/>
-          </a:bodyPr>
-          <a:lstStyle/>
-          <a:p>
-            <a:r>
-              <a:rPr kumimoji="1" lang="en" altLang="zh-CN" dirty="0">
-                <a:solidFill>
-                  <a:srgbClr val="0000CC"/>
-                </a:solidFill>
-                <a:latin typeface="Courier" pitchFamily="2" charset="0"/>
-              </a:rPr>
-              <a:t>? : </a:t>
-            </a:r>
-            <a:r>
-              <a:rPr kumimoji="1" lang="en" altLang="zh-CN" dirty="0"/>
-              <a:t>operator</a:t>
-            </a:r>
-            <a:endParaRPr kumimoji="1" lang="zh-CN" altLang="en-US" dirty="0"/>
-          </a:p>
-        </p:txBody>
-      </p:sp>
-      <p:sp>
-        <p:nvSpPr>
-          <p:cNvPr id="3" name="内容占位符 2">
-            <a:extLst>
-              <a:ext uri="{FF2B5EF4-FFF2-40B4-BE49-F238E27FC236}">
-                <a16:creationId xmlns:a16="http://schemas.microsoft.com/office/drawing/2014/main" id="{0918E25A-4E65-524C-8739-719C7D631057}"/>
-              </a:ext>
-            </a:extLst>
-          </p:cNvPr>
-          <p:cNvSpPr>
-            <a:spLocks noGrp="1"/>
-          </p:cNvSpPr>
-          <p:nvPr>
-            <p:ph idx="1"/>
-          </p:nvPr>
-        </p:nvSpPr>
-        <p:spPr>
-          <a:xfrm>
-            <a:off x="838199" y="1326996"/>
-            <a:ext cx="11053879" cy="580198"/>
-          </a:xfrm>
-        </p:spPr>
-        <p:txBody>
-          <a:bodyPr/>
-          <a:lstStyle/>
-          <a:p>
-            <a:r>
-              <a:rPr kumimoji="1" lang="en-US" altLang="zh-CN" dirty="0"/>
-              <a:t>When can we use the ternary conditional operator?</a:t>
-            </a:r>
-          </a:p>
-          <a:p>
-            <a:endParaRPr kumimoji="1" lang="en-US" altLang="zh-CN" dirty="0"/>
-          </a:p>
-        </p:txBody>
-      </p:sp>
-      <p:sp>
-        <p:nvSpPr>
-          <p:cNvPr id="4" name="矩形 3">
-            <a:extLst>
-              <a:ext uri="{FF2B5EF4-FFF2-40B4-BE49-F238E27FC236}">
-                <a16:creationId xmlns:a16="http://schemas.microsoft.com/office/drawing/2014/main" id="{3154EB7F-116A-5548-A162-FF0602F8A4A8}"/>
-              </a:ext>
-            </a:extLst>
-          </p:cNvPr>
-          <p:cNvSpPr/>
-          <p:nvPr/>
-        </p:nvSpPr>
-        <p:spPr>
-          <a:xfrm>
-            <a:off x="1115504" y="1907193"/>
-            <a:ext cx="6891357" cy="2031325"/>
-          </a:xfrm>
-          <a:prstGeom prst="rect">
-            <a:avLst/>
-          </a:prstGeom>
-          <a:ln>
-            <a:solidFill>
-              <a:schemeClr val="accent1">
-                <a:shade val="50000"/>
-              </a:schemeClr>
-            </a:solidFill>
-          </a:ln>
-        </p:spPr>
-        <p:txBody>
-          <a:bodyPr wrap="square">
-            <a:spAutoFit/>
-          </a:bodyPr>
-          <a:lstStyle/>
-          <a:p>
-            <a:r>
-              <a:rPr lang="en" altLang="zh-CN" dirty="0">
-                <a:solidFill>
-                  <a:srgbClr val="0000FF"/>
-                </a:solidFill>
-                <a:latin typeface="Menlo" panose="020B0609030804020204" pitchFamily="49" charset="0"/>
-              </a:rPr>
-              <a:t>bool</a:t>
-            </a:r>
-            <a:r>
-              <a:rPr lang="en" altLang="zh-CN" dirty="0">
-                <a:solidFill>
-                  <a:srgbClr val="000000"/>
-                </a:solidFill>
-                <a:latin typeface="Menlo" panose="020B0609030804020204" pitchFamily="49" charset="0"/>
-              </a:rPr>
-              <a:t> </a:t>
-            </a:r>
-            <a:r>
-              <a:rPr lang="en" altLang="zh-CN" dirty="0" err="1">
-                <a:solidFill>
-                  <a:srgbClr val="001080"/>
-                </a:solidFill>
-                <a:latin typeface="Menlo" panose="020B0609030804020204" pitchFamily="49" charset="0"/>
-              </a:rPr>
-              <a:t>isPositive</a:t>
-            </a:r>
-            <a:r>
-              <a:rPr lang="en" altLang="zh-CN" dirty="0">
-                <a:solidFill>
-                  <a:srgbClr val="000000"/>
-                </a:solidFill>
-                <a:latin typeface="Menlo" panose="020B0609030804020204" pitchFamily="49" charset="0"/>
-              </a:rPr>
-              <a:t> = </a:t>
-            </a:r>
-            <a:r>
-              <a:rPr lang="en" altLang="zh-CN" dirty="0">
-                <a:solidFill>
-                  <a:srgbClr val="0000FF"/>
-                </a:solidFill>
-                <a:latin typeface="Menlo" panose="020B0609030804020204" pitchFamily="49" charset="0"/>
-              </a:rPr>
-              <a:t>true</a:t>
-            </a:r>
-            <a:r>
-              <a:rPr lang="en" altLang="zh-CN" dirty="0">
-                <a:solidFill>
-                  <a:srgbClr val="000000"/>
-                </a:solidFill>
-                <a:latin typeface="Menlo" panose="020B0609030804020204" pitchFamily="49" charset="0"/>
-              </a:rPr>
-              <a:t>;</a:t>
-            </a:r>
-          </a:p>
-          <a:p>
-            <a:r>
-              <a:rPr lang="en" altLang="zh-CN" dirty="0">
-                <a:solidFill>
-                  <a:srgbClr val="0000FF"/>
-                </a:solidFill>
-                <a:latin typeface="Menlo" panose="020B0609030804020204" pitchFamily="49" charset="0"/>
-              </a:rPr>
-              <a:t>int</a:t>
-            </a:r>
-            <a:r>
-              <a:rPr lang="en" altLang="zh-CN" dirty="0">
-                <a:solidFill>
-                  <a:srgbClr val="000000"/>
-                </a:solidFill>
-                <a:latin typeface="Menlo" panose="020B0609030804020204" pitchFamily="49" charset="0"/>
-              </a:rPr>
-              <a:t> </a:t>
-            </a:r>
-            <a:r>
-              <a:rPr lang="en" altLang="zh-CN" dirty="0">
-                <a:solidFill>
-                  <a:srgbClr val="001080"/>
-                </a:solidFill>
-                <a:latin typeface="Menlo" panose="020B0609030804020204" pitchFamily="49" charset="0"/>
-              </a:rPr>
-              <a:t>factor</a:t>
-            </a:r>
-            <a:r>
-              <a:rPr lang="en" altLang="zh-CN" dirty="0">
-                <a:solidFill>
-                  <a:srgbClr val="000000"/>
-                </a:solidFill>
-                <a:latin typeface="Menlo" panose="020B0609030804020204" pitchFamily="49" charset="0"/>
-              </a:rPr>
-              <a:t> = </a:t>
-            </a:r>
-            <a:r>
-              <a:rPr lang="en" altLang="zh-CN" dirty="0">
-                <a:solidFill>
-                  <a:srgbClr val="098658"/>
-                </a:solidFill>
-                <a:latin typeface="Menlo" panose="020B0609030804020204" pitchFamily="49" charset="0"/>
-              </a:rPr>
-              <a:t>0</a:t>
-            </a:r>
-            <a:r>
-              <a:rPr lang="en" altLang="zh-CN" dirty="0">
-                <a:solidFill>
-                  <a:srgbClr val="000000"/>
-                </a:solidFill>
-                <a:latin typeface="Menlo" panose="020B0609030804020204" pitchFamily="49" charset="0"/>
-              </a:rPr>
-              <a:t>;</a:t>
-            </a:r>
-          </a:p>
-          <a:p>
-            <a:r>
-              <a:rPr lang="en" altLang="zh-CN" dirty="0">
-                <a:solidFill>
-                  <a:srgbClr val="008000"/>
-                </a:solidFill>
-                <a:latin typeface="Menlo" panose="020B0609030804020204" pitchFamily="49" charset="0"/>
-              </a:rPr>
-              <a:t>//some operations may change </a:t>
-            </a:r>
-            <a:r>
-              <a:rPr lang="en" altLang="zh-CN" dirty="0" err="1">
-                <a:solidFill>
-                  <a:srgbClr val="008000"/>
-                </a:solidFill>
-                <a:latin typeface="Menlo" panose="020B0609030804020204" pitchFamily="49" charset="0"/>
-              </a:rPr>
-              <a:t>isPositive's</a:t>
-            </a:r>
-            <a:r>
-              <a:rPr lang="en" altLang="zh-CN" dirty="0">
-                <a:solidFill>
-                  <a:srgbClr val="008000"/>
-                </a:solidFill>
-                <a:latin typeface="Menlo" panose="020B0609030804020204" pitchFamily="49" charset="0"/>
-              </a:rPr>
-              <a:t> value</a:t>
-            </a:r>
-            <a:endParaRPr lang="en" altLang="zh-CN" dirty="0">
-              <a:solidFill>
-                <a:srgbClr val="000000"/>
-              </a:solidFill>
-              <a:latin typeface="Menlo" panose="020B0609030804020204" pitchFamily="49" charset="0"/>
-            </a:endParaRPr>
-          </a:p>
-          <a:p>
-            <a:r>
-              <a:rPr lang="en" altLang="zh-CN" dirty="0">
-                <a:solidFill>
-                  <a:srgbClr val="AF00DB"/>
-                </a:solidFill>
-                <a:latin typeface="Menlo" panose="020B0609030804020204" pitchFamily="49" charset="0"/>
-              </a:rPr>
-              <a:t>if</a:t>
-            </a:r>
-            <a:r>
-              <a:rPr lang="en" altLang="zh-CN" dirty="0">
-                <a:solidFill>
-                  <a:srgbClr val="000000"/>
-                </a:solidFill>
-                <a:latin typeface="Menlo" panose="020B0609030804020204" pitchFamily="49" charset="0"/>
-              </a:rPr>
-              <a:t>(</a:t>
-            </a:r>
-            <a:r>
-              <a:rPr lang="en" altLang="zh-CN" dirty="0" err="1">
-                <a:solidFill>
-                  <a:srgbClr val="001080"/>
-                </a:solidFill>
-                <a:latin typeface="Menlo" panose="020B0609030804020204" pitchFamily="49" charset="0"/>
-              </a:rPr>
-              <a:t>isPositive</a:t>
-            </a:r>
-            <a:r>
-              <a:rPr lang="en" altLang="zh-CN" dirty="0">
-                <a:solidFill>
-                  <a:srgbClr val="000000"/>
-                </a:solidFill>
-                <a:latin typeface="Menlo" panose="020B0609030804020204" pitchFamily="49" charset="0"/>
-              </a:rPr>
-              <a:t>)</a:t>
-            </a:r>
-          </a:p>
-          <a:p>
-            <a:r>
-              <a:rPr lang="en" altLang="zh-CN" dirty="0">
-                <a:solidFill>
-                  <a:srgbClr val="001080"/>
-                </a:solidFill>
-                <a:latin typeface="Menlo" panose="020B0609030804020204" pitchFamily="49" charset="0"/>
-              </a:rPr>
-              <a:t>    factor</a:t>
-            </a:r>
-            <a:r>
-              <a:rPr lang="en" altLang="zh-CN" dirty="0">
-                <a:solidFill>
-                  <a:srgbClr val="000000"/>
-                </a:solidFill>
-                <a:latin typeface="Menlo" panose="020B0609030804020204" pitchFamily="49" charset="0"/>
-              </a:rPr>
-              <a:t> = </a:t>
-            </a:r>
-            <a:r>
-              <a:rPr lang="en" altLang="zh-CN" dirty="0">
-                <a:solidFill>
-                  <a:srgbClr val="098658"/>
-                </a:solidFill>
-                <a:latin typeface="Menlo" panose="020B0609030804020204" pitchFamily="49" charset="0"/>
-              </a:rPr>
-              <a:t>1</a:t>
-            </a:r>
-            <a:r>
-              <a:rPr lang="en" altLang="zh-CN" dirty="0">
-                <a:solidFill>
-                  <a:srgbClr val="000000"/>
-                </a:solidFill>
-                <a:latin typeface="Menlo" panose="020B0609030804020204" pitchFamily="49" charset="0"/>
-              </a:rPr>
-              <a:t>;</a:t>
-            </a:r>
-          </a:p>
-          <a:p>
-            <a:r>
-              <a:rPr lang="en" altLang="zh-CN" dirty="0">
-                <a:solidFill>
-                  <a:srgbClr val="AF00DB"/>
-                </a:solidFill>
-                <a:latin typeface="Menlo" panose="020B0609030804020204" pitchFamily="49" charset="0"/>
-              </a:rPr>
-              <a:t>else</a:t>
-            </a:r>
-            <a:endParaRPr lang="en" altLang="zh-CN" dirty="0">
-              <a:solidFill>
-                <a:srgbClr val="000000"/>
-              </a:solidFill>
-              <a:latin typeface="Menlo" panose="020B0609030804020204" pitchFamily="49" charset="0"/>
-            </a:endParaRPr>
-          </a:p>
-          <a:p>
-            <a:r>
-              <a:rPr lang="en" altLang="zh-CN" dirty="0">
-                <a:solidFill>
-                  <a:srgbClr val="001080"/>
-                </a:solidFill>
-                <a:latin typeface="Menlo" panose="020B0609030804020204" pitchFamily="49" charset="0"/>
-              </a:rPr>
-              <a:t>    factor</a:t>
-            </a:r>
-            <a:r>
-              <a:rPr lang="en" altLang="zh-CN" dirty="0">
-                <a:solidFill>
-                  <a:srgbClr val="000000"/>
-                </a:solidFill>
-                <a:latin typeface="Menlo" panose="020B0609030804020204" pitchFamily="49" charset="0"/>
-              </a:rPr>
-              <a:t> = -</a:t>
-            </a:r>
-            <a:r>
-              <a:rPr lang="en" altLang="zh-CN" dirty="0">
-                <a:solidFill>
-                  <a:srgbClr val="098658"/>
-                </a:solidFill>
-                <a:latin typeface="Menlo" panose="020B0609030804020204" pitchFamily="49" charset="0"/>
-              </a:rPr>
-              <a:t>1</a:t>
-            </a:r>
-            <a:r>
-              <a:rPr lang="en" altLang="zh-CN" dirty="0">
-                <a:solidFill>
-                  <a:srgbClr val="000000"/>
-                </a:solidFill>
-                <a:latin typeface="Menlo" panose="020B0609030804020204" pitchFamily="49" charset="0"/>
-              </a:rPr>
-              <a:t>;</a:t>
-            </a:r>
-            <a:endParaRPr lang="en" altLang="zh-CN" b="0" dirty="0">
-              <a:solidFill>
-                <a:srgbClr val="000000"/>
-              </a:solidFill>
-              <a:effectLst/>
-              <a:latin typeface="Menlo" panose="020B0609030804020204" pitchFamily="49" charset="0"/>
-            </a:endParaRPr>
-          </a:p>
-        </p:txBody>
-      </p:sp>
-      <p:sp>
-        <p:nvSpPr>
-          <p:cNvPr id="5" name="矩形 4">
-            <a:extLst>
-              <a:ext uri="{FF2B5EF4-FFF2-40B4-BE49-F238E27FC236}">
-                <a16:creationId xmlns:a16="http://schemas.microsoft.com/office/drawing/2014/main" id="{9B0A5B86-AF15-1542-B13B-10F8B85B921D}"/>
-              </a:ext>
-            </a:extLst>
-          </p:cNvPr>
-          <p:cNvSpPr/>
-          <p:nvPr/>
-        </p:nvSpPr>
-        <p:spPr>
-          <a:xfrm>
-            <a:off x="1115503" y="4842776"/>
-            <a:ext cx="6891357" cy="369332"/>
-          </a:xfrm>
-          <a:prstGeom prst="rect">
-            <a:avLst/>
-          </a:prstGeom>
-          <a:ln>
-            <a:solidFill>
-              <a:schemeClr val="accent1">
-                <a:shade val="50000"/>
-              </a:schemeClr>
-            </a:solidFill>
-          </a:ln>
-        </p:spPr>
-        <p:txBody>
-          <a:bodyPr wrap="square">
-            <a:spAutoFit/>
-          </a:bodyPr>
-          <a:lstStyle/>
-          <a:p>
-            <a:r>
-              <a:rPr lang="en" altLang="zh-CN" dirty="0">
-                <a:solidFill>
-                  <a:srgbClr val="001080"/>
-                </a:solidFill>
-                <a:latin typeface="Menlo" panose="020B0609030804020204" pitchFamily="49" charset="0"/>
-              </a:rPr>
-              <a:t>factor</a:t>
-            </a:r>
-            <a:r>
-              <a:rPr lang="en" altLang="zh-CN" dirty="0">
-                <a:solidFill>
-                  <a:srgbClr val="000000"/>
-                </a:solidFill>
-                <a:latin typeface="Menlo" panose="020B0609030804020204" pitchFamily="49" charset="0"/>
-              </a:rPr>
-              <a:t> = </a:t>
-            </a:r>
-            <a:r>
-              <a:rPr lang="en" altLang="zh-CN" dirty="0" err="1">
-                <a:solidFill>
-                  <a:srgbClr val="001080"/>
-                </a:solidFill>
-                <a:latin typeface="Menlo" panose="020B0609030804020204" pitchFamily="49" charset="0"/>
-              </a:rPr>
-              <a:t>isPositive</a:t>
-            </a:r>
-            <a:r>
-              <a:rPr lang="en" altLang="zh-CN" dirty="0">
-                <a:solidFill>
-                  <a:srgbClr val="000000"/>
-                </a:solidFill>
-                <a:latin typeface="Menlo" panose="020B0609030804020204" pitchFamily="49" charset="0"/>
-              </a:rPr>
-              <a:t> ? </a:t>
-            </a:r>
-            <a:r>
-              <a:rPr lang="en" altLang="zh-CN" dirty="0">
-                <a:solidFill>
-                  <a:srgbClr val="098658"/>
-                </a:solidFill>
-                <a:latin typeface="Menlo" panose="020B0609030804020204" pitchFamily="49" charset="0"/>
-              </a:rPr>
-              <a:t>1</a:t>
-            </a:r>
-            <a:r>
-              <a:rPr lang="en" altLang="zh-CN" dirty="0">
-                <a:solidFill>
-                  <a:srgbClr val="000000"/>
-                </a:solidFill>
-                <a:latin typeface="Menlo" panose="020B0609030804020204" pitchFamily="49" charset="0"/>
-              </a:rPr>
-              <a:t> : -</a:t>
-            </a:r>
-            <a:r>
-              <a:rPr lang="en" altLang="zh-CN" dirty="0">
-                <a:solidFill>
-                  <a:srgbClr val="098658"/>
-                </a:solidFill>
-                <a:latin typeface="Menlo" panose="020B0609030804020204" pitchFamily="49" charset="0"/>
-              </a:rPr>
-              <a:t>1</a:t>
-            </a:r>
-            <a:r>
-              <a:rPr lang="en" altLang="zh-CN" dirty="0">
-                <a:solidFill>
-                  <a:srgbClr val="000000"/>
-                </a:solidFill>
-                <a:latin typeface="Menlo" panose="020B0609030804020204" pitchFamily="49" charset="0"/>
-              </a:rPr>
-              <a:t>;</a:t>
-            </a:r>
-            <a:endParaRPr lang="en" altLang="zh-CN" b="0" dirty="0">
-              <a:solidFill>
-                <a:srgbClr val="000000"/>
-              </a:solidFill>
-              <a:effectLst/>
-              <a:latin typeface="Menlo" panose="020B0609030804020204" pitchFamily="49" charset="0"/>
-            </a:endParaRPr>
-          </a:p>
-        </p:txBody>
-      </p:sp>
-      <p:sp>
-        <p:nvSpPr>
-          <p:cNvPr id="6" name="矩形 5">
-            <a:extLst>
-              <a:ext uri="{FF2B5EF4-FFF2-40B4-BE49-F238E27FC236}">
-                <a16:creationId xmlns:a16="http://schemas.microsoft.com/office/drawing/2014/main" id="{338B4A6B-CD66-4542-9FCA-6C3A9242C754}"/>
-              </a:ext>
-            </a:extLst>
-          </p:cNvPr>
-          <p:cNvSpPr/>
-          <p:nvPr/>
-        </p:nvSpPr>
-        <p:spPr>
-          <a:xfrm>
-            <a:off x="1115505" y="5839365"/>
-            <a:ext cx="6891355" cy="369332"/>
-          </a:xfrm>
-          <a:prstGeom prst="rect">
-            <a:avLst/>
-          </a:prstGeom>
-          <a:ln>
-            <a:solidFill>
-              <a:schemeClr val="accent1">
-                <a:shade val="50000"/>
-              </a:schemeClr>
-            </a:solidFill>
-          </a:ln>
-        </p:spPr>
-        <p:txBody>
-          <a:bodyPr wrap="square">
-            <a:spAutoFit/>
-          </a:bodyPr>
-          <a:lstStyle/>
-          <a:p>
-            <a:r>
-              <a:rPr lang="en" altLang="zh-CN" dirty="0">
-                <a:solidFill>
-                  <a:srgbClr val="001080"/>
-                </a:solidFill>
-                <a:latin typeface="Menlo" panose="020B0609030804020204" pitchFamily="49" charset="0"/>
-              </a:rPr>
-              <a:t>factor</a:t>
-            </a:r>
-            <a:r>
-              <a:rPr lang="en" altLang="zh-CN" dirty="0">
-                <a:solidFill>
-                  <a:srgbClr val="000000"/>
-                </a:solidFill>
-                <a:latin typeface="Menlo" panose="020B0609030804020204" pitchFamily="49" charset="0"/>
-              </a:rPr>
-              <a:t> = (</a:t>
-            </a:r>
-            <a:r>
-              <a:rPr lang="en" altLang="zh-CN" dirty="0" err="1">
-                <a:solidFill>
-                  <a:srgbClr val="001080"/>
-                </a:solidFill>
-                <a:latin typeface="Menlo" panose="020B0609030804020204" pitchFamily="49" charset="0"/>
-              </a:rPr>
-              <a:t>isPositive</a:t>
-            </a:r>
-            <a:r>
-              <a:rPr lang="en" altLang="zh-CN" dirty="0">
-                <a:solidFill>
-                  <a:srgbClr val="000000"/>
-                </a:solidFill>
-                <a:latin typeface="Menlo" panose="020B0609030804020204" pitchFamily="49" charset="0"/>
-              </a:rPr>
-              <a:t>) * </a:t>
-            </a:r>
-            <a:r>
-              <a:rPr lang="en" altLang="zh-CN" dirty="0">
-                <a:solidFill>
-                  <a:srgbClr val="098658"/>
-                </a:solidFill>
-                <a:latin typeface="Menlo" panose="020B0609030804020204" pitchFamily="49" charset="0"/>
-              </a:rPr>
-              <a:t>2</a:t>
-            </a:r>
-            <a:r>
-              <a:rPr lang="en" altLang="zh-CN" dirty="0">
-                <a:solidFill>
-                  <a:srgbClr val="000000"/>
-                </a:solidFill>
-                <a:latin typeface="Menlo" panose="020B0609030804020204" pitchFamily="49" charset="0"/>
-              </a:rPr>
-              <a:t> - </a:t>
-            </a:r>
-            <a:r>
-              <a:rPr lang="en" altLang="zh-CN" dirty="0">
-                <a:solidFill>
-                  <a:srgbClr val="098658"/>
-                </a:solidFill>
-                <a:latin typeface="Menlo" panose="020B0609030804020204" pitchFamily="49" charset="0"/>
-              </a:rPr>
-              <a:t>1</a:t>
-            </a:r>
-            <a:r>
-              <a:rPr lang="en" altLang="zh-CN" dirty="0">
-                <a:solidFill>
-                  <a:srgbClr val="000000"/>
-                </a:solidFill>
-                <a:latin typeface="Menlo" panose="020B0609030804020204" pitchFamily="49" charset="0"/>
-              </a:rPr>
-              <a:t>;</a:t>
-            </a:r>
-            <a:endParaRPr lang="en" altLang="zh-CN" b="0" dirty="0">
-              <a:solidFill>
-                <a:srgbClr val="000000"/>
-              </a:solidFill>
-              <a:effectLst/>
-              <a:latin typeface="Menlo" panose="020B0609030804020204" pitchFamily="49" charset="0"/>
-            </a:endParaRPr>
-          </a:p>
-        </p:txBody>
-      </p:sp>
-      <p:sp>
-        <p:nvSpPr>
-          <p:cNvPr id="7" name="右箭头 6">
-            <a:extLst>
-              <a:ext uri="{FF2B5EF4-FFF2-40B4-BE49-F238E27FC236}">
-                <a16:creationId xmlns:a16="http://schemas.microsoft.com/office/drawing/2014/main" id="{638C31BB-86CA-1144-9D15-8537E25B5CD4}"/>
-              </a:ext>
-            </a:extLst>
-          </p:cNvPr>
-          <p:cNvSpPr/>
-          <p:nvPr/>
-        </p:nvSpPr>
-        <p:spPr>
-          <a:xfrm rot="5400000">
-            <a:off x="3353347" y="4261954"/>
-            <a:ext cx="627260" cy="534390"/>
-          </a:xfrm>
-          <a:prstGeom prst="rightArrow">
-            <a:avLst/>
-          </a:prstGeom>
-        </p:spPr>
-        <p:style>
-          <a:lnRef idx="2">
-            <a:schemeClr val="accent1">
-              <a:shade val="50000"/>
-            </a:schemeClr>
-          </a:lnRef>
-          <a:fillRef idx="1">
-            <a:schemeClr val="accent1"/>
-          </a:fillRef>
-          <a:effectRef idx="0">
-            <a:schemeClr val="accent1"/>
-          </a:effectRef>
-          <a:fontRef idx="minor">
-            <a:schemeClr val="lt1"/>
-          </a:fontRef>
-        </p:style>
-        <p:txBody>
-          <a:bodyPr rtlCol="0" anchor="ctr"/>
-          <a:lstStyle/>
-          <a:p>
-            <a:pPr algn="ctr"/>
-            <a:endParaRPr kumimoji="1" lang="zh-CN" altLang="en-US"/>
-          </a:p>
-        </p:txBody>
-      </p:sp>
-      <p:sp>
-        <p:nvSpPr>
-          <p:cNvPr id="8" name="右箭头 7">
-            <a:extLst>
-              <a:ext uri="{FF2B5EF4-FFF2-40B4-BE49-F238E27FC236}">
-                <a16:creationId xmlns:a16="http://schemas.microsoft.com/office/drawing/2014/main" id="{7611F77A-30E1-BA41-ACF5-51D4A0643A70}"/>
-              </a:ext>
-            </a:extLst>
-          </p:cNvPr>
-          <p:cNvSpPr/>
-          <p:nvPr/>
-        </p:nvSpPr>
-        <p:spPr>
-          <a:xfrm rot="5400000">
-            <a:off x="3353347" y="5265298"/>
-            <a:ext cx="627260" cy="534390"/>
-          </a:xfrm>
-          <a:prstGeom prst="rightArrow">
-            <a:avLst/>
-          </a:prstGeom>
-        </p:spPr>
-        <p:style>
-          <a:lnRef idx="2">
-            <a:schemeClr val="accent1">
-              <a:shade val="50000"/>
-            </a:schemeClr>
-          </a:lnRef>
-          <a:fillRef idx="1">
-            <a:schemeClr val="accent1"/>
-          </a:fillRef>
-          <a:effectRef idx="0">
-            <a:schemeClr val="accent1"/>
-          </a:effectRef>
-          <a:fontRef idx="minor">
-            <a:schemeClr val="lt1"/>
-          </a:fontRef>
-        </p:style>
-        <p:txBody>
-          <a:bodyPr rtlCol="0" anchor="ctr"/>
-          <a:lstStyle/>
-          <a:p>
-            <a:pPr algn="ctr"/>
-            <a:endParaRPr kumimoji="1" lang="zh-CN" altLang="en-US"/>
-          </a:p>
-        </p:txBody>
-      </p:sp>
-    </p:spTree>
-    <p:extLst>
-      <p:ext uri="{BB962C8B-B14F-4D97-AF65-F5344CB8AC3E}">
-        <p14:creationId xmlns:p14="http://schemas.microsoft.com/office/powerpoint/2010/main" val="1601599937"/>
-      </p:ext>
-    </p:extLst>
-  </p:cSld>
-  <p:clrMapOvr>
-    <a:masterClrMapping/>
-  </p:clrMapOvr>
-  <p:timing>
-    <p:tnLst>
-      <p:par>
-        <p:cTn id="1" dur="indefinite" restart="never" nodeType="tmRoot">
-          <p:childTnLst>
-            <p:seq concurrent="1" nextAc="seek">
-              <p:cTn id="2" dur="indefinite" nodeType="mainSeq">
-                <p:childTnLst>
-                  <p:par>
-                    <p:cTn id="3" fill="hold">
-                      <p:stCondLst>
-                        <p:cond delay="indefinite"/>
-                      </p:stCondLst>
-                      <p:childTnLst>
-                        <p:par>
-                          <p:cTn id="4" fill="hold">
-                            <p:stCondLst>
-                              <p:cond delay="0"/>
-                            </p:stCondLst>
-                            <p:childTnLst>
-                              <p:par>
-                                <p:cTn id="5" presetID="1" presetClass="entr" presetSubtype="0" fill="hold" grpId="0" nodeType="clickEffect">
-                                  <p:stCondLst>
-                                    <p:cond delay="0"/>
-                                  </p:stCondLst>
-                                  <p:childTnLst>
-                                    <p:set>
-                                      <p:cBhvr>
-                                        <p:cTn id="6" dur="1" fill="hold">
-                                          <p:stCondLst>
-                                            <p:cond delay="0"/>
-                                          </p:stCondLst>
-                                        </p:cTn>
-                                        <p:tgtEl>
-                                          <p:spTgt spid="7"/>
-                                        </p:tgtEl>
-                                        <p:attrNameLst>
-                                          <p:attrName>style.visibility</p:attrName>
-                                        </p:attrNameLst>
-                                      </p:cBhvr>
-                                      <p:to>
-                                        <p:strVal val="visible"/>
-                                      </p:to>
-                                    </p:set>
-                                  </p:childTnLst>
-                                </p:cTn>
-                              </p:par>
-                              <p:par>
-                                <p:cTn id="7" presetID="1" presetClass="entr" presetSubtype="0" fill="hold" grpId="0" nodeType="withEffect">
-                                  <p:stCondLst>
-                                    <p:cond delay="0"/>
-                                  </p:stCondLst>
-                                  <p:childTnLst>
-                                    <p:set>
-                                      <p:cBhvr>
-                                        <p:cTn id="8" dur="1" fill="hold">
-                                          <p:stCondLst>
-                                            <p:cond delay="0"/>
-                                          </p:stCondLst>
-                                        </p:cTn>
-                                        <p:tgtEl>
-                                          <p:spTgt spid="5"/>
-                                        </p:tgtEl>
-                                        <p:attrNameLst>
-                                          <p:attrName>style.visibility</p:attrName>
-                                        </p:attrNameLst>
-                                      </p:cBhvr>
-                                      <p:to>
-                                        <p:strVal val="visible"/>
-                                      </p:to>
-                                    </p:set>
-                                  </p:childTnLst>
-                                </p:cTn>
-                              </p:par>
-                            </p:childTnLst>
-                          </p:cTn>
-                        </p:par>
-                      </p:childTnLst>
-                    </p:cTn>
-                  </p:par>
-                  <p:par>
-                    <p:cTn id="9" fill="hold">
-                      <p:stCondLst>
-                        <p:cond delay="indefinite"/>
-                      </p:stCondLst>
-                      <p:childTnLst>
-                        <p:par>
-                          <p:cTn id="10" fill="hold">
-                            <p:stCondLst>
-                              <p:cond delay="0"/>
-                            </p:stCondLst>
-                            <p:childTnLst>
-                              <p:par>
-                                <p:cTn id="11" presetID="1" presetClass="entr" presetSubtype="0" fill="hold" grpId="0" nodeType="clickEffect">
-                                  <p:stCondLst>
-                                    <p:cond delay="0"/>
-                                  </p:stCondLst>
-                                  <p:childTnLst>
-                                    <p:set>
-                                      <p:cBhvr>
-                                        <p:cTn id="12" dur="1" fill="hold">
-                                          <p:stCondLst>
-                                            <p:cond delay="0"/>
-                                          </p:stCondLst>
-                                        </p:cTn>
-                                        <p:tgtEl>
-                                          <p:spTgt spid="8"/>
-                                        </p:tgtEl>
-                                        <p:attrNameLst>
-                                          <p:attrName>style.visibility</p:attrName>
-                                        </p:attrNameLst>
-                                      </p:cBhvr>
-                                      <p:to>
-                                        <p:strVal val="visible"/>
-                                      </p:to>
-                                    </p:set>
-                                  </p:childTnLst>
-                                </p:cTn>
-                              </p:par>
-                              <p:par>
-                                <p:cTn id="13" presetID="1" presetClass="entr" presetSubtype="0" fill="hold" grpId="0" nodeType="withEffect">
-                                  <p:stCondLst>
-                                    <p:cond delay="0"/>
-                                  </p:stCondLst>
-                                  <p:childTnLst>
-                                    <p:set>
-                                      <p:cBhvr>
-                                        <p:cTn id="14" dur="1" fill="hold">
-                                          <p:stCondLst>
-                                            <p:cond delay="0"/>
-                                          </p:stCondLst>
-                                        </p:cTn>
-                                        <p:tgtEl>
-                                          <p:spTgt spid="6"/>
-                                        </p:tgtEl>
-                                        <p:attrNameLst>
-                                          <p:attrName>style.visibility</p:attrName>
-                                        </p:attrNameLst>
-                                      </p:cBhvr>
-                                      <p:to>
-                                        <p:strVal val="visible"/>
-                                      </p:to>
-                                    </p:set>
-                                  </p:childTnLst>
-                                </p:cTn>
-                              </p:par>
-                            </p:childTnLst>
-                          </p:cTn>
-                        </p:par>
-                      </p:childTnLst>
-                    </p:cTn>
-                  </p:par>
-                </p:childTnLst>
-              </p:cTn>
-              <p:prevCondLst>
-                <p:cond evt="onPrev" delay="0">
-                  <p:tgtEl>
-                    <p:sldTgt/>
-                  </p:tgtEl>
-                </p:cond>
-              </p:prevCondLst>
-              <p:nextCondLst>
-                <p:cond evt="onNext" delay="0">
-                  <p:tgtEl>
-                    <p:sldTgt/>
-                  </p:tgtEl>
-                </p:cond>
-              </p:nextCondLst>
-            </p:seq>
-          </p:childTnLst>
-        </p:cTn>
-      </p:par>
-    </p:tnLst>
-    <p:bldLst>
-      <p:bldP spid="5" grpId="0" animBg="1"/>
-      <p:bldP spid="6" grpId="0" animBg="1"/>
-      <p:bldP spid="7" grpId="0" animBg="1"/>
-      <p:bldP spid="8" grpId="0" animBg="1"/>
-    </p:bldLst>
-  </p:timing>
-</p:sld>
-</file>
-
-<file path=ppt/slides/slide7.xml><?xml version="1.0" encoding="utf-8"?>
-<p:sld xmlns:a="http://schemas.openxmlformats.org/drawingml/2006/main" xmlns:r="http://schemas.openxmlformats.org/officeDocument/2006/relationships" xmlns:p="http://schemas.openxmlformats.org/presentationml/2006/main">
-  <p:cSld>
-    <p:spTree>
-      <p:nvGrpSpPr>
-        <p:cNvPr id="1" name=""/>
-        <p:cNvGrpSpPr/>
-        <p:nvPr/>
-      </p:nvGrpSpPr>
-      <p:grpSpPr>
-        <a:xfrm>
-          <a:off x="0" y="0"/>
-          <a:ext cx="0" cy="0"/>
-          <a:chOff x="0" y="0"/>
-          <a:chExt cx="0" cy="0"/>
-        </a:xfrm>
-      </p:grpSpPr>
-      <p:sp>
-        <p:nvSpPr>
-          <p:cNvPr id="4" name="标题 3">
-            <a:extLst>
-              <a:ext uri="{FF2B5EF4-FFF2-40B4-BE49-F238E27FC236}">
-                <a16:creationId xmlns:a16="http://schemas.microsoft.com/office/drawing/2014/main" id="{85E25EB2-BAEB-7241-9561-AB08FB4100F0}"/>
-              </a:ext>
-            </a:extLst>
-          </p:cNvPr>
-          <p:cNvSpPr>
-            <a:spLocks noGrp="1"/>
-          </p:cNvSpPr>
-          <p:nvPr>
-            <p:ph type="ctrTitle"/>
-          </p:nvPr>
-        </p:nvSpPr>
-        <p:spPr/>
-        <p:txBody>
-          <a:bodyPr/>
-          <a:lstStyle/>
-          <a:p>
-            <a:r>
-              <a:rPr lang="en-US" altLang="zh-CN" dirty="0"/>
-              <a:t>Conditions</a:t>
-            </a:r>
-            <a:endParaRPr lang="zh-CN" altLang="en-US" dirty="0"/>
-          </a:p>
-        </p:txBody>
-      </p:sp>
-      <p:sp>
-        <p:nvSpPr>
-          <p:cNvPr id="5" name="副标题 4">
-            <a:extLst>
-              <a:ext uri="{FF2B5EF4-FFF2-40B4-BE49-F238E27FC236}">
-                <a16:creationId xmlns:a16="http://schemas.microsoft.com/office/drawing/2014/main" id="{00640D8F-B127-2149-841B-D24060309C72}"/>
-              </a:ext>
-            </a:extLst>
-          </p:cNvPr>
-          <p:cNvSpPr>
-            <a:spLocks noGrp="1"/>
-          </p:cNvSpPr>
-          <p:nvPr>
-            <p:ph type="subTitle" idx="1"/>
-          </p:nvPr>
-        </p:nvSpPr>
-        <p:spPr/>
-        <p:txBody>
-          <a:bodyPr/>
-          <a:lstStyle/>
-          <a:p>
-            <a:endParaRPr lang="zh-CN" altLang="en-US"/>
-          </a:p>
-        </p:txBody>
-      </p:sp>
-    </p:spTree>
-    <p:extLst>
-      <p:ext uri="{BB962C8B-B14F-4D97-AF65-F5344CB8AC3E}">
-        <p14:creationId xmlns:p14="http://schemas.microsoft.com/office/powerpoint/2010/main" val="1423434014"/>
-      </p:ext>
-    </p:extLst>
-  </p:cSld>
-  <p:clrMapOvr>
-    <a:masterClrMapping/>
-  </p:clrMapOvr>
-</p:sld>
-</file>
-
-<file path=ppt/slides/slide8.xml><?xml version="1.0" encoding="utf-8"?>
-<p:sld xmlns:a="http://schemas.openxmlformats.org/drawingml/2006/main" xmlns:r="http://schemas.openxmlformats.org/officeDocument/2006/relationships" xmlns:p="http://schemas.openxmlformats.org/presentationml/2006/main">
-  <p:cSld>
-    <p:spTree>
-      <p:nvGrpSpPr>
-        <p:cNvPr id="1" name=""/>
-        <p:cNvGrpSpPr/>
-        <p:nvPr/>
-      </p:nvGrpSpPr>
-      <p:grpSpPr>
-        <a:xfrm>
-          <a:off x="0" y="0"/>
-          <a:ext cx="0" cy="0"/>
-          <a:chOff x="0" y="0"/>
-          <a:chExt cx="0" cy="0"/>
-        </a:xfrm>
-      </p:grpSpPr>
-      <p:sp>
-        <p:nvSpPr>
-          <p:cNvPr id="2" name="标题 1">
-            <a:extLst>
-              <a:ext uri="{FF2B5EF4-FFF2-40B4-BE49-F238E27FC236}">
-                <a16:creationId xmlns:a16="http://schemas.microsoft.com/office/drawing/2014/main" id="{897B92AE-D923-8D42-A8D0-B9EA9C08A908}"/>
-              </a:ext>
-            </a:extLst>
-          </p:cNvPr>
-          <p:cNvSpPr>
-            <a:spLocks noGrp="1"/>
-          </p:cNvSpPr>
-          <p:nvPr>
-            <p:ph type="title"/>
-          </p:nvPr>
-        </p:nvSpPr>
-        <p:spPr/>
-        <p:txBody>
-          <a:bodyPr/>
-          <a:lstStyle/>
-          <a:p>
-            <a:r>
-              <a:rPr kumimoji="1" lang="en-US" altLang="zh-CN" dirty="0"/>
-              <a:t>Condition</a:t>
-            </a:r>
-            <a:endParaRPr kumimoji="1" lang="zh-CN" altLang="en-US" dirty="0"/>
-          </a:p>
-        </p:txBody>
-      </p:sp>
-      <p:sp>
-        <p:nvSpPr>
-          <p:cNvPr id="3" name="内容占位符 2">
-            <a:extLst>
-              <a:ext uri="{FF2B5EF4-FFF2-40B4-BE49-F238E27FC236}">
-                <a16:creationId xmlns:a16="http://schemas.microsoft.com/office/drawing/2014/main" id="{16D15109-B03F-504F-9FC1-46213F2D956F}"/>
-              </a:ext>
-            </a:extLst>
-          </p:cNvPr>
-          <p:cNvSpPr>
-            <a:spLocks noGrp="1"/>
-          </p:cNvSpPr>
-          <p:nvPr>
-            <p:ph idx="1"/>
-          </p:nvPr>
-        </p:nvSpPr>
-        <p:spPr/>
-        <p:txBody>
-          <a:bodyPr/>
-          <a:lstStyle/>
-          <a:p>
-            <a:r>
-              <a:rPr kumimoji="1" lang="en-US" altLang="zh-CN" dirty="0"/>
-              <a:t>What should be a condition?</a:t>
-            </a:r>
-          </a:p>
-          <a:p>
-            <a:endParaRPr kumimoji="1" lang="en-US" altLang="zh-CN" dirty="0"/>
-          </a:p>
-          <a:p>
-            <a:endParaRPr kumimoji="1" lang="en-US" altLang="zh-CN" dirty="0"/>
-          </a:p>
-          <a:p>
-            <a:r>
-              <a:rPr kumimoji="1" lang="en-US" altLang="zh-CN" dirty="0"/>
-              <a:t>The condition should be an expression which is convertible to bool</a:t>
-            </a:r>
-          </a:p>
-          <a:p>
-            <a:pPr lvl="1"/>
-            <a:r>
-              <a:rPr kumimoji="1" lang="en-US" altLang="zh-CN" dirty="0"/>
-              <a:t>Its value can be </a:t>
-            </a:r>
-            <a:r>
-              <a:rPr kumimoji="1" lang="en-US" altLang="zh-CN" dirty="0">
-                <a:solidFill>
-                  <a:srgbClr val="0000CC"/>
-                </a:solidFill>
-                <a:latin typeface="Courier" pitchFamily="2" charset="0"/>
-              </a:rPr>
-              <a:t>bool, char, int, float</a:t>
-            </a:r>
-          </a:p>
-          <a:p>
-            <a:endParaRPr kumimoji="1" lang="en-US" altLang="zh-CN" dirty="0"/>
-          </a:p>
-          <a:p>
-            <a:endParaRPr kumimoji="1" lang="en-US" altLang="zh-CN" dirty="0"/>
-          </a:p>
-          <a:p>
-            <a:endParaRPr kumimoji="1" lang="zh-CN" altLang="en-US" dirty="0"/>
-          </a:p>
-        </p:txBody>
-      </p:sp>
-      <p:sp>
-        <p:nvSpPr>
-          <p:cNvPr id="4" name="矩形 3">
-            <a:extLst>
-              <a:ext uri="{FF2B5EF4-FFF2-40B4-BE49-F238E27FC236}">
-                <a16:creationId xmlns:a16="http://schemas.microsoft.com/office/drawing/2014/main" id="{682CF21F-4D42-BD4F-836F-355699BA0E73}"/>
-              </a:ext>
-            </a:extLst>
-          </p:cNvPr>
-          <p:cNvSpPr/>
-          <p:nvPr/>
-        </p:nvSpPr>
-        <p:spPr>
-          <a:xfrm>
-            <a:off x="1118570" y="1855821"/>
-            <a:ext cx="11031417" cy="923330"/>
-          </a:xfrm>
-          <a:prstGeom prst="rect">
-            <a:avLst/>
-          </a:prstGeom>
-        </p:spPr>
-        <p:txBody>
-          <a:bodyPr wrap="square">
-            <a:spAutoFit/>
-          </a:bodyPr>
-          <a:lstStyle/>
-          <a:p>
-            <a:r>
-              <a:rPr lang="en" altLang="zh-CN" dirty="0">
-                <a:solidFill>
-                  <a:srgbClr val="0000FF"/>
-                </a:solidFill>
-                <a:latin typeface="Menlo" panose="020B0609030804020204" pitchFamily="49" charset="0"/>
-              </a:rPr>
-              <a:t>int</a:t>
-            </a:r>
-            <a:r>
-              <a:rPr lang="en" altLang="zh-CN" dirty="0">
-                <a:solidFill>
-                  <a:srgbClr val="000000"/>
-                </a:solidFill>
-                <a:latin typeface="Menlo" panose="020B0609030804020204" pitchFamily="49" charset="0"/>
-              </a:rPr>
-              <a:t> </a:t>
-            </a:r>
-            <a:r>
-              <a:rPr lang="en" altLang="zh-CN" dirty="0">
-                <a:solidFill>
-                  <a:srgbClr val="001080"/>
-                </a:solidFill>
-                <a:latin typeface="Menlo" panose="020B0609030804020204" pitchFamily="49" charset="0"/>
-              </a:rPr>
-              <a:t>num</a:t>
-            </a:r>
-            <a:r>
-              <a:rPr lang="en" altLang="zh-CN" dirty="0">
-                <a:solidFill>
-                  <a:srgbClr val="000000"/>
-                </a:solidFill>
-                <a:latin typeface="Menlo" panose="020B0609030804020204" pitchFamily="49" charset="0"/>
-              </a:rPr>
-              <a:t> = </a:t>
-            </a:r>
-            <a:r>
-              <a:rPr lang="en" altLang="zh-CN" dirty="0">
-                <a:solidFill>
-                  <a:srgbClr val="098658"/>
-                </a:solidFill>
-                <a:latin typeface="Menlo" panose="020B0609030804020204" pitchFamily="49" charset="0"/>
-              </a:rPr>
-              <a:t>10</a:t>
-            </a:r>
-            <a:r>
-              <a:rPr lang="en" altLang="zh-CN" dirty="0">
-                <a:solidFill>
-                  <a:srgbClr val="000000"/>
-                </a:solidFill>
-                <a:latin typeface="Menlo" panose="020B0609030804020204" pitchFamily="49" charset="0"/>
-              </a:rPr>
-              <a:t>;</a:t>
-            </a:r>
-          </a:p>
-          <a:p>
-            <a:r>
-              <a:rPr lang="en" altLang="zh-CN" dirty="0">
-                <a:solidFill>
-                  <a:srgbClr val="AF00DB"/>
-                </a:solidFill>
-                <a:latin typeface="Menlo" panose="020B0609030804020204" pitchFamily="49" charset="0"/>
-              </a:rPr>
-              <a:t>if</a:t>
-            </a:r>
-            <a:r>
-              <a:rPr lang="en" altLang="zh-CN" dirty="0">
-                <a:solidFill>
-                  <a:srgbClr val="000000"/>
-                </a:solidFill>
-                <a:latin typeface="Menlo" panose="020B0609030804020204" pitchFamily="49" charset="0"/>
-              </a:rPr>
-              <a:t> (</a:t>
-            </a:r>
-            <a:r>
-              <a:rPr lang="en" altLang="zh-CN" dirty="0">
-                <a:solidFill>
-                  <a:srgbClr val="001080"/>
-                </a:solidFill>
-                <a:latin typeface="Menlo" panose="020B0609030804020204" pitchFamily="49" charset="0"/>
-              </a:rPr>
-              <a:t>num</a:t>
-            </a:r>
-            <a:r>
-              <a:rPr lang="en" altLang="zh-CN" dirty="0">
-                <a:solidFill>
-                  <a:srgbClr val="000000"/>
-                </a:solidFill>
-                <a:latin typeface="Menlo" panose="020B0609030804020204" pitchFamily="49" charset="0"/>
-              </a:rPr>
-              <a:t> &lt; </a:t>
-            </a:r>
-            <a:r>
-              <a:rPr lang="en" altLang="zh-CN" dirty="0">
-                <a:solidFill>
-                  <a:srgbClr val="098658"/>
-                </a:solidFill>
-                <a:latin typeface="Menlo" panose="020B0609030804020204" pitchFamily="49" charset="0"/>
-              </a:rPr>
-              <a:t>5</a:t>
-            </a:r>
-            <a:r>
-              <a:rPr lang="en" altLang="zh-CN" dirty="0">
-                <a:solidFill>
-                  <a:srgbClr val="000000"/>
-                </a:solidFill>
-                <a:latin typeface="Menlo" panose="020B0609030804020204" pitchFamily="49" charset="0"/>
-              </a:rPr>
-              <a:t>)</a:t>
-            </a:r>
-          </a:p>
-          <a:p>
-            <a:r>
-              <a:rPr lang="en" altLang="zh-CN" dirty="0">
-                <a:solidFill>
-                  <a:srgbClr val="001080"/>
-                </a:solidFill>
-                <a:latin typeface="Menlo" panose="020B0609030804020204" pitchFamily="49" charset="0"/>
-              </a:rPr>
-              <a:t>    </a:t>
-            </a:r>
-            <a:r>
-              <a:rPr lang="en" altLang="zh-CN" dirty="0" err="1">
-                <a:solidFill>
-                  <a:srgbClr val="001080"/>
-                </a:solidFill>
-                <a:latin typeface="Menlo" panose="020B0609030804020204" pitchFamily="49" charset="0"/>
-              </a:rPr>
-              <a:t>cout</a:t>
-            </a:r>
-            <a:r>
-              <a:rPr lang="en" altLang="zh-CN" dirty="0">
-                <a:solidFill>
-                  <a:srgbClr val="000000"/>
-                </a:solidFill>
-                <a:latin typeface="Menlo" panose="020B0609030804020204" pitchFamily="49" charset="0"/>
-              </a:rPr>
-              <a:t> </a:t>
-            </a:r>
-            <a:r>
-              <a:rPr lang="en" altLang="zh-CN" dirty="0">
-                <a:solidFill>
-                  <a:srgbClr val="795E26"/>
-                </a:solidFill>
-                <a:latin typeface="Menlo" panose="020B0609030804020204" pitchFamily="49" charset="0"/>
-              </a:rPr>
-              <a:t>&lt;&lt;</a:t>
-            </a:r>
-            <a:r>
-              <a:rPr lang="en" altLang="zh-CN" dirty="0">
-                <a:solidFill>
-                  <a:srgbClr val="000000"/>
-                </a:solidFill>
-                <a:latin typeface="Menlo" panose="020B0609030804020204" pitchFamily="49" charset="0"/>
-              </a:rPr>
-              <a:t> </a:t>
-            </a:r>
-            <a:r>
-              <a:rPr lang="en" altLang="zh-CN" dirty="0">
-                <a:solidFill>
-                  <a:srgbClr val="A31515"/>
-                </a:solidFill>
-                <a:latin typeface="Menlo" panose="020B0609030804020204" pitchFamily="49" charset="0"/>
-              </a:rPr>
-              <a:t>"The number is less than 5. "</a:t>
-            </a:r>
-            <a:r>
-              <a:rPr lang="en" altLang="zh-CN" dirty="0">
-                <a:solidFill>
-                  <a:srgbClr val="000000"/>
-                </a:solidFill>
-                <a:latin typeface="Menlo" panose="020B0609030804020204" pitchFamily="49" charset="0"/>
-              </a:rPr>
-              <a:t> </a:t>
-            </a:r>
-            <a:r>
-              <a:rPr lang="en" altLang="zh-CN" dirty="0">
-                <a:solidFill>
-                  <a:srgbClr val="795E26"/>
-                </a:solidFill>
-                <a:latin typeface="Menlo" panose="020B0609030804020204" pitchFamily="49" charset="0"/>
-              </a:rPr>
-              <a:t>&lt;&lt;</a:t>
-            </a:r>
-            <a:r>
-              <a:rPr lang="en" altLang="zh-CN" dirty="0">
-                <a:solidFill>
-                  <a:srgbClr val="000000"/>
-                </a:solidFill>
-                <a:latin typeface="Menlo" panose="020B0609030804020204" pitchFamily="49" charset="0"/>
-              </a:rPr>
-              <a:t> </a:t>
-            </a:r>
-            <a:r>
-              <a:rPr lang="en" altLang="zh-CN" dirty="0" err="1">
-                <a:solidFill>
-                  <a:srgbClr val="795E26"/>
-                </a:solidFill>
-                <a:latin typeface="Menlo" panose="020B0609030804020204" pitchFamily="49" charset="0"/>
-              </a:rPr>
-              <a:t>endl</a:t>
-            </a:r>
-            <a:r>
-              <a:rPr lang="en" altLang="zh-CN" dirty="0">
-                <a:solidFill>
-                  <a:srgbClr val="000000"/>
-                </a:solidFill>
-                <a:latin typeface="Menlo" panose="020B0609030804020204" pitchFamily="49" charset="0"/>
-              </a:rPr>
-              <a:t>;</a:t>
-            </a:r>
-          </a:p>
-        </p:txBody>
-      </p:sp>
-      <p:sp>
-        <p:nvSpPr>
-          <p:cNvPr id="5" name="矩形 4">
-            <a:extLst>
-              <a:ext uri="{FF2B5EF4-FFF2-40B4-BE49-F238E27FC236}">
-                <a16:creationId xmlns:a16="http://schemas.microsoft.com/office/drawing/2014/main" id="{AE808BE4-E12D-0645-BB6E-B03A7EB72933}"/>
-              </a:ext>
-            </a:extLst>
-          </p:cNvPr>
-          <p:cNvSpPr/>
-          <p:nvPr/>
-        </p:nvSpPr>
-        <p:spPr>
-          <a:xfrm>
-            <a:off x="1746738" y="2133600"/>
-            <a:ext cx="996462" cy="339969"/>
-          </a:xfrm>
-          <a:prstGeom prst="rect">
-            <a:avLst/>
-          </a:prstGeom>
-          <a:noFill/>
-          <a:ln w="63500">
-            <a:solidFill>
-              <a:srgbClr val="FF0000"/>
-            </a:solidFill>
-          </a:ln>
-        </p:spPr>
-        <p:style>
-          <a:lnRef idx="2">
-            <a:schemeClr val="accent1">
-              <a:shade val="50000"/>
-            </a:schemeClr>
-          </a:lnRef>
-          <a:fillRef idx="1">
-            <a:schemeClr val="accent1"/>
-          </a:fillRef>
-          <a:effectRef idx="0">
-            <a:schemeClr val="accent1"/>
-          </a:effectRef>
-          <a:fontRef idx="minor">
-            <a:schemeClr val="lt1"/>
-          </a:fontRef>
-        </p:style>
-        <p:txBody>
-          <a:bodyPr rtlCol="0" anchor="ctr"/>
-          <a:lstStyle/>
-          <a:p>
-            <a:pPr algn="ctr"/>
-            <a:endParaRPr kumimoji="1" lang="zh-CN" altLang="en-US"/>
-          </a:p>
-        </p:txBody>
-      </p:sp>
-      <p:sp>
-        <p:nvSpPr>
-          <p:cNvPr id="6" name="下箭头 5">
-            <a:extLst>
-              <a:ext uri="{FF2B5EF4-FFF2-40B4-BE49-F238E27FC236}">
-                <a16:creationId xmlns:a16="http://schemas.microsoft.com/office/drawing/2014/main" id="{05AA1919-9B9E-244F-80CD-E5657988C058}"/>
-              </a:ext>
-            </a:extLst>
-          </p:cNvPr>
-          <p:cNvSpPr/>
-          <p:nvPr/>
-        </p:nvSpPr>
-        <p:spPr>
-          <a:xfrm rot="2558456">
-            <a:off x="3231337" y="859193"/>
-            <a:ext cx="571500" cy="1664258"/>
-          </a:xfrm>
-          <a:prstGeom prst="downArrow">
-            <a:avLst>
-              <a:gd name="adj1" fmla="val 50000"/>
-              <a:gd name="adj2" fmla="val 84286"/>
-            </a:avLst>
-          </a:prstGeom>
-          <a:solidFill>
-            <a:srgbClr val="FF0000">
-              <a:alpha val="58000"/>
-            </a:srgbClr>
-          </a:solidFill>
-          <a:ln>
-            <a:noFill/>
-          </a:ln>
-        </p:spPr>
-        <p:style>
-          <a:lnRef idx="2">
-            <a:schemeClr val="accent1">
-              <a:shade val="50000"/>
-            </a:schemeClr>
-          </a:lnRef>
-          <a:fillRef idx="1">
-            <a:schemeClr val="accent1"/>
-          </a:fillRef>
-          <a:effectRef idx="0">
-            <a:schemeClr val="accent1"/>
-          </a:effectRef>
-          <a:fontRef idx="minor">
-            <a:schemeClr val="lt1"/>
-          </a:fontRef>
-        </p:style>
-        <p:txBody>
-          <a:bodyPr rtlCol="0" anchor="ctr"/>
-          <a:lstStyle/>
-          <a:p>
-            <a:pPr algn="ctr"/>
-            <a:endParaRPr kumimoji="1" lang="zh-CN" altLang="en-US"/>
-          </a:p>
-        </p:txBody>
-      </p:sp>
-    </p:spTree>
-    <p:extLst>
-      <p:ext uri="{BB962C8B-B14F-4D97-AF65-F5344CB8AC3E}">
-        <p14:creationId xmlns:p14="http://schemas.microsoft.com/office/powerpoint/2010/main" val="918786018"/>
-      </p:ext>
-    </p:extLst>
-  </p:cSld>
-  <p:clrMapOvr>
-    <a:masterClrMapping/>
-  </p:clrMapOvr>
-  <p:timing>
-    <p:tnLst>
-      <p:par>
-        <p:cTn id="1" dur="indefinite" restart="never" nodeType="tmRoot">
-          <p:childTnLst>
-            <p:seq concurrent="1" nextAc="seek">
-              <p:cTn id="2" dur="indefinite" nodeType="mainSeq">
-                <p:childTnLst>
-                  <p:par>
-                    <p:cTn id="3" fill="hold">
-                      <p:stCondLst>
-                        <p:cond delay="indefinite"/>
-                      </p:stCondLst>
-                      <p:childTnLst>
-                        <p:par>
-                          <p:cTn id="4" fill="hold">
-                            <p:stCondLst>
-                              <p:cond delay="0"/>
-                            </p:stCondLst>
-                            <p:childTnLst>
-                              <p:par>
-                                <p:cTn id="5" presetID="1" presetClass="entr" presetSubtype="0" fill="hold" nodeType="clickEffect">
-                                  <p:stCondLst>
-                                    <p:cond delay="0"/>
-                                  </p:stCondLst>
-                                  <p:childTnLst>
-                                    <p:set>
-                                      <p:cBhvr>
-                                        <p:cTn id="6" dur="1" fill="hold">
-                                          <p:stCondLst>
-                                            <p:cond delay="0"/>
-                                          </p:stCondLst>
-                                        </p:cTn>
-                                        <p:tgtEl>
-                                          <p:spTgt spid="3">
-                                            <p:txEl>
-                                              <p:pRg st="3" end="3"/>
-                                            </p:txEl>
-                                          </p:spTgt>
-                                        </p:tgtEl>
-                                        <p:attrNameLst>
-                                          <p:attrName>style.visibility</p:attrName>
-                                        </p:attrNameLst>
-                                      </p:cBhvr>
-                                      <p:to>
-                                        <p:strVal val="visible"/>
-                                      </p:to>
-                                    </p:set>
-                                  </p:childTnLst>
-                                </p:cTn>
-                              </p:par>
-                              <p:par>
-                                <p:cTn id="7" presetID="1" presetClass="entr" presetSubtype="0" fill="hold" nodeType="withEffect">
-                                  <p:stCondLst>
-                                    <p:cond delay="0"/>
-                                  </p:stCondLst>
-                                  <p:childTnLst>
-                                    <p:set>
-                                      <p:cBhvr>
-                                        <p:cTn id="8" dur="1" fill="hold">
-                                          <p:stCondLst>
-                                            <p:cond delay="0"/>
-                                          </p:stCondLst>
-                                        </p:cTn>
-                                        <p:tgtEl>
-                                          <p:spTgt spid="3">
-                                            <p:txEl>
-                                              <p:pRg st="4" end="4"/>
-                                            </p:txEl>
-                                          </p:spTgt>
-                                        </p:tgtEl>
-                                        <p:attrNameLst>
-                                          <p:attrName>style.visibility</p:attrName>
-                                        </p:attrNameLst>
-                                      </p:cBhvr>
-                                      <p:to>
-                                        <p:strVal val="visible"/>
-                                      </p:to>
-                                    </p:set>
-                                  </p:childTnLst>
-                                </p:cTn>
-                              </p:par>
-                            </p:childTnLst>
-                          </p:cTn>
-                        </p:par>
-                      </p:childTnLst>
-                    </p:cTn>
-                  </p:par>
-                </p:childTnLst>
-              </p:cTn>
-              <p:prevCondLst>
-                <p:cond evt="onPrev" delay="0">
-                  <p:tgtEl>
-                    <p:sldTgt/>
-                  </p:tgtEl>
-                </p:cond>
-              </p:prevCondLst>
-              <p:nextCondLst>
-                <p:cond evt="onNext" delay="0">
-                  <p:tgtEl>
-                    <p:sldTgt/>
-                  </p:tgtEl>
-                </p:cond>
-              </p:nextCondLst>
-            </p:seq>
-          </p:childTnLst>
-        </p:cTn>
-      </p:par>
-    </p:tnLst>
-  </p:timing>
-</p:sld>
-</file>
-
-<file path=ppt/slides/slide9.xml><?xml version="1.0" encoding="utf-8"?>
-<p:sld xmlns:a="http://schemas.openxmlformats.org/drawingml/2006/main" xmlns:r="http://schemas.openxmlformats.org/officeDocument/2006/relationships" xmlns:p="http://schemas.openxmlformats.org/presentationml/2006/main">
-  <p:cSld>
-    <p:spTree>
-      <p:nvGrpSpPr>
-        <p:cNvPr id="1" name=""/>
-        <p:cNvGrpSpPr/>
-        <p:nvPr/>
-      </p:nvGrpSpPr>
-      <p:grpSpPr>
-        <a:xfrm>
-          <a:off x="0" y="0"/>
-          <a:ext cx="0" cy="0"/>
-          <a:chOff x="0" y="0"/>
-          <a:chExt cx="0" cy="0"/>
-        </a:xfrm>
-      </p:grpSpPr>
-      <p:sp>
-        <p:nvSpPr>
-          <p:cNvPr id="2" name="标题 1">
-            <a:extLst>
-              <a:ext uri="{FF2B5EF4-FFF2-40B4-BE49-F238E27FC236}">
-                <a16:creationId xmlns:a16="http://schemas.microsoft.com/office/drawing/2014/main" id="{3FC1A68A-6D8D-094B-9F52-F4FFBBC2FF2D}"/>
-              </a:ext>
-            </a:extLst>
-          </p:cNvPr>
-          <p:cNvSpPr>
-            <a:spLocks noGrp="1"/>
-          </p:cNvSpPr>
-          <p:nvPr>
-            <p:ph type="title"/>
-          </p:nvPr>
-        </p:nvSpPr>
-        <p:spPr/>
-        <p:txBody>
-          <a:bodyPr/>
-          <a:lstStyle/>
-          <a:p>
-            <a:r>
-              <a:rPr kumimoji="1" lang="en-US" altLang="zh-CN" dirty="0"/>
-              <a:t>Relational Expressions</a:t>
-            </a:r>
-            <a:endParaRPr kumimoji="1" lang="zh-CN" altLang="en-US" dirty="0"/>
-          </a:p>
-        </p:txBody>
-      </p:sp>
-      <p:sp>
-        <p:nvSpPr>
-          <p:cNvPr id="3" name="内容占位符 2">
-            <a:extLst>
-              <a:ext uri="{FF2B5EF4-FFF2-40B4-BE49-F238E27FC236}">
-                <a16:creationId xmlns:a16="http://schemas.microsoft.com/office/drawing/2014/main" id="{32D04BFD-D833-6F4B-B3D5-74584C331ABE}"/>
-              </a:ext>
-            </a:extLst>
-          </p:cNvPr>
-          <p:cNvSpPr>
-            <a:spLocks noGrp="1"/>
-          </p:cNvSpPr>
-          <p:nvPr>
-            <p:ph idx="1"/>
-          </p:nvPr>
-        </p:nvSpPr>
-        <p:spPr>
-          <a:xfrm>
-            <a:off x="838199" y="1326995"/>
-            <a:ext cx="11053879" cy="5266784"/>
-          </a:xfrm>
-        </p:spPr>
-        <p:txBody>
-          <a:bodyPr>
-            <a:normAutofit/>
-          </a:bodyPr>
-          <a:lstStyle/>
-          <a:p>
-            <a:r>
-              <a:rPr kumimoji="1" lang="en-US" altLang="zh-CN" dirty="0"/>
-              <a:t>The condition can be a relational expression</a:t>
-            </a:r>
-          </a:p>
-          <a:p>
-            <a:r>
-              <a:rPr kumimoji="1" lang="en-US" altLang="zh-CN" dirty="0"/>
-              <a:t>The 6 relational/comparison operators</a:t>
-            </a:r>
-          </a:p>
-          <a:p>
-            <a:endParaRPr kumimoji="1" lang="en-US" altLang="zh-CN" dirty="0"/>
-          </a:p>
-          <a:p>
-            <a:endParaRPr kumimoji="1" lang="en-US" altLang="zh-CN" dirty="0"/>
-          </a:p>
-          <a:p>
-            <a:endParaRPr kumimoji="1" lang="en-US" altLang="zh-CN" dirty="0"/>
-          </a:p>
-          <a:p>
-            <a:endParaRPr kumimoji="1" lang="en-US" altLang="zh-CN" dirty="0"/>
-          </a:p>
-          <a:p>
-            <a:endParaRPr kumimoji="1" lang="en-US" altLang="zh-CN" dirty="0"/>
-          </a:p>
-          <a:p>
-            <a:endParaRPr kumimoji="1" lang="en-US" altLang="zh-CN" dirty="0"/>
-          </a:p>
-          <a:p>
-            <a:r>
-              <a:rPr kumimoji="1" lang="en-US" altLang="zh-CN" dirty="0"/>
-              <a:t>Return </a:t>
-            </a:r>
-            <a:r>
-              <a:rPr kumimoji="1" lang="en-US" altLang="zh-CN" dirty="0">
-                <a:solidFill>
-                  <a:srgbClr val="FF0000"/>
-                </a:solidFill>
-              </a:rPr>
-              <a:t>1</a:t>
-            </a:r>
-            <a:r>
-              <a:rPr kumimoji="1" lang="en-US" altLang="zh-CN" dirty="0"/>
-              <a:t> if the condition (such as a==b) is true, </a:t>
-            </a:r>
-          </a:p>
-          <a:p>
-            <a:r>
-              <a:rPr kumimoji="1" lang="en-US" altLang="zh-CN" dirty="0"/>
-              <a:t>Return </a:t>
-            </a:r>
-            <a:r>
-              <a:rPr kumimoji="1" lang="en-US" altLang="zh-CN" dirty="0">
-                <a:solidFill>
-                  <a:srgbClr val="FF0000"/>
-                </a:solidFill>
-              </a:rPr>
-              <a:t>0</a:t>
-            </a:r>
-            <a:r>
-              <a:rPr kumimoji="1" lang="en-US" altLang="zh-CN" dirty="0"/>
-              <a:t> if the condition is false.</a:t>
-            </a:r>
-          </a:p>
-          <a:p>
-            <a:endParaRPr kumimoji="1" lang="en-US" altLang="zh-CN" dirty="0"/>
-          </a:p>
-          <a:p>
-            <a:endParaRPr kumimoji="1" lang="zh-CN" altLang="en-US" dirty="0"/>
-          </a:p>
-        </p:txBody>
-      </p:sp>
-      <p:graphicFrame>
-        <p:nvGraphicFramePr>
-          <p:cNvPr id="4" name="表格 3">
-            <a:extLst>
-              <a:ext uri="{FF2B5EF4-FFF2-40B4-BE49-F238E27FC236}">
-                <a16:creationId xmlns:a16="http://schemas.microsoft.com/office/drawing/2014/main" id="{50C801AF-7580-8C41-956B-F9CF0293EBB9}"/>
-              </a:ext>
-            </a:extLst>
-          </p:cNvPr>
-          <p:cNvGraphicFramePr>
-            <a:graphicFrameLocks noGrp="1"/>
-          </p:cNvGraphicFramePr>
-          <p:nvPr>
-            <p:extLst>
-              <p:ext uri="{D42A27DB-BD31-4B8C-83A1-F6EECF244321}">
-                <p14:modId xmlns:p14="http://schemas.microsoft.com/office/powerpoint/2010/main" val="4096309256"/>
-              </p:ext>
-            </p:extLst>
-          </p:nvPr>
-        </p:nvGraphicFramePr>
-        <p:xfrm>
-          <a:off x="1574469" y="2497329"/>
-          <a:ext cx="5257800" cy="2560320"/>
-        </p:xfrm>
-        <a:graphic>
-          <a:graphicData uri="http://schemas.openxmlformats.org/drawingml/2006/table">
-            <a:tbl>
-              <a:tblPr/>
-              <a:tblGrid>
-                <a:gridCol w="2628900">
-                  <a:extLst>
-                    <a:ext uri="{9D8B030D-6E8A-4147-A177-3AD203B41FA5}">
-                      <a16:colId xmlns:a16="http://schemas.microsoft.com/office/drawing/2014/main" val="2960181136"/>
-                    </a:ext>
-                  </a:extLst>
-                </a:gridCol>
-                <a:gridCol w="2628900">
-                  <a:extLst>
-                    <a:ext uri="{9D8B030D-6E8A-4147-A177-3AD203B41FA5}">
-                      <a16:colId xmlns:a16="http://schemas.microsoft.com/office/drawing/2014/main" val="3710773185"/>
-                    </a:ext>
-                  </a:extLst>
-                </a:gridCol>
-              </a:tblGrid>
-              <a:tr h="0">
-                <a:tc>
-                  <a:txBody>
-                    <a:bodyPr/>
-                    <a:lstStyle/>
-                    <a:p>
-                      <a:pPr algn="ctr"/>
-                      <a:r>
-                        <a:rPr lang="en" b="1" dirty="0">
-                          <a:effectLst/>
-                        </a:rPr>
-                        <a:t>Operator name</a:t>
-                      </a:r>
-                    </a:p>
-                  </a:txBody>
-                  <a:tcPr anchor="ctr">
-                    <a:lnL w="9525" cap="flat" cmpd="sng" algn="ctr">
-                      <a:solidFill>
-                        <a:srgbClr val="AAAAAA"/>
-                      </a:solidFill>
-                      <a:prstDash val="solid"/>
-                      <a:round/>
-                      <a:headEnd type="none" w="med" len="med"/>
-                      <a:tailEnd type="none" w="med" len="med"/>
-                    </a:lnL>
-                    <a:lnR w="9525" cap="flat" cmpd="sng" algn="ctr">
-                      <a:solidFill>
-                        <a:srgbClr val="AAAAAA"/>
-                      </a:solidFill>
-                      <a:prstDash val="solid"/>
-                      <a:round/>
-                      <a:headEnd type="none" w="med" len="med"/>
-                      <a:tailEnd type="none" w="med" len="med"/>
-                    </a:lnR>
-                    <a:lnT w="9525" cap="flat" cmpd="sng" algn="ctr">
-                      <a:solidFill>
-                        <a:srgbClr val="AAAAAA"/>
-                      </a:solidFill>
-                      <a:prstDash val="solid"/>
-                      <a:round/>
-                      <a:headEnd type="none" w="med" len="med"/>
-                      <a:tailEnd type="none" w="med" len="med"/>
-                    </a:lnT>
-                    <a:lnB w="9525" cap="flat" cmpd="sng" algn="ctr">
-                      <a:solidFill>
-                        <a:srgbClr val="AAAAAA"/>
-                      </a:solidFill>
-                      <a:prstDash val="solid"/>
-                      <a:round/>
-                      <a:headEnd type="none" w="med" len="med"/>
-                      <a:tailEnd type="none" w="med" len="med"/>
-                    </a:lnB>
-                    <a:solidFill>
-                      <a:srgbClr val="F2F2F2"/>
-                    </a:solidFill>
-                  </a:tcPr>
-                </a:tc>
-                <a:tc>
-                  <a:txBody>
-                    <a:bodyPr/>
-                    <a:lstStyle/>
-                    <a:p>
-                      <a:pPr algn="ctr"/>
-                      <a:r>
-                        <a:rPr lang="en" b="1" dirty="0">
-                          <a:effectLst/>
-                        </a:rPr>
-                        <a:t>Example</a:t>
-                      </a:r>
-                    </a:p>
-                  </a:txBody>
-                  <a:tcPr anchor="ctr">
-                    <a:lnL w="9525" cap="flat" cmpd="sng" algn="ctr">
-                      <a:solidFill>
-                        <a:srgbClr val="AAAAAA"/>
-                      </a:solidFill>
-                      <a:prstDash val="solid"/>
-                      <a:round/>
-                      <a:headEnd type="none" w="med" len="med"/>
-                      <a:tailEnd type="none" w="med" len="med"/>
-                    </a:lnL>
-                    <a:lnR w="9525" cap="flat" cmpd="sng" algn="ctr">
-                      <a:solidFill>
-                        <a:srgbClr val="AAAAAA"/>
-                      </a:solidFill>
-                      <a:prstDash val="solid"/>
-                      <a:round/>
-                      <a:headEnd type="none" w="med" len="med"/>
-                      <a:tailEnd type="none" w="med" len="med"/>
-                    </a:lnR>
-                    <a:lnT w="9525" cap="flat" cmpd="sng" algn="ctr">
-                      <a:solidFill>
-                        <a:srgbClr val="AAAAAA"/>
-                      </a:solidFill>
-                      <a:prstDash val="solid"/>
-                      <a:round/>
-                      <a:headEnd type="none" w="med" len="med"/>
-                      <a:tailEnd type="none" w="med" len="med"/>
-                    </a:lnT>
-                    <a:lnB w="9525" cap="flat" cmpd="sng" algn="ctr">
-                      <a:solidFill>
-                        <a:srgbClr val="AAAAAA"/>
-                      </a:solidFill>
-                      <a:prstDash val="solid"/>
-                      <a:round/>
-                      <a:headEnd type="none" w="med" len="med"/>
-                      <a:tailEnd type="none" w="med" len="med"/>
-                    </a:lnB>
-                    <a:solidFill>
-                      <a:srgbClr val="F2F2F2"/>
-                    </a:solidFill>
-                  </a:tcPr>
-                </a:tc>
-                <a:extLst>
-                  <a:ext uri="{0D108BD9-81ED-4DB2-BD59-A6C34878D82A}">
-                    <a16:rowId xmlns:a16="http://schemas.microsoft.com/office/drawing/2014/main" val="1585777870"/>
-                  </a:ext>
-                </a:extLst>
-              </a:tr>
-              <a:tr h="0">
-                <a:tc>
-                  <a:txBody>
-                    <a:bodyPr/>
-                    <a:lstStyle/>
-                    <a:p>
-                      <a:r>
-                        <a:rPr lang="en" dirty="0">
-                          <a:effectLst/>
-                        </a:rPr>
-                        <a:t>equal to</a:t>
-                      </a:r>
-                    </a:p>
-                  </a:txBody>
-                  <a:tcPr anchor="ctr">
-                    <a:lnL w="9525" cap="flat" cmpd="sng" algn="ctr">
-                      <a:solidFill>
-                        <a:srgbClr val="AAAAAA"/>
-                      </a:solidFill>
-                      <a:prstDash val="solid"/>
-                      <a:round/>
-                      <a:headEnd type="none" w="med" len="med"/>
-                      <a:tailEnd type="none" w="med" len="med"/>
-                    </a:lnL>
-                    <a:lnR w="9525" cap="flat" cmpd="sng" algn="ctr">
-                      <a:solidFill>
-                        <a:srgbClr val="AAAAAA"/>
-                      </a:solidFill>
-                      <a:prstDash val="solid"/>
-                      <a:round/>
-                      <a:headEnd type="none" w="med" len="med"/>
-                      <a:tailEnd type="none" w="med" len="med"/>
-                    </a:lnR>
-                    <a:lnT w="9525" cap="flat" cmpd="sng" algn="ctr">
-                      <a:solidFill>
-                        <a:srgbClr val="AAAAAA"/>
-                      </a:solidFill>
-                      <a:prstDash val="solid"/>
-                      <a:round/>
-                      <a:headEnd type="none" w="med" len="med"/>
-                      <a:tailEnd type="none" w="med" len="med"/>
-                    </a:lnT>
-                    <a:lnB w="9525" cap="flat" cmpd="sng" algn="ctr">
-                      <a:solidFill>
-                        <a:srgbClr val="AAAAAA"/>
-                      </a:solidFill>
-                      <a:prstDash val="solid"/>
-                      <a:round/>
-                      <a:headEnd type="none" w="med" len="med"/>
-                      <a:tailEnd type="none" w="med" len="med"/>
-                    </a:lnB>
-                    <a:solidFill>
-                      <a:srgbClr val="F9F9F9"/>
-                    </a:solidFill>
-                  </a:tcPr>
-                </a:tc>
-                <a:tc>
-                  <a:txBody>
-                    <a:bodyPr/>
-                    <a:lstStyle/>
-                    <a:p>
-                      <a:r>
-                        <a:rPr lang="en">
-                          <a:effectLst/>
-                          <a:latin typeface="Courier New" panose="02070309020205020404" pitchFamily="49" charset="0"/>
-                        </a:rPr>
-                        <a:t>a </a:t>
-                      </a:r>
-                      <a:r>
-                        <a:rPr lang="en">
-                          <a:solidFill>
-                            <a:srgbClr val="000080"/>
-                          </a:solidFill>
-                          <a:effectLst/>
-                          <a:latin typeface="Courier New" panose="02070309020205020404" pitchFamily="49" charset="0"/>
-                        </a:rPr>
-                        <a:t>==</a:t>
-                      </a:r>
-                      <a:r>
-                        <a:rPr lang="en">
-                          <a:effectLst/>
-                          <a:latin typeface="Courier New" panose="02070309020205020404" pitchFamily="49" charset="0"/>
-                        </a:rPr>
-                        <a:t> b</a:t>
-                      </a:r>
-                      <a:endParaRPr lang="en">
-                        <a:effectLst/>
-                      </a:endParaRPr>
-                    </a:p>
-                  </a:txBody>
-                  <a:tcPr anchor="ctr">
-                    <a:lnL w="9525" cap="flat" cmpd="sng" algn="ctr">
-                      <a:solidFill>
-                        <a:srgbClr val="AAAAAA"/>
-                      </a:solidFill>
-                      <a:prstDash val="solid"/>
-                      <a:round/>
-                      <a:headEnd type="none" w="med" len="med"/>
-                      <a:tailEnd type="none" w="med" len="med"/>
-                    </a:lnL>
-                    <a:lnR w="9525" cap="flat" cmpd="sng" algn="ctr">
-                      <a:solidFill>
-                        <a:srgbClr val="AAAAAA"/>
-                      </a:solidFill>
-                      <a:prstDash val="solid"/>
-                      <a:round/>
-                      <a:headEnd type="none" w="med" len="med"/>
-                      <a:tailEnd type="none" w="med" len="med"/>
-                    </a:lnR>
-                    <a:lnT w="9525" cap="flat" cmpd="sng" algn="ctr">
-                      <a:solidFill>
-                        <a:srgbClr val="AAAAAA"/>
-                      </a:solidFill>
-                      <a:prstDash val="solid"/>
-                      <a:round/>
-                      <a:headEnd type="none" w="med" len="med"/>
-                      <a:tailEnd type="none" w="med" len="med"/>
-                    </a:lnT>
-                    <a:lnB w="9525" cap="flat" cmpd="sng" algn="ctr">
-                      <a:solidFill>
-                        <a:srgbClr val="AAAAAA"/>
-                      </a:solidFill>
-                      <a:prstDash val="solid"/>
-                      <a:round/>
-                      <a:headEnd type="none" w="med" len="med"/>
-                      <a:tailEnd type="none" w="med" len="med"/>
-                    </a:lnB>
-                    <a:solidFill>
-                      <a:srgbClr val="F9F9F9"/>
-                    </a:solidFill>
-                  </a:tcPr>
-                </a:tc>
-                <a:extLst>
-                  <a:ext uri="{0D108BD9-81ED-4DB2-BD59-A6C34878D82A}">
-                    <a16:rowId xmlns:a16="http://schemas.microsoft.com/office/drawing/2014/main" val="3253263833"/>
-                  </a:ext>
-                </a:extLst>
-              </a:tr>
-              <a:tr h="0">
-                <a:tc>
-                  <a:txBody>
-                    <a:bodyPr/>
-                    <a:lstStyle/>
-                    <a:p>
-                      <a:r>
-                        <a:rPr lang="en">
-                          <a:effectLst/>
-                        </a:rPr>
-                        <a:t>not equal to</a:t>
-                      </a:r>
-                    </a:p>
-                  </a:txBody>
-                  <a:tcPr anchor="ctr">
-                    <a:lnL w="9525" cap="flat" cmpd="sng" algn="ctr">
-                      <a:solidFill>
-                        <a:srgbClr val="AAAAAA"/>
-                      </a:solidFill>
-                      <a:prstDash val="solid"/>
-                      <a:round/>
-                      <a:headEnd type="none" w="med" len="med"/>
-                      <a:tailEnd type="none" w="med" len="med"/>
-                    </a:lnL>
-                    <a:lnR w="9525" cap="flat" cmpd="sng" algn="ctr">
-                      <a:solidFill>
-                        <a:srgbClr val="AAAAAA"/>
-                      </a:solidFill>
-                      <a:prstDash val="solid"/>
-                      <a:round/>
-                      <a:headEnd type="none" w="med" len="med"/>
-                      <a:tailEnd type="none" w="med" len="med"/>
-                    </a:lnR>
-                    <a:lnT w="9525" cap="flat" cmpd="sng" algn="ctr">
-                      <a:solidFill>
-                        <a:srgbClr val="AAAAAA"/>
-                      </a:solidFill>
-                      <a:prstDash val="solid"/>
-                      <a:round/>
-                      <a:headEnd type="none" w="med" len="med"/>
-                      <a:tailEnd type="none" w="med" len="med"/>
-                    </a:lnT>
-                    <a:lnB w="9525" cap="flat" cmpd="sng" algn="ctr">
-                      <a:solidFill>
-                        <a:srgbClr val="AAAAAA"/>
-                      </a:solidFill>
-                      <a:prstDash val="solid"/>
-                      <a:round/>
-                      <a:headEnd type="none" w="med" len="med"/>
-                      <a:tailEnd type="none" w="med" len="med"/>
-                    </a:lnB>
-                    <a:solidFill>
-                      <a:srgbClr val="F9F9F9"/>
-                    </a:solidFill>
-                  </a:tcPr>
-                </a:tc>
-                <a:tc>
-                  <a:txBody>
-                    <a:bodyPr/>
-                    <a:lstStyle/>
-                    <a:p>
-                      <a:r>
-                        <a:rPr lang="en">
-                          <a:effectLst/>
-                          <a:latin typeface="Courier New" panose="02070309020205020404" pitchFamily="49" charset="0"/>
-                        </a:rPr>
-                        <a:t>a </a:t>
-                      </a:r>
-                      <a:r>
-                        <a:rPr lang="en">
-                          <a:solidFill>
-                            <a:srgbClr val="000040"/>
-                          </a:solidFill>
-                          <a:effectLst/>
-                          <a:latin typeface="Courier New" panose="02070309020205020404" pitchFamily="49" charset="0"/>
-                        </a:rPr>
-                        <a:t>!</a:t>
-                      </a:r>
-                      <a:r>
-                        <a:rPr lang="en">
-                          <a:solidFill>
-                            <a:srgbClr val="000080"/>
-                          </a:solidFill>
-                          <a:effectLst/>
-                          <a:latin typeface="Courier New" panose="02070309020205020404" pitchFamily="49" charset="0"/>
-                        </a:rPr>
-                        <a:t>=</a:t>
-                      </a:r>
-                      <a:r>
-                        <a:rPr lang="en">
-                          <a:effectLst/>
-                          <a:latin typeface="Courier New" panose="02070309020205020404" pitchFamily="49" charset="0"/>
-                        </a:rPr>
-                        <a:t> b</a:t>
-                      </a:r>
-                      <a:endParaRPr lang="en">
-                        <a:effectLst/>
-                      </a:endParaRPr>
-                    </a:p>
-                  </a:txBody>
-                  <a:tcPr anchor="ctr">
-                    <a:lnL w="9525" cap="flat" cmpd="sng" algn="ctr">
-                      <a:solidFill>
-                        <a:srgbClr val="AAAAAA"/>
-                      </a:solidFill>
-                      <a:prstDash val="solid"/>
-                      <a:round/>
-                      <a:headEnd type="none" w="med" len="med"/>
-                      <a:tailEnd type="none" w="med" len="med"/>
-                    </a:lnL>
-                    <a:lnR w="9525" cap="flat" cmpd="sng" algn="ctr">
-                      <a:solidFill>
-                        <a:srgbClr val="AAAAAA"/>
-                      </a:solidFill>
-                      <a:prstDash val="solid"/>
-                      <a:round/>
-                      <a:headEnd type="none" w="med" len="med"/>
-                      <a:tailEnd type="none" w="med" len="med"/>
-                    </a:lnR>
-                    <a:lnT w="9525" cap="flat" cmpd="sng" algn="ctr">
-                      <a:solidFill>
-                        <a:srgbClr val="AAAAAA"/>
-                      </a:solidFill>
-                      <a:prstDash val="solid"/>
-                      <a:round/>
-                      <a:headEnd type="none" w="med" len="med"/>
-                      <a:tailEnd type="none" w="med" len="med"/>
-                    </a:lnT>
-                    <a:lnB w="9525" cap="flat" cmpd="sng" algn="ctr">
-                      <a:solidFill>
-                        <a:srgbClr val="AAAAAA"/>
-                      </a:solidFill>
-                      <a:prstDash val="solid"/>
-                      <a:round/>
-                      <a:headEnd type="none" w="med" len="med"/>
-                      <a:tailEnd type="none" w="med" len="med"/>
-                    </a:lnB>
-                    <a:solidFill>
-                      <a:srgbClr val="F9F9F9"/>
-                    </a:solidFill>
-                  </a:tcPr>
-                </a:tc>
-                <a:extLst>
-                  <a:ext uri="{0D108BD9-81ED-4DB2-BD59-A6C34878D82A}">
-                    <a16:rowId xmlns:a16="http://schemas.microsoft.com/office/drawing/2014/main" val="28837203"/>
-                  </a:ext>
-                </a:extLst>
-              </a:tr>
-              <a:tr h="0">
-                <a:tc>
-                  <a:txBody>
-                    <a:bodyPr/>
-                    <a:lstStyle/>
-                    <a:p>
-                      <a:r>
-                        <a:rPr lang="en">
-                          <a:effectLst/>
-                        </a:rPr>
-                        <a:t>less than</a:t>
-                      </a:r>
-                    </a:p>
-                  </a:txBody>
-                  <a:tcPr anchor="ctr">
-                    <a:lnL w="9525" cap="flat" cmpd="sng" algn="ctr">
-                      <a:solidFill>
-                        <a:srgbClr val="AAAAAA"/>
-                      </a:solidFill>
-                      <a:prstDash val="solid"/>
-                      <a:round/>
-                      <a:headEnd type="none" w="med" len="med"/>
-                      <a:tailEnd type="none" w="med" len="med"/>
-                    </a:lnL>
-                    <a:lnR w="9525" cap="flat" cmpd="sng" algn="ctr">
-                      <a:solidFill>
-                        <a:srgbClr val="AAAAAA"/>
-                      </a:solidFill>
-                      <a:prstDash val="solid"/>
-                      <a:round/>
-                      <a:headEnd type="none" w="med" len="med"/>
-                      <a:tailEnd type="none" w="med" len="med"/>
-                    </a:lnR>
-                    <a:lnT w="9525" cap="flat" cmpd="sng" algn="ctr">
-                      <a:solidFill>
-                        <a:srgbClr val="AAAAAA"/>
-                      </a:solidFill>
-                      <a:prstDash val="solid"/>
-                      <a:round/>
-                      <a:headEnd type="none" w="med" len="med"/>
-                      <a:tailEnd type="none" w="med" len="med"/>
-                    </a:lnT>
-                    <a:lnB w="9525" cap="flat" cmpd="sng" algn="ctr">
-                      <a:solidFill>
-                        <a:srgbClr val="AAAAAA"/>
-                      </a:solidFill>
-                      <a:prstDash val="solid"/>
-                      <a:round/>
-                      <a:headEnd type="none" w="med" len="med"/>
-                      <a:tailEnd type="none" w="med" len="med"/>
-                    </a:lnB>
-                    <a:solidFill>
-                      <a:srgbClr val="F9F9F9"/>
-                    </a:solidFill>
-                  </a:tcPr>
-                </a:tc>
-                <a:tc>
-                  <a:txBody>
-                    <a:bodyPr/>
-                    <a:lstStyle/>
-                    <a:p>
-                      <a:r>
-                        <a:rPr lang="en">
-                          <a:effectLst/>
-                          <a:latin typeface="Courier New" panose="02070309020205020404" pitchFamily="49" charset="0"/>
-                        </a:rPr>
-                        <a:t>a </a:t>
-                      </a:r>
-                      <a:r>
-                        <a:rPr lang="en">
-                          <a:solidFill>
-                            <a:srgbClr val="000080"/>
-                          </a:solidFill>
-                          <a:effectLst/>
-                          <a:latin typeface="Courier New" panose="02070309020205020404" pitchFamily="49" charset="0"/>
-                        </a:rPr>
-                        <a:t>&lt;</a:t>
-                      </a:r>
-                      <a:r>
-                        <a:rPr lang="en">
-                          <a:effectLst/>
-                          <a:latin typeface="Courier New" panose="02070309020205020404" pitchFamily="49" charset="0"/>
-                        </a:rPr>
-                        <a:t> b</a:t>
-                      </a:r>
-                      <a:endParaRPr lang="en">
-                        <a:effectLst/>
-                      </a:endParaRPr>
-                    </a:p>
-                  </a:txBody>
-                  <a:tcPr anchor="ctr">
-                    <a:lnL w="9525" cap="flat" cmpd="sng" algn="ctr">
-                      <a:solidFill>
-                        <a:srgbClr val="AAAAAA"/>
-                      </a:solidFill>
-                      <a:prstDash val="solid"/>
-                      <a:round/>
-                      <a:headEnd type="none" w="med" len="med"/>
-                      <a:tailEnd type="none" w="med" len="med"/>
-                    </a:lnL>
-                    <a:lnR w="9525" cap="flat" cmpd="sng" algn="ctr">
-                      <a:solidFill>
-                        <a:srgbClr val="AAAAAA"/>
-                      </a:solidFill>
-                      <a:prstDash val="solid"/>
-                      <a:round/>
-                      <a:headEnd type="none" w="med" len="med"/>
-                      <a:tailEnd type="none" w="med" len="med"/>
-                    </a:lnR>
-                    <a:lnT w="9525" cap="flat" cmpd="sng" algn="ctr">
-                      <a:solidFill>
-                        <a:srgbClr val="AAAAAA"/>
-                      </a:solidFill>
-                      <a:prstDash val="solid"/>
-                      <a:round/>
-                      <a:headEnd type="none" w="med" len="med"/>
-                      <a:tailEnd type="none" w="med" len="med"/>
-                    </a:lnT>
-                    <a:lnB w="9525" cap="flat" cmpd="sng" algn="ctr">
-                      <a:solidFill>
-                        <a:srgbClr val="AAAAAA"/>
-                      </a:solidFill>
-                      <a:prstDash val="solid"/>
-                      <a:round/>
-                      <a:headEnd type="none" w="med" len="med"/>
-                      <a:tailEnd type="none" w="med" len="med"/>
-                    </a:lnB>
-                    <a:solidFill>
-                      <a:srgbClr val="F9F9F9"/>
-                    </a:solidFill>
-                  </a:tcPr>
-                </a:tc>
-                <a:extLst>
-                  <a:ext uri="{0D108BD9-81ED-4DB2-BD59-A6C34878D82A}">
-                    <a16:rowId xmlns:a16="http://schemas.microsoft.com/office/drawing/2014/main" val="1168153131"/>
-                  </a:ext>
-                </a:extLst>
-              </a:tr>
-              <a:tr h="0">
-                <a:tc>
-                  <a:txBody>
-                    <a:bodyPr/>
-                    <a:lstStyle/>
-                    <a:p>
-                      <a:r>
-                        <a:rPr lang="en">
-                          <a:effectLst/>
-                        </a:rPr>
-                        <a:t>greater than</a:t>
-                      </a:r>
-                    </a:p>
-                  </a:txBody>
-                  <a:tcPr anchor="ctr">
-                    <a:lnL w="9525" cap="flat" cmpd="sng" algn="ctr">
-                      <a:solidFill>
-                        <a:srgbClr val="AAAAAA"/>
-                      </a:solidFill>
-                      <a:prstDash val="solid"/>
-                      <a:round/>
-                      <a:headEnd type="none" w="med" len="med"/>
-                      <a:tailEnd type="none" w="med" len="med"/>
-                    </a:lnL>
-                    <a:lnR w="9525" cap="flat" cmpd="sng" algn="ctr">
-                      <a:solidFill>
-                        <a:srgbClr val="AAAAAA"/>
-                      </a:solidFill>
-                      <a:prstDash val="solid"/>
-                      <a:round/>
-                      <a:headEnd type="none" w="med" len="med"/>
-                      <a:tailEnd type="none" w="med" len="med"/>
-                    </a:lnR>
-                    <a:lnT w="9525" cap="flat" cmpd="sng" algn="ctr">
-                      <a:solidFill>
-                        <a:srgbClr val="AAAAAA"/>
-                      </a:solidFill>
-                      <a:prstDash val="solid"/>
-                      <a:round/>
-                      <a:headEnd type="none" w="med" len="med"/>
-                      <a:tailEnd type="none" w="med" len="med"/>
-                    </a:lnT>
-                    <a:lnB w="9525" cap="flat" cmpd="sng" algn="ctr">
-                      <a:solidFill>
-                        <a:srgbClr val="AAAAAA"/>
-                      </a:solidFill>
-                      <a:prstDash val="solid"/>
-                      <a:round/>
-                      <a:headEnd type="none" w="med" len="med"/>
-                      <a:tailEnd type="none" w="med" len="med"/>
-                    </a:lnB>
-                    <a:solidFill>
-                      <a:srgbClr val="F9F9F9"/>
-                    </a:solidFill>
-                  </a:tcPr>
-                </a:tc>
-                <a:tc>
-                  <a:txBody>
-                    <a:bodyPr/>
-                    <a:lstStyle/>
-                    <a:p>
-                      <a:r>
-                        <a:rPr lang="en">
-                          <a:effectLst/>
-                          <a:latin typeface="Courier New" panose="02070309020205020404" pitchFamily="49" charset="0"/>
-                        </a:rPr>
-                        <a:t>a </a:t>
-                      </a:r>
-                      <a:r>
-                        <a:rPr lang="en">
-                          <a:solidFill>
-                            <a:srgbClr val="000080"/>
-                          </a:solidFill>
-                          <a:effectLst/>
-                          <a:latin typeface="Courier New" panose="02070309020205020404" pitchFamily="49" charset="0"/>
-                        </a:rPr>
-                        <a:t>&gt;</a:t>
-                      </a:r>
-                      <a:r>
-                        <a:rPr lang="en">
-                          <a:effectLst/>
-                          <a:latin typeface="Courier New" panose="02070309020205020404" pitchFamily="49" charset="0"/>
-                        </a:rPr>
-                        <a:t> b</a:t>
-                      </a:r>
-                      <a:endParaRPr lang="en">
-                        <a:effectLst/>
-                      </a:endParaRPr>
-                    </a:p>
-                  </a:txBody>
-                  <a:tcPr anchor="ctr">
-                    <a:lnL w="9525" cap="flat" cmpd="sng" algn="ctr">
-                      <a:solidFill>
-                        <a:srgbClr val="AAAAAA"/>
-                      </a:solidFill>
-                      <a:prstDash val="solid"/>
-                      <a:round/>
-                      <a:headEnd type="none" w="med" len="med"/>
-                      <a:tailEnd type="none" w="med" len="med"/>
-                    </a:lnL>
-                    <a:lnR w="9525" cap="flat" cmpd="sng" algn="ctr">
-                      <a:solidFill>
-                        <a:srgbClr val="AAAAAA"/>
-                      </a:solidFill>
-                      <a:prstDash val="solid"/>
-                      <a:round/>
-                      <a:headEnd type="none" w="med" len="med"/>
-                      <a:tailEnd type="none" w="med" len="med"/>
-                    </a:lnR>
-                    <a:lnT w="9525" cap="flat" cmpd="sng" algn="ctr">
-                      <a:solidFill>
-                        <a:srgbClr val="AAAAAA"/>
-                      </a:solidFill>
-                      <a:prstDash val="solid"/>
-                      <a:round/>
-                      <a:headEnd type="none" w="med" len="med"/>
-                      <a:tailEnd type="none" w="med" len="med"/>
-                    </a:lnT>
-                    <a:lnB w="9525" cap="flat" cmpd="sng" algn="ctr">
-                      <a:solidFill>
-                        <a:srgbClr val="AAAAAA"/>
-                      </a:solidFill>
-                      <a:prstDash val="solid"/>
-                      <a:round/>
-                      <a:headEnd type="none" w="med" len="med"/>
-                      <a:tailEnd type="none" w="med" len="med"/>
-                    </a:lnB>
-                    <a:solidFill>
-                      <a:srgbClr val="F9F9F9"/>
-                    </a:solidFill>
-                  </a:tcPr>
-                </a:tc>
-                <a:extLst>
-                  <a:ext uri="{0D108BD9-81ED-4DB2-BD59-A6C34878D82A}">
-                    <a16:rowId xmlns:a16="http://schemas.microsoft.com/office/drawing/2014/main" val="1762171246"/>
-                  </a:ext>
-                </a:extLst>
-              </a:tr>
-              <a:tr h="0">
-                <a:tc>
-                  <a:txBody>
-                    <a:bodyPr/>
-                    <a:lstStyle/>
-                    <a:p>
-                      <a:r>
-                        <a:rPr lang="en">
-                          <a:effectLst/>
-                        </a:rPr>
-                        <a:t>less than or equal to</a:t>
-                      </a:r>
-                    </a:p>
-                  </a:txBody>
-                  <a:tcPr anchor="ctr">
-                    <a:lnL w="9525" cap="flat" cmpd="sng" algn="ctr">
-                      <a:solidFill>
-                        <a:srgbClr val="AAAAAA"/>
-                      </a:solidFill>
-                      <a:prstDash val="solid"/>
-                      <a:round/>
-                      <a:headEnd type="none" w="med" len="med"/>
-                      <a:tailEnd type="none" w="med" len="med"/>
-                    </a:lnL>
-                    <a:lnR w="9525" cap="flat" cmpd="sng" algn="ctr">
-                      <a:solidFill>
-                        <a:srgbClr val="AAAAAA"/>
-                      </a:solidFill>
-                      <a:prstDash val="solid"/>
-                      <a:round/>
-                      <a:headEnd type="none" w="med" len="med"/>
-                      <a:tailEnd type="none" w="med" len="med"/>
-                    </a:lnR>
-                    <a:lnT w="9525" cap="flat" cmpd="sng" algn="ctr">
-                      <a:solidFill>
-                        <a:srgbClr val="AAAAAA"/>
-                      </a:solidFill>
-                      <a:prstDash val="solid"/>
-                      <a:round/>
-                      <a:headEnd type="none" w="med" len="med"/>
-                      <a:tailEnd type="none" w="med" len="med"/>
-                    </a:lnT>
-                    <a:lnB w="9525" cap="flat" cmpd="sng" algn="ctr">
-                      <a:solidFill>
-                        <a:srgbClr val="AAAAAA"/>
-                      </a:solidFill>
-                      <a:prstDash val="solid"/>
-                      <a:round/>
-                      <a:headEnd type="none" w="med" len="med"/>
-                      <a:tailEnd type="none" w="med" len="med"/>
-                    </a:lnB>
-                    <a:solidFill>
-                      <a:srgbClr val="F9F9F9"/>
-                    </a:solidFill>
-                  </a:tcPr>
-                </a:tc>
-                <a:tc>
-                  <a:txBody>
-                    <a:bodyPr/>
-                    <a:lstStyle/>
-                    <a:p>
-                      <a:r>
-                        <a:rPr lang="en" dirty="0">
-                          <a:effectLst/>
-                          <a:latin typeface="Courier New" panose="02070309020205020404" pitchFamily="49" charset="0"/>
-                        </a:rPr>
-                        <a:t>a </a:t>
-                      </a:r>
-                      <a:r>
-                        <a:rPr lang="en" dirty="0">
-                          <a:solidFill>
-                            <a:srgbClr val="000080"/>
-                          </a:solidFill>
-                          <a:effectLst/>
-                          <a:latin typeface="Courier New" panose="02070309020205020404" pitchFamily="49" charset="0"/>
-                        </a:rPr>
-                        <a:t>&lt;=</a:t>
-                      </a:r>
-                      <a:r>
-                        <a:rPr lang="en" dirty="0">
-                          <a:effectLst/>
-                          <a:latin typeface="Courier New" panose="02070309020205020404" pitchFamily="49" charset="0"/>
-                        </a:rPr>
-                        <a:t> b</a:t>
-                      </a:r>
-                      <a:endParaRPr lang="en" dirty="0">
-                        <a:effectLst/>
-                      </a:endParaRPr>
-                    </a:p>
-                  </a:txBody>
-                  <a:tcPr anchor="ctr">
-                    <a:lnL w="9525" cap="flat" cmpd="sng" algn="ctr">
-                      <a:solidFill>
-                        <a:srgbClr val="AAAAAA"/>
-                      </a:solidFill>
-                      <a:prstDash val="solid"/>
-                      <a:round/>
-                      <a:headEnd type="none" w="med" len="med"/>
-                      <a:tailEnd type="none" w="med" len="med"/>
-                    </a:lnL>
-                    <a:lnR w="9525" cap="flat" cmpd="sng" algn="ctr">
-                      <a:solidFill>
-                        <a:srgbClr val="AAAAAA"/>
-                      </a:solidFill>
-                      <a:prstDash val="solid"/>
-                      <a:round/>
-                      <a:headEnd type="none" w="med" len="med"/>
-                      <a:tailEnd type="none" w="med" len="med"/>
-                    </a:lnR>
-                    <a:lnT w="9525" cap="flat" cmpd="sng" algn="ctr">
-                      <a:solidFill>
-                        <a:srgbClr val="AAAAAA"/>
-                      </a:solidFill>
-                      <a:prstDash val="solid"/>
-                      <a:round/>
-                      <a:headEnd type="none" w="med" len="med"/>
-                      <a:tailEnd type="none" w="med" len="med"/>
-                    </a:lnT>
-                    <a:lnB w="9525" cap="flat" cmpd="sng" algn="ctr">
-                      <a:solidFill>
-                        <a:srgbClr val="AAAAAA"/>
-                      </a:solidFill>
-                      <a:prstDash val="solid"/>
-                      <a:round/>
-                      <a:headEnd type="none" w="med" len="med"/>
-                      <a:tailEnd type="none" w="med" len="med"/>
-                    </a:lnB>
-                    <a:solidFill>
-                      <a:srgbClr val="F9F9F9"/>
-                    </a:solidFill>
-                  </a:tcPr>
-                </a:tc>
-                <a:extLst>
-                  <a:ext uri="{0D108BD9-81ED-4DB2-BD59-A6C34878D82A}">
-                    <a16:rowId xmlns:a16="http://schemas.microsoft.com/office/drawing/2014/main" val="562538222"/>
-                  </a:ext>
-                </a:extLst>
-              </a:tr>
-              <a:tr h="0">
-                <a:tc>
-                  <a:txBody>
-                    <a:bodyPr/>
-                    <a:lstStyle/>
-                    <a:p>
-                      <a:r>
-                        <a:rPr lang="en" dirty="0">
-                          <a:effectLst/>
-                        </a:rPr>
-                        <a:t>greater than or equal to</a:t>
-                      </a:r>
-                    </a:p>
-                  </a:txBody>
-                  <a:tcPr anchor="ctr">
-                    <a:lnL w="9525" cap="flat" cmpd="sng" algn="ctr">
-                      <a:solidFill>
-                        <a:srgbClr val="AAAAAA"/>
-                      </a:solidFill>
-                      <a:prstDash val="solid"/>
-                      <a:round/>
-                      <a:headEnd type="none" w="med" len="med"/>
-                      <a:tailEnd type="none" w="med" len="med"/>
-                    </a:lnL>
-                    <a:lnR w="9525" cap="flat" cmpd="sng" algn="ctr">
-                      <a:solidFill>
-                        <a:srgbClr val="AAAAAA"/>
-                      </a:solidFill>
-                      <a:prstDash val="solid"/>
-                      <a:round/>
-                      <a:headEnd type="none" w="med" len="med"/>
-                      <a:tailEnd type="none" w="med" len="med"/>
-                    </a:lnR>
-                    <a:lnT w="9525" cap="flat" cmpd="sng" algn="ctr">
-                      <a:solidFill>
-                        <a:srgbClr val="AAAAAA"/>
-                      </a:solidFill>
-                      <a:prstDash val="solid"/>
-                      <a:round/>
-                      <a:headEnd type="none" w="med" len="med"/>
-                      <a:tailEnd type="none" w="med" len="med"/>
-                    </a:lnT>
-                    <a:lnB w="9525" cap="flat" cmpd="sng" algn="ctr">
-                      <a:solidFill>
-                        <a:srgbClr val="AAAAAA"/>
-                      </a:solidFill>
-                      <a:prstDash val="solid"/>
-                      <a:round/>
-                      <a:headEnd type="none" w="med" len="med"/>
-                      <a:tailEnd type="none" w="med" len="med"/>
-                    </a:lnB>
-                    <a:solidFill>
-                      <a:srgbClr val="F9F9F9"/>
-                    </a:solidFill>
-                  </a:tcPr>
-                </a:tc>
-                <a:tc>
-                  <a:txBody>
-                    <a:bodyPr/>
-                    <a:lstStyle/>
-                    <a:p>
-                      <a:r>
-                        <a:rPr lang="en" dirty="0">
-                          <a:effectLst/>
-                          <a:latin typeface="Courier New" panose="02070309020205020404" pitchFamily="49" charset="0"/>
-                        </a:rPr>
-                        <a:t>a </a:t>
-                      </a:r>
-                      <a:r>
-                        <a:rPr lang="en" dirty="0">
-                          <a:solidFill>
-                            <a:srgbClr val="000080"/>
-                          </a:solidFill>
-                          <a:effectLst/>
-                          <a:latin typeface="Courier New" panose="02070309020205020404" pitchFamily="49" charset="0"/>
-                        </a:rPr>
-                        <a:t>&gt;=</a:t>
-                      </a:r>
-                      <a:r>
-                        <a:rPr lang="en" dirty="0">
-                          <a:effectLst/>
-                          <a:latin typeface="Courier New" panose="02070309020205020404" pitchFamily="49" charset="0"/>
-                        </a:rPr>
-                        <a:t> b</a:t>
-                      </a:r>
-                      <a:endParaRPr lang="en" dirty="0">
-                        <a:effectLst/>
-                      </a:endParaRPr>
-                    </a:p>
-                  </a:txBody>
-                  <a:tcPr anchor="ctr">
-                    <a:lnL w="9525" cap="flat" cmpd="sng" algn="ctr">
-                      <a:solidFill>
-                        <a:srgbClr val="AAAAAA"/>
-                      </a:solidFill>
-                      <a:prstDash val="solid"/>
-                      <a:round/>
-                      <a:headEnd type="none" w="med" len="med"/>
-                      <a:tailEnd type="none" w="med" len="med"/>
-                    </a:lnL>
-                    <a:lnR w="9525" cap="flat" cmpd="sng" algn="ctr">
-                      <a:solidFill>
-                        <a:srgbClr val="AAAAAA"/>
-                      </a:solidFill>
-                      <a:prstDash val="solid"/>
-                      <a:round/>
-                      <a:headEnd type="none" w="med" len="med"/>
-                      <a:tailEnd type="none" w="med" len="med"/>
-                    </a:lnR>
-                    <a:lnT w="9525" cap="flat" cmpd="sng" algn="ctr">
-                      <a:solidFill>
-                        <a:srgbClr val="AAAAAA"/>
-                      </a:solidFill>
-                      <a:prstDash val="solid"/>
-                      <a:round/>
-                      <a:headEnd type="none" w="med" len="med"/>
-                      <a:tailEnd type="none" w="med" len="med"/>
-                    </a:lnT>
-                    <a:lnB w="9525" cap="flat" cmpd="sng" algn="ctr">
-                      <a:solidFill>
-                        <a:srgbClr val="AAAAAA"/>
-                      </a:solidFill>
-                      <a:prstDash val="solid"/>
-                      <a:round/>
-                      <a:headEnd type="none" w="med" len="med"/>
-                      <a:tailEnd type="none" w="med" len="med"/>
-                    </a:lnB>
-                    <a:solidFill>
-                      <a:srgbClr val="F9F9F9"/>
-                    </a:solidFill>
-                  </a:tcPr>
-                </a:tc>
-                <a:extLst>
-                  <a:ext uri="{0D108BD9-81ED-4DB2-BD59-A6C34878D82A}">
-                    <a16:rowId xmlns:a16="http://schemas.microsoft.com/office/drawing/2014/main" val="3816769454"/>
-                  </a:ext>
-                </a:extLst>
-              </a:tr>
-            </a:tbl>
-          </a:graphicData>
-        </a:graphic>
-      </p:graphicFrame>
-    </p:spTree>
-    <p:extLst>
-      <p:ext uri="{BB962C8B-B14F-4D97-AF65-F5344CB8AC3E}">
-        <p14:creationId xmlns:p14="http://schemas.microsoft.com/office/powerpoint/2010/main" val="1953677503"/>
       </p:ext>
     </p:extLst>
   </p:cSld>
